--- a/decks/running-the-show-lesson-v2.pptx
+++ b/decks/running-the-show-lesson-v2.pptx
@@ -655,7 +655,7 @@
           <a:lstStyle/>
           <a:p>
             <a:r>
-              <a:t>2 MINUTES. Students can set the alarm right now if phones are allowed, or write the day and time on the card. Share the take-home link (post it on your class page too). It has the three offloads, the weekly review, a private check-in, and who to talk to. Mention when to ask for more: if they've tried real systems for a few weeks and are still behind in several classes, or have struggled with focus, losing things, or time for as long as they can remember, a counselor or learning specialist can help them look at it. That can lead to supports like a 504 plan, and colleges have disability services offices too.</a:t>
+              <a:t>2 MINUTES. Students can set the alarm right now if phones are allowed, or write the day and time on the card. Share the take-home link (post it on your class page too). It has the three offloads, the weekly review, a private check-in, and who to talk to. Mention when to ask for more: if they've tried real systems for a few weeks and are still behind in several classes, or have struggled with focus, losing things, or time for as long as they can remember, a counselor or learning specialist can help them look at it. That can lead to supports like a learning plan, and colleges have disability services offices too.</a:t>
             </a:r>
           </a:p>
         </p:txBody>
@@ -7047,7 +7047,7 @@
                 </a:solidFill>
                 <a:latin typeface="Source Serif 4"/>
               </a:rPr>
-              <a:t>Some have a diagnosis and a 504 plan, some are waiting on an evaluation, and some have never been checked. Never ask who has ADHD or who has a plan. Talk about executive function as skills everyone uses, with some brains working harder at them.</a:t>
+              <a:t>Some have a diagnosis and a learning plan, some are waiting on an evaluation, and some have never been checked. Never ask who has ADHD or who has a plan. Talk about executive function as skills everyone uses, with some brains working harder at them.</a:t>
             </a:r>
           </a:p>
           <a:p>
@@ -7214,7 +7214,7 @@
                 </a:solidFill>
                 <a:latin typeface="Source Serif 4"/>
               </a:rPr>
-              <a:t>If a student says "I've always been like this," thank them and point them to a counselor or learning specialist after class. Know ahead of time who that is and how a 504 conversation starts, so you can answer in one sentence.</a:t>
+              <a:t>If a student says "I've always been like this," thank them and point them to a counselor or learning specialist after class. Know ahead of time who that is and how a learning plan conversation starts, so you can answer in one sentence.</a:t>
             </a:r>
           </a:p>
           <a:p>
@@ -7664,7 +7664,7 @@
                 </a:solidFill>
                 <a:latin typeface="Source Serif 4"/>
               </a:rPr>
-              <a:t>ADHD is largely a difference in executive function and has nothing to do with intelligence or effort. More outside structure helps. Some families are wary of evaluations or labels; present an evaluation as information that can open supports like a 504 plan, and leave the decision with the student and family.</a:t>
+              <a:t>ADHD is largely a difference in executive function and has nothing to do with intelligence or effort. More outside structure helps. Some families are wary of evaluations or labels; present an evaluation as information that can open supports like a learning plan, and leave the decision with the student and family.</a:t>
             </a:r>
           </a:p>
           <a:p>

--- a/decks/running-the-show-lesson-v2.pptx
+++ b/decks/running-the-show-lesson-v2.pptx
@@ -19,6 +19,7 @@
     <p:sldId id="267" r:id="rId19"/>
     <p:sldId id="268" r:id="rId20"/>
     <p:sldId id="269" r:id="rId21"/>
+    <p:sldId id="270" r:id="rId22"/>
   </p:sldIdLst>
   <p:sldSz cx="12192000" cy="6858000" type="screen4x3"/>
   <p:notesSz cx="6858000" cy="9144000"/>
@@ -515,7 +516,7 @@
           <a:lstStyle/>
           <a:p>
             <a:r>
-              <a:t>This page and the next three are hidden. They stay in the deck for you and are skipped when you present.</a:t>
+              <a:t>This page is hidden and skipped when you present. The full plan, care notes and research are on the hidden pages at the end of the deck, if you want them.</a:t>
             </a:r>
           </a:p>
         </p:txBody>
@@ -656,6 +657,76 @@
           <a:p>
             <a:r>
               <a:t>2 MINUTES. Students can set the alarm right now if phones are allowed, or write the day and time on the card. Share the take-home link (post it on your class page too). It has the three offloads, the weekly review, a private check-in, and who to talk to. Mention when to ask for more: if they've tried real systems for a few weeks and are still behind in several classes, or have struggled with focus, losing things, or time for as long as they can remember, a counselor or learning specialist can help them look at it. That can lead to supports like a learning plan, and colleges have disability services offices too.</a:t>
+            </a:r>
+          </a:p>
+        </p:txBody>
+      </p:sp>
+      <p:sp>
+        <p:nvSpPr>
+          <p:cNvPr id="4" name="Slide Number Placeholder 3"/>
+          <p:cNvSpPr>
+            <a:spLocks noGrp="1"/>
+          </p:cNvSpPr>
+          <p:nvPr>
+            <p:ph type="sldNum" idx="5" sz="quarter"/>
+          </p:nvPr>
+        </p:nvSpPr>
+        <p:spPr/>
+      </p:sp>
+    </p:spTree>
+  </p:cSld>
+  <p:clrMapOvr>
+    <a:masterClrMapping/>
+  </p:clrMapOvr>
+</p:notes>
+</file>
+
+<file path=ppt/notesSlides/notesSlide12.xml><?xml version="1.0" encoding="utf-8"?>
+<p:notes xmlns:a="http://schemas.openxmlformats.org/drawingml/2006/main" xmlns:p="http://schemas.openxmlformats.org/presentationml/2006/main" xmlns:r="http://schemas.openxmlformats.org/officeDocument/2006/relationships">
+  <p:cSld>
+    <p:spTree>
+      <p:nvGrpSpPr>
+        <p:cNvPr id="1" name=""/>
+        <p:cNvGrpSpPr/>
+        <p:nvPr/>
+      </p:nvGrpSpPr>
+      <p:grpSpPr>
+        <a:xfrm>
+          <a:off x="0" y="0"/>
+          <a:ext cx="0" cy="0"/>
+          <a:chOff x="0" y="0"/>
+          <a:chExt cx="0" cy="0"/>
+        </a:xfrm>
+      </p:grpSpPr>
+      <p:sp>
+        <p:nvSpPr>
+          <p:cNvPr id="2" name="Slide Image Placeholder 1"/>
+          <p:cNvSpPr>
+            <a:spLocks noGrp="1"/>
+          </p:cNvSpPr>
+          <p:nvPr>
+            <p:ph type="sldImg" idx="2"/>
+          </p:nvPr>
+        </p:nvSpPr>
+        <p:spPr/>
+      </p:sp>
+      <p:sp>
+        <p:nvSpPr>
+          <p:cNvPr id="3" name="Notes Placeholder 2"/>
+          <p:cNvSpPr>
+            <a:spLocks noGrp="1"/>
+          </p:cNvSpPr>
+          <p:nvPr>
+            <p:ph type="body" idx="3" sz="quarter"/>
+          </p:nvPr>
+        </p:nvSpPr>
+        <p:spPr/>
+        <p:txBody>
+          <a:bodyPr/>
+          <a:lstStyle/>
+          <a:p>
+            <a:r>
+              <a:t>If you want more: this page and the next three are hidden and skipped when you present.</a:t>
             </a:r>
           </a:p>
         </p:txBody>
@@ -4307,7 +4378,7 @@
                 </a:solidFill>
                 <a:latin typeface="Inter Tight"/>
               </a:rPr>
-              <a:t>TEACHER PAGE  ·  skipped when you present  ·  Lesson plan</a:t>
+              <a:t>TEACHER PAGE  ·  skipped when you present  ·  Before you start</a:t>
             </a:r>
           </a:p>
         </p:txBody>
@@ -4398,8 +4469,8 @@
         </p:nvSpPr>
         <p:spPr>
           <a:xfrm>
-            <a:off x="548640" y="1828800"/>
-            <a:ext cx="5120640" cy="4389120"/>
+            <a:off x="548640" y="2011680"/>
+            <a:ext cx="11064240" cy="4206240"/>
           </a:xfrm>
           <a:prstGeom prst="rect">
             <a:avLst/>
@@ -4414,43 +4485,43 @@
           <a:p>
             <a:pPr algn="l">
               <a:spcAft>
-                <a:spcPts val="675"/>
-              </a:spcAft>
-            </a:pPr>
-            <a:r>
-              <a:rPr sz="1100" b="1" i="0">
+                <a:spcPts val="810"/>
+              </a:spcAft>
+            </a:pPr>
+            <a:r>
+              <a:rPr sz="1200" b="1" i="0">
                 <a:solidFill>
                   <a:srgbClr val="0B2D5B"/>
                 </a:solidFill>
                 <a:latin typeface="Inter Tight"/>
               </a:rPr>
-              <a:t>GOAL</a:t>
-            </a:r>
-          </a:p>
-          <a:p>
-            <a:pPr algn="l">
-              <a:spcAft>
-                <a:spcPts val="675"/>
-              </a:spcAft>
-            </a:pPr>
-            <a:r>
-              <a:rPr sz="1500" b="0" i="0">
+              <a:t>BEFORE YOU START</a:t>
+            </a:r>
+          </a:p>
+          <a:p>
+            <a:pPr algn="l">
+              <a:spcAft>
+                <a:spcPts val="810"/>
+              </a:spcAft>
+            </a:pPr>
+            <a:r>
+              <a:rPr sz="1800" b="0" i="0">
                 <a:solidFill>
                   <a:srgbClr val="1C1B19"/>
                 </a:solidFill>
                 <a:latin typeface="Source Serif 4"/>
               </a:rPr>
-              <a:t>Students can name the three skills behind getting things done (working memory, inhibition, flexibility), explain why sleep and stress change how organized anyone looks, and leave with a five-line system that moves the job out of their head: one capture point, a room set up against distraction, a plan B, and a weekly review.</a:t>
-            </a:r>
-          </a:p>
-          <a:p>
-            <a:pPr algn="l">
-              <a:spcAft>
-                <a:spcPts val="675"/>
-              </a:spcAft>
-            </a:pPr>
-            <a:r>
-              <a:rPr sz="1500" b="0" i="0">
+              <a:t>Students learn the three skills behind getting things done and leave with a five-line system that moves the job out of their head. Bring index cards, drop the word "lazy," and assume students with ADHD or learning differences are in the room without ever asking who.</a:t>
+            </a:r>
+          </a:p>
+          <a:p>
+            <a:pPr algn="l">
+              <a:spcAft>
+                <a:spcPts val="810"/>
+              </a:spcAft>
+            </a:pPr>
+            <a:r>
+              <a:rPr sz="1800" b="0" i="0">
                 <a:solidFill>
                   <a:srgbClr val="1C1B19"/>
                 </a:solidFill>
@@ -4462,321 +4533,75 @@
           <a:p>
             <a:pPr algn="l">
               <a:spcAft>
-                <a:spcPts val="675"/>
-              </a:spcAft>
-            </a:pPr>
-            <a:r>
-              <a:rPr sz="1100" b="1" i="0">
+                <a:spcPts val="810"/>
+              </a:spcAft>
+            </a:pPr>
+            <a:r>
+              <a:rPr sz="1200" b="1" i="0">
                 <a:solidFill>
                   <a:srgbClr val="0B2D5B"/>
                 </a:solidFill>
                 <a:latin typeface="Inter Tight"/>
               </a:rPr>
-              <a:t>MATERIALS</a:t>
-            </a:r>
-          </a:p>
-          <a:p>
-            <a:pPr algn="l">
-              <a:spcAft>
-                <a:spcPts val="675"/>
-              </a:spcAft>
-            </a:pPr>
-            <a:r>
-              <a:rPr sz="1500" b="0" i="0">
+              <a:t>EVERY STUDENT IN THE ROOM</a:t>
+            </a:r>
+          </a:p>
+          <a:p>
+            <a:pPr algn="l">
+              <a:spcAft>
+                <a:spcPts val="810"/>
+              </a:spcAft>
+            </a:pPr>
+            <a:r>
+              <a:rPr sz="1800" b="0" i="0">
                 <a:solidFill>
                   <a:srgbClr val="1C1B19"/>
                 </a:solidFill>
                 <a:latin typeface="Source Serif 4"/>
               </a:rPr>
-              <a:t>Index cards for the private system card and the exit card</a:t>
-            </a:r>
-          </a:p>
-          <a:p>
-            <a:pPr algn="l">
-              <a:spcAft>
-                <a:spcPts val="675"/>
-              </a:spcAft>
-            </a:pPr>
-            <a:r>
-              <a:rPr sz="1500" b="0" i="0">
+              <a:t>A system shouldn't need money or a quiet room, and family, work and faith commitments go on the calendar first, the same as practice.</a:t>
+            </a:r>
+          </a:p>
+          <a:p>
+            <a:pPr algn="l">
+              <a:spcAft>
+                <a:spcPts val="810"/>
+              </a:spcAft>
+            </a:pPr>
+            <a:r>
+              <a:rPr sz="1800" b="0" i="0">
                 <a:solidFill>
                   <a:srgbClr val="1C1B19"/>
                 </a:solidFill>
                 <a:latin typeface="Source Serif 4"/>
               </a:rPr>
-              <a:t>Scrap paper for the anonymous tally</a:t>
-            </a:r>
-          </a:p>
-          <a:p>
-            <a:pPr algn="l">
-              <a:spcAft>
-                <a:spcPts val="675"/>
-              </a:spcAft>
-            </a:pPr>
-            <a:r>
-              <a:rPr sz="1500" b="0" i="0">
-                <a:solidFill>
-                  <a:srgbClr val="1C1B19"/>
-                </a:solidFill>
-                <a:latin typeface="Source Serif 4"/>
-              </a:rPr>
-              <a:t>The take-home link (last slide) to share after class</a:t>
-            </a:r>
-          </a:p>
-        </p:txBody>
-      </p:sp>
-      <p:sp>
-        <p:nvSpPr>
-          <p:cNvPr id="7" name="TextBox 6"/>
-          <p:cNvSpPr txBox="1"/>
-          <p:nvPr/>
-        </p:nvSpPr>
-        <p:spPr>
-          <a:xfrm>
-            <a:off x="6126480" y="1828800"/>
-            <a:ext cx="5486400" cy="4389120"/>
-          </a:xfrm>
-          <a:prstGeom prst="rect">
-            <a:avLst/>
-          </a:prstGeom>
-          <a:noFill/>
-        </p:spPr>
-        <p:txBody>
-          <a:bodyPr wrap="square" anchor="t" lIns="0" rIns="0" tIns="0" bIns="0">
-            <a:spAutoFit/>
-          </a:bodyPr>
-          <a:lstStyle/>
-          <a:p>
-            <a:pPr algn="l">
-              <a:spcAft>
-                <a:spcPts val="630"/>
-              </a:spcAft>
-            </a:pPr>
-            <a:r>
-              <a:rPr sz="1100" b="1" i="0">
+              <a:t/>
+            </a:r>
+          </a:p>
+          <a:p>
+            <a:pPr algn="l">
+              <a:spcAft>
+                <a:spcPts val="810"/>
+              </a:spcAft>
+            </a:pPr>
+            <a:r>
+              <a:rPr sz="1200" b="1" i="0">
                 <a:solidFill>
                   <a:srgbClr val="0B2D5B"/>
                 </a:solidFill>
                 <a:latin typeface="Inter Tight"/>
               </a:rPr>
-              <a:t>FLOW</a:t>
-            </a:r>
-          </a:p>
-          <a:p>
-            <a:pPr algn="l">
-              <a:spcAft>
-                <a:spcPts val="630"/>
-              </a:spcAft>
-            </a:pPr>
-            <a:r>
-              <a:rPr sz="1300" b="1" i="0">
-                <a:solidFill>
-                  <a:srgbClr val="F47B20"/>
-                </a:solidFill>
-                <a:latin typeface="Inter Tight"/>
-              </a:rPr>
-              <a:t>5 min   </a:t>
-            </a:r>
-            <a:r>
-              <a:rPr sz="1400" b="0" i="0">
-                <a:solidFill>
-                  <a:srgbClr val="1C1B19"/>
-                </a:solidFill>
-                <a:latin typeface="Source Serif 4"/>
-              </a:rPr>
-              <a:t>Myth or fact (stand up, sit down)</a:t>
-            </a:r>
-          </a:p>
-          <a:p>
-            <a:pPr algn="l">
-              <a:spcAft>
-                <a:spcPts val="630"/>
-              </a:spcAft>
-            </a:pPr>
-            <a:r>
-              <a:rPr sz="1300" b="1" i="0">
-                <a:solidFill>
-                  <a:srgbClr val="F47B20"/>
-                </a:solidFill>
-                <a:latin typeface="Inter Tight"/>
-              </a:rPr>
-              <a:t>8 min   </a:t>
-            </a:r>
-            <a:r>
-              <a:rPr sz="1400" b="0" i="0">
-                <a:solidFill>
-                  <a:srgbClr val="1C1B19"/>
-                </a:solidFill>
-                <a:latin typeface="Source Serif 4"/>
-              </a:rPr>
-              <a:t>Three skills, and where they run</a:t>
-            </a:r>
-          </a:p>
-          <a:p>
-            <a:pPr algn="l">
-              <a:spcAft>
-                <a:spcPts val="630"/>
-              </a:spcAft>
-            </a:pPr>
-            <a:r>
-              <a:rPr sz="1300" b="1" i="0">
-                <a:solidFill>
-                  <a:srgbClr val="F47B20"/>
-                </a:solidFill>
-                <a:latin typeface="Inter Tight"/>
-              </a:rPr>
-              <a:t>5 min   </a:t>
-            </a:r>
-            <a:r>
-              <a:rPr sz="1400" b="0" i="0">
-                <a:solidFill>
-                  <a:srgbClr val="1C1B19"/>
-                </a:solidFill>
-                <a:latin typeface="Source Serif 4"/>
-              </a:rPr>
-              <a:t>What knocks them offline (anonymous tally)</a:t>
-            </a:r>
-          </a:p>
-          <a:p>
-            <a:pPr algn="l">
-              <a:spcAft>
-                <a:spcPts val="630"/>
-              </a:spcAft>
-            </a:pPr>
-            <a:r>
-              <a:rPr sz="1300" b="1" i="0">
-                <a:solidFill>
-                  <a:srgbClr val="F47B20"/>
-                </a:solidFill>
-                <a:latin typeface="Inter Tight"/>
-              </a:rPr>
-              <a:t>10 min   </a:t>
-            </a:r>
-            <a:r>
-              <a:rPr sz="1400" b="0" i="0">
-                <a:solidFill>
-                  <a:srgbClr val="1C1B19"/>
-                </a:solidFill>
-                <a:latin typeface="Source Serif 4"/>
-              </a:rPr>
-              <a:t>Offload it: design your system (private card)</a:t>
-            </a:r>
-          </a:p>
-          <a:p>
-            <a:pPr algn="l">
-              <a:spcAft>
-                <a:spcPts val="630"/>
-              </a:spcAft>
-            </a:pPr>
-            <a:r>
-              <a:rPr sz="1300" b="1" i="0">
-                <a:solidFill>
-                  <a:srgbClr val="F47B20"/>
-                </a:solidFill>
-                <a:latin typeface="Inter Tight"/>
-              </a:rPr>
-              <a:t>10 min   </a:t>
-            </a:r>
-            <a:r>
-              <a:rPr sz="1400" b="0" i="0">
-                <a:solidFill>
-                  <a:srgbClr val="1C1B19"/>
-                </a:solidFill>
-                <a:latin typeface="Source Serif 4"/>
-              </a:rPr>
-              <a:t>Three overloaded weeks (small groups)</a:t>
-            </a:r>
-          </a:p>
-          <a:p>
-            <a:pPr algn="l">
-              <a:spcAft>
-                <a:spcPts val="630"/>
-              </a:spcAft>
-            </a:pPr>
-            <a:r>
-              <a:rPr sz="1300" b="1" i="0">
-                <a:solidFill>
-                  <a:srgbClr val="F47B20"/>
-                </a:solidFill>
-                <a:latin typeface="Inter Tight"/>
-              </a:rPr>
-              <a:t>5 min   </a:t>
-            </a:r>
-            <a:r>
-              <a:rPr sz="1400" b="0" i="0">
-                <a:solidFill>
-                  <a:srgbClr val="1C1B19"/>
-                </a:solidFill>
-                <a:latin typeface="Source Serif 4"/>
-              </a:rPr>
-              <a:t>The weekly review</a:t>
-            </a:r>
-          </a:p>
-          <a:p>
-            <a:pPr algn="l">
-              <a:spcAft>
-                <a:spcPts val="630"/>
-              </a:spcAft>
-            </a:pPr>
-            <a:r>
-              <a:rPr sz="1300" b="1" i="0">
-                <a:solidFill>
-                  <a:srgbClr val="F47B20"/>
-                </a:solidFill>
-                <a:latin typeface="Inter Tight"/>
-              </a:rPr>
-              <a:t>2 min   </a:t>
-            </a:r>
-            <a:r>
-              <a:rPr sz="1400" b="0" i="0">
-                <a:solidFill>
-                  <a:srgbClr val="1C1B19"/>
-                </a:solidFill>
-                <a:latin typeface="Source Serif 4"/>
-              </a:rPr>
-              <a:t>Exit card and take-home link</a:t>
-            </a:r>
-          </a:p>
-          <a:p>
-            <a:pPr algn="l">
-              <a:spcAft>
-                <a:spcPts val="630"/>
-              </a:spcAft>
-            </a:pPr>
-            <a:r>
-              <a:rPr sz="1400" b="0" i="0">
-                <a:solidFill>
-                  <a:srgbClr val="1C1B19"/>
-                </a:solidFill>
-                <a:latin typeface="Source Serif 4"/>
-              </a:rPr>
-              <a:t/>
-            </a:r>
-          </a:p>
-          <a:p>
-            <a:pPr algn="l">
-              <a:spcAft>
-                <a:spcPts val="630"/>
-              </a:spcAft>
-            </a:pPr>
-            <a:r>
-              <a:rPr sz="1100" b="1" i="0">
-                <a:solidFill>
-                  <a:srgbClr val="0B2D5B"/>
-                </a:solidFill>
-                <a:latin typeface="Inter Tight"/>
-              </a:rPr>
               <a:t>SHORT ON TIME (20-MINUTE ADVISORY)</a:t>
             </a:r>
           </a:p>
           <a:p>
             <a:pPr algn="l">
               <a:spcAft>
-                <a:spcPts val="630"/>
-              </a:spcAft>
-            </a:pPr>
-            <a:r>
-              <a:rPr sz="1400" b="0" i="0">
+                <a:spcPts val="810"/>
+              </a:spcAft>
+            </a:pPr>
+            <a:r>
+              <a:rPr sz="1800" b="0" i="0">
                 <a:solidFill>
                   <a:srgbClr val="1C1B19"/>
                 </a:solidFill>
@@ -4891,7 +4716,7 @@
                 </a:solidFill>
                 <a:latin typeface="Inter Tight"/>
               </a:rPr>
-              <a:t>THE CORE IDEA</a:t>
+              <a:t>THE HABIT THAT HOLDS IT TOGETHER</a:t>
             </a:r>
           </a:p>
         </p:txBody>
@@ -4943,46 +4768,7 @@
         </p:nvSpPr>
         <p:spPr>
           <a:xfrm>
-            <a:off x="822960" y="1463040"/>
-            <a:ext cx="10515600" cy="3291840"/>
-          </a:xfrm>
-          <a:prstGeom prst="rect">
-            <a:avLst/>
-          </a:prstGeom>
-          <a:noFill/>
-        </p:spPr>
-        <p:txBody>
-          <a:bodyPr wrap="square" anchor="ctr" lIns="0" rIns="0" tIns="0" bIns="0">
-            <a:spAutoFit/>
-          </a:bodyPr>
-          <a:lstStyle/>
-          <a:p>
-            <a:pPr algn="l">
-              <a:spcAft>
-                <a:spcPts val="2070"/>
-              </a:spcAft>
-            </a:pPr>
-            <a:r>
-              <a:rPr sz="4600" b="1" i="0">
-                <a:solidFill>
-                  <a:srgbClr val="1C1B19"/>
-                </a:solidFill>
-                <a:latin typeface="Source Serif 4"/>
-              </a:rPr>
-              <a:t>Organized people don't remember more. They offload more.</a:t>
-            </a:r>
-          </a:p>
-        </p:txBody>
-      </p:sp>
-      <p:sp>
-        <p:nvSpPr>
-          <p:cNvPr id="6" name="TextBox 5"/>
-          <p:cNvSpPr txBox="1"/>
-          <p:nvPr/>
-        </p:nvSpPr>
-        <p:spPr>
-          <a:xfrm>
-            <a:off x="822960" y="4846320"/>
+            <a:off x="822960" y="1005840"/>
             <a:ext cx="10515600" cy="1097280"/>
           </a:xfrm>
           <a:prstGeom prst="rect">
@@ -4998,17 +4784,487 @@
           <a:p>
             <a:pPr algn="l">
               <a:spcAft>
-                <a:spcPts val="990"/>
-              </a:spcAft>
-            </a:pPr>
-            <a:r>
-              <a:rPr sz="2200" b="0" i="1">
+                <a:spcPts val="1620"/>
+              </a:spcAft>
+            </a:pPr>
+            <a:r>
+              <a:rPr sz="3600" b="1" i="0">
+                <a:solidFill>
+                  <a:srgbClr val="1C1B19"/>
+                </a:solidFill>
+                <a:latin typeface="Source Serif 4"/>
+              </a:rPr>
+              <a:t>A weekly review, about 20 minutes</a:t>
+            </a:r>
+          </a:p>
+        </p:txBody>
+      </p:sp>
+      <p:sp>
+        <p:nvSpPr>
+          <p:cNvPr id="6" name="TextBox 5"/>
+          <p:cNvSpPr txBox="1"/>
+          <p:nvPr/>
+        </p:nvSpPr>
+        <p:spPr>
+          <a:xfrm>
+            <a:off x="822960" y="2057400"/>
+            <a:ext cx="548640" cy="804672"/>
+          </a:xfrm>
+          <a:prstGeom prst="rect">
+            <a:avLst/>
+          </a:prstGeom>
+          <a:noFill/>
+        </p:spPr>
+        <p:txBody>
+          <a:bodyPr wrap="square" anchor="t" lIns="0" rIns="0" tIns="0" bIns="0">
+            <a:spAutoFit/>
+          </a:bodyPr>
+          <a:lstStyle/>
+          <a:p>
+            <a:pPr algn="l">
+              <a:spcAft>
+                <a:spcPts val="1170"/>
+              </a:spcAft>
+            </a:pPr>
+            <a:r>
+              <a:rPr sz="2600" b="1" i="0">
+                <a:solidFill>
+                  <a:srgbClr val="F47B20"/>
+                </a:solidFill>
+                <a:latin typeface="Source Serif 4"/>
+              </a:rPr>
+              <a:t>1</a:t>
+            </a:r>
+          </a:p>
+        </p:txBody>
+      </p:sp>
+      <p:sp>
+        <p:nvSpPr>
+          <p:cNvPr id="7" name="TextBox 6"/>
+          <p:cNvSpPr txBox="1"/>
+          <p:nvPr/>
+        </p:nvSpPr>
+        <p:spPr>
+          <a:xfrm>
+            <a:off x="1463040" y="2093976"/>
+            <a:ext cx="9875520" cy="804672"/>
+          </a:xfrm>
+          <a:prstGeom prst="rect">
+            <a:avLst/>
+          </a:prstGeom>
+          <a:noFill/>
+        </p:spPr>
+        <p:txBody>
+          <a:bodyPr wrap="square" anchor="t" lIns="0" rIns="0" tIns="0" bIns="0">
+            <a:spAutoFit/>
+          </a:bodyPr>
+          <a:lstStyle/>
+          <a:p>
+            <a:pPr algn="l">
+              <a:spcAft>
+                <a:spcPts val="945"/>
+              </a:spcAft>
+            </a:pPr>
+            <a:r>
+              <a:rPr sz="2100" b="1" i="0">
+                <a:solidFill>
+                  <a:srgbClr val="1C1B19"/>
+                </a:solidFill>
+                <a:latin typeface="Source Serif 4"/>
+              </a:rPr>
+              <a:t>Empty everything into one list.</a:t>
+            </a:r>
+          </a:p>
+          <a:p>
+            <a:pPr algn="l">
+              <a:spcAft>
+                <a:spcPts val="945"/>
+              </a:spcAft>
+            </a:pPr>
+            <a:r>
+              <a:rPr sz="1600" b="0" i="0">
                 <a:solidFill>
                   <a:srgbClr val="5D5A54"/>
                 </a:solidFill>
                 <a:latin typeface="Source Serif 4"/>
               </a:rPr>
-              <a:t>Working memory holds only a few things. Move the job into tools and routines.</a:t>
+              <a:t>Class pages, email, texts, backpack, sticky notes.</a:t>
+            </a:r>
+          </a:p>
+        </p:txBody>
+      </p:sp>
+      <p:sp>
+        <p:nvSpPr>
+          <p:cNvPr id="8" name="TextBox 7"/>
+          <p:cNvSpPr txBox="1"/>
+          <p:nvPr/>
+        </p:nvSpPr>
+        <p:spPr>
+          <a:xfrm>
+            <a:off x="822960" y="2862072"/>
+            <a:ext cx="548640" cy="804672"/>
+          </a:xfrm>
+          <a:prstGeom prst="rect">
+            <a:avLst/>
+          </a:prstGeom>
+          <a:noFill/>
+        </p:spPr>
+        <p:txBody>
+          <a:bodyPr wrap="square" anchor="t" lIns="0" rIns="0" tIns="0" bIns="0">
+            <a:spAutoFit/>
+          </a:bodyPr>
+          <a:lstStyle/>
+          <a:p>
+            <a:pPr algn="l">
+              <a:spcAft>
+                <a:spcPts val="1170"/>
+              </a:spcAft>
+            </a:pPr>
+            <a:r>
+              <a:rPr sz="2600" b="1" i="0">
+                <a:solidFill>
+                  <a:srgbClr val="F47B20"/>
+                </a:solidFill>
+                <a:latin typeface="Source Serif 4"/>
+              </a:rPr>
+              <a:t>2</a:t>
+            </a:r>
+          </a:p>
+        </p:txBody>
+      </p:sp>
+      <p:sp>
+        <p:nvSpPr>
+          <p:cNvPr id="9" name="TextBox 8"/>
+          <p:cNvSpPr txBox="1"/>
+          <p:nvPr/>
+        </p:nvSpPr>
+        <p:spPr>
+          <a:xfrm>
+            <a:off x="1463040" y="2898648"/>
+            <a:ext cx="9875520" cy="804672"/>
+          </a:xfrm>
+          <a:prstGeom prst="rect">
+            <a:avLst/>
+          </a:prstGeom>
+          <a:noFill/>
+        </p:spPr>
+        <p:txBody>
+          <a:bodyPr wrap="square" anchor="t" lIns="0" rIns="0" tIns="0" bIns="0">
+            <a:spAutoFit/>
+          </a:bodyPr>
+          <a:lstStyle/>
+          <a:p>
+            <a:pPr algn="l">
+              <a:spcAft>
+                <a:spcPts val="945"/>
+              </a:spcAft>
+            </a:pPr>
+            <a:r>
+              <a:rPr sz="2100" b="1" i="0">
+                <a:solidFill>
+                  <a:srgbClr val="1C1B19"/>
+                </a:solidFill>
+                <a:latin typeface="Source Serif 4"/>
+              </a:rPr>
+              <a:t>Fixed things first.</a:t>
+            </a:r>
+          </a:p>
+          <a:p>
+            <a:pPr algn="l">
+              <a:spcAft>
+                <a:spcPts val="945"/>
+              </a:spcAft>
+            </a:pPr>
+            <a:r>
+              <a:rPr sz="1600" b="0" i="0">
+                <a:solidFill>
+                  <a:srgbClr val="5D5A54"/>
+                </a:solidFill>
+                <a:latin typeface="Source Serif 4"/>
+              </a:rPr>
+              <a:t>Classes, practice, shifts, services, picking up a sibling.</a:t>
+            </a:r>
+          </a:p>
+        </p:txBody>
+      </p:sp>
+      <p:sp>
+        <p:nvSpPr>
+          <p:cNvPr id="10" name="TextBox 9"/>
+          <p:cNvSpPr txBox="1"/>
+          <p:nvPr/>
+        </p:nvSpPr>
+        <p:spPr>
+          <a:xfrm>
+            <a:off x="822960" y="3666744"/>
+            <a:ext cx="548640" cy="804672"/>
+          </a:xfrm>
+          <a:prstGeom prst="rect">
+            <a:avLst/>
+          </a:prstGeom>
+          <a:noFill/>
+        </p:spPr>
+        <p:txBody>
+          <a:bodyPr wrap="square" anchor="t" lIns="0" rIns="0" tIns="0" bIns="0">
+            <a:spAutoFit/>
+          </a:bodyPr>
+          <a:lstStyle/>
+          <a:p>
+            <a:pPr algn="l">
+              <a:spcAft>
+                <a:spcPts val="1170"/>
+              </a:spcAft>
+            </a:pPr>
+            <a:r>
+              <a:rPr sz="2600" b="1" i="0">
+                <a:solidFill>
+                  <a:srgbClr val="F47B20"/>
+                </a:solidFill>
+                <a:latin typeface="Source Serif 4"/>
+              </a:rPr>
+              <a:t>3</a:t>
+            </a:r>
+          </a:p>
+        </p:txBody>
+      </p:sp>
+      <p:sp>
+        <p:nvSpPr>
+          <p:cNvPr id="11" name="TextBox 10"/>
+          <p:cNvSpPr txBox="1"/>
+          <p:nvPr/>
+        </p:nvSpPr>
+        <p:spPr>
+          <a:xfrm>
+            <a:off x="1463040" y="3703320"/>
+            <a:ext cx="9875520" cy="804672"/>
+          </a:xfrm>
+          <a:prstGeom prst="rect">
+            <a:avLst/>
+          </a:prstGeom>
+          <a:noFill/>
+        </p:spPr>
+        <p:txBody>
+          <a:bodyPr wrap="square" anchor="t" lIns="0" rIns="0" tIns="0" bIns="0">
+            <a:spAutoFit/>
+          </a:bodyPr>
+          <a:lstStyle/>
+          <a:p>
+            <a:pPr algn="l">
+              <a:spcAft>
+                <a:spcPts val="945"/>
+              </a:spcAft>
+            </a:pPr>
+            <a:r>
+              <a:rPr sz="2100" b="1" i="0">
+                <a:solidFill>
+                  <a:srgbClr val="1C1B19"/>
+                </a:solidFill>
+                <a:latin typeface="Source Serif 4"/>
+              </a:rPr>
+              <a:t>Break big things into dated steps.</a:t>
+            </a:r>
+          </a:p>
+          <a:p>
+            <a:pPr algn="l">
+              <a:spcAft>
+                <a:spcPts val="945"/>
+              </a:spcAft>
+            </a:pPr>
+            <a:r>
+              <a:rPr sz="1600" b="0" i="0">
+                <a:solidFill>
+                  <a:srgbClr val="5D5A54"/>
+                </a:solidFill>
+                <a:latin typeface="Source Serif 4"/>
+              </a:rPr>
+              <a:t>"Tue: pick sources. Thu: outline."</a:t>
+            </a:r>
+          </a:p>
+        </p:txBody>
+      </p:sp>
+      <p:sp>
+        <p:nvSpPr>
+          <p:cNvPr id="12" name="TextBox 11"/>
+          <p:cNvSpPr txBox="1"/>
+          <p:nvPr/>
+        </p:nvSpPr>
+        <p:spPr>
+          <a:xfrm>
+            <a:off x="822960" y="4471416"/>
+            <a:ext cx="548640" cy="804672"/>
+          </a:xfrm>
+          <a:prstGeom prst="rect">
+            <a:avLst/>
+          </a:prstGeom>
+          <a:noFill/>
+        </p:spPr>
+        <p:txBody>
+          <a:bodyPr wrap="square" anchor="t" lIns="0" rIns="0" tIns="0" bIns="0">
+            <a:spAutoFit/>
+          </a:bodyPr>
+          <a:lstStyle/>
+          <a:p>
+            <a:pPr algn="l">
+              <a:spcAft>
+                <a:spcPts val="1170"/>
+              </a:spcAft>
+            </a:pPr>
+            <a:r>
+              <a:rPr sz="2600" b="1" i="0">
+                <a:solidFill>
+                  <a:srgbClr val="F47B20"/>
+                </a:solidFill>
+                <a:latin typeface="Source Serif 4"/>
+              </a:rPr>
+              <a:t>4</a:t>
+            </a:r>
+          </a:p>
+        </p:txBody>
+      </p:sp>
+      <p:sp>
+        <p:nvSpPr>
+          <p:cNvPr id="13" name="TextBox 12"/>
+          <p:cNvSpPr txBox="1"/>
+          <p:nvPr/>
+        </p:nvSpPr>
+        <p:spPr>
+          <a:xfrm>
+            <a:off x="1463040" y="4507992"/>
+            <a:ext cx="9875520" cy="804672"/>
+          </a:xfrm>
+          <a:prstGeom prst="rect">
+            <a:avLst/>
+          </a:prstGeom>
+          <a:noFill/>
+        </p:spPr>
+        <p:txBody>
+          <a:bodyPr wrap="square" anchor="t" lIns="0" rIns="0" tIns="0" bIns="0">
+            <a:spAutoFit/>
+          </a:bodyPr>
+          <a:lstStyle/>
+          <a:p>
+            <a:pPr algn="l">
+              <a:spcAft>
+                <a:spcPts val="945"/>
+              </a:spcAft>
+            </a:pPr>
+            <a:r>
+              <a:rPr sz="2100" b="1" i="0">
+                <a:solidFill>
+                  <a:srgbClr val="1C1B19"/>
+                </a:solidFill>
+                <a:latin typeface="Source Serif 4"/>
+              </a:rPr>
+              <a:t>Spot the crunch day.</a:t>
+            </a:r>
+          </a:p>
+          <a:p>
+            <a:pPr algn="l">
+              <a:spcAft>
+                <a:spcPts val="945"/>
+              </a:spcAft>
+            </a:pPr>
+            <a:r>
+              <a:rPr sz="1600" b="0" i="0">
+                <a:solidFill>
+                  <a:srgbClr val="5D5A54"/>
+                </a:solidFill>
+                <a:latin typeface="Source Serif 4"/>
+              </a:rPr>
+              <a:t>Move work earlier or email a teacher now.</a:t>
+            </a:r>
+          </a:p>
+        </p:txBody>
+      </p:sp>
+      <p:sp>
+        <p:nvSpPr>
+          <p:cNvPr id="14" name="TextBox 13"/>
+          <p:cNvSpPr txBox="1"/>
+          <p:nvPr/>
+        </p:nvSpPr>
+        <p:spPr>
+          <a:xfrm>
+            <a:off x="822960" y="5276088"/>
+            <a:ext cx="548640" cy="804672"/>
+          </a:xfrm>
+          <a:prstGeom prst="rect">
+            <a:avLst/>
+          </a:prstGeom>
+          <a:noFill/>
+        </p:spPr>
+        <p:txBody>
+          <a:bodyPr wrap="square" anchor="t" lIns="0" rIns="0" tIns="0" bIns="0">
+            <a:spAutoFit/>
+          </a:bodyPr>
+          <a:lstStyle/>
+          <a:p>
+            <a:pPr algn="l">
+              <a:spcAft>
+                <a:spcPts val="1170"/>
+              </a:spcAft>
+            </a:pPr>
+            <a:r>
+              <a:rPr sz="2600" b="1" i="0">
+                <a:solidFill>
+                  <a:srgbClr val="F47B20"/>
+                </a:solidFill>
+                <a:latin typeface="Source Serif 4"/>
+              </a:rPr>
+              <a:t>5</a:t>
+            </a:r>
+          </a:p>
+        </p:txBody>
+      </p:sp>
+      <p:sp>
+        <p:nvSpPr>
+          <p:cNvPr id="15" name="TextBox 14"/>
+          <p:cNvSpPr txBox="1"/>
+          <p:nvPr/>
+        </p:nvSpPr>
+        <p:spPr>
+          <a:xfrm>
+            <a:off x="1463040" y="5312664"/>
+            <a:ext cx="9875520" cy="804672"/>
+          </a:xfrm>
+          <a:prstGeom prst="rect">
+            <a:avLst/>
+          </a:prstGeom>
+          <a:noFill/>
+        </p:spPr>
+        <p:txBody>
+          <a:bodyPr wrap="square" anchor="t" lIns="0" rIns="0" tIns="0" bIns="0">
+            <a:spAutoFit/>
+          </a:bodyPr>
+          <a:lstStyle/>
+          <a:p>
+            <a:pPr algn="l">
+              <a:spcAft>
+                <a:spcPts val="945"/>
+              </a:spcAft>
+            </a:pPr>
+            <a:r>
+              <a:rPr sz="2100" b="1" i="0">
+                <a:solidFill>
+                  <a:srgbClr val="1C1B19"/>
+                </a:solidFill>
+                <a:latin typeface="Source Serif 4"/>
+              </a:rPr>
+              <a:t>Close it out every night.</a:t>
+            </a:r>
+          </a:p>
+          <a:p>
+            <a:pPr algn="l">
+              <a:spcAft>
+                <a:spcPts val="945"/>
+              </a:spcAft>
+            </a:pPr>
+            <a:r>
+              <a:rPr sz="1600" b="0" i="0">
+                <a:solidFill>
+                  <a:srgbClr val="5D5A54"/>
+                </a:solidFill>
+                <a:latin typeface="Source Serif 4"/>
+              </a:rPr>
+              <a:t>Two minutes: what's due tomorrow, and is it done?</a:t>
             </a:r>
           </a:p>
         </p:txBody>
@@ -5117,7 +5373,7 @@
                 </a:solidFill>
                 <a:latin typeface="Inter Tight"/>
               </a:rPr>
-              <a:t>DESIGN YOUR SYSTEM</a:t>
+              <a:t>BEFORE YOU GO</a:t>
             </a:r>
           </a:p>
         </p:txBody>
@@ -5163,23 +5419,103 @@
       </p:sp>
       <p:sp>
         <p:nvSpPr>
-          <p:cNvPr id="5" name="Rectangle 4"/>
+          <p:cNvPr id="5" name="TextBox 4"/>
+          <p:cNvSpPr txBox="1"/>
+          <p:nvPr/>
+        </p:nvSpPr>
+        <p:spPr>
+          <a:xfrm>
+            <a:off x="822960" y="1188720"/>
+            <a:ext cx="10515600" cy="914400"/>
+          </a:xfrm>
+          <a:prstGeom prst="rect">
+            <a:avLst/>
+          </a:prstGeom>
+          <a:noFill/>
+        </p:spPr>
+        <p:txBody>
+          <a:bodyPr wrap="square" anchor="t" lIns="0" rIns="0" tIns="0" bIns="0">
+            <a:spAutoFit/>
+          </a:bodyPr>
+          <a:lstStyle/>
+          <a:p>
+            <a:pPr algn="l">
+              <a:spcAft>
+                <a:spcPts val="1620"/>
+              </a:spcAft>
+            </a:pPr>
+            <a:r>
+              <a:rPr sz="3600" b="1" i="0">
+                <a:solidFill>
+                  <a:srgbClr val="1C1B19"/>
+                </a:solidFill>
+                <a:latin typeface="Source Serif 4"/>
+              </a:rPr>
+              <a:t>Exit card</a:t>
+            </a:r>
+          </a:p>
+        </p:txBody>
+      </p:sp>
+      <p:sp>
+        <p:nvSpPr>
+          <p:cNvPr id="6" name="TextBox 5"/>
+          <p:cNvSpPr txBox="1"/>
+          <p:nvPr/>
+        </p:nvSpPr>
+        <p:spPr>
+          <a:xfrm>
+            <a:off x="822960" y="2286000"/>
+            <a:ext cx="10515600" cy="1463040"/>
+          </a:xfrm>
+          <a:prstGeom prst="rect">
+            <a:avLst/>
+          </a:prstGeom>
+          <a:noFill/>
+        </p:spPr>
+        <p:txBody>
+          <a:bodyPr wrap="square" anchor="t" lIns="0" rIns="0" tIns="0" bIns="0">
+            <a:spAutoFit/>
+          </a:bodyPr>
+          <a:lstStyle/>
+          <a:p>
+            <a:pPr algn="l">
+              <a:spcAft>
+                <a:spcPts val="1080"/>
+              </a:spcAft>
+            </a:pPr>
+            <a:r>
+              <a:rPr sz="2400" b="0" i="0">
+                <a:solidFill>
+                  <a:srgbClr val="1C1B19"/>
+                </a:solidFill>
+                <a:latin typeface="Source Serif 4"/>
+              </a:rPr>
+              <a:t>When is your first weekly review? Put it in your calendar with an alarm before you leave.</a:t>
+            </a:r>
+          </a:p>
+        </p:txBody>
+      </p:sp>
+      <p:sp>
+        <p:nvSpPr>
+          <p:cNvPr id="7" name="Rectangle 6"/>
           <p:cNvSpPr/>
           <p:nvPr/>
         </p:nvSpPr>
         <p:spPr>
           <a:xfrm>
-            <a:off x="822960" y="1371600"/>
-            <a:ext cx="73152" cy="3566160"/>
+            <a:off x="822960" y="4023360"/>
+            <a:ext cx="10515600" cy="1371600"/>
           </a:xfrm>
           <a:prstGeom prst="rect">
             <a:avLst/>
           </a:prstGeom>
           <a:solidFill>
-            <a:srgbClr val="F47B20"/>
+            <a:srgbClr val="FFFFFF"/>
           </a:solidFill>
-          <a:ln>
-            <a:noFill/>
+          <a:ln w="15875">
+            <a:solidFill>
+              <a:srgbClr val="1C1B19"/>
+            </a:solidFill>
           </a:ln>
           <a:effectLst/>
         </p:spPr>
@@ -5207,53 +5543,14 @@
       </p:sp>
       <p:sp>
         <p:nvSpPr>
-          <p:cNvPr id="6" name="TextBox 5"/>
+          <p:cNvPr id="8" name="TextBox 7"/>
           <p:cNvSpPr txBox="1"/>
           <p:nvPr/>
         </p:nvSpPr>
         <p:spPr>
           <a:xfrm>
-            <a:off x="1188720" y="1371600"/>
-            <a:ext cx="10058400" cy="3566160"/>
-          </a:xfrm>
-          <a:prstGeom prst="rect">
-            <a:avLst/>
-          </a:prstGeom>
-          <a:noFill/>
-        </p:spPr>
-        <p:txBody>
-          <a:bodyPr wrap="square" anchor="ctr" lIns="0" rIns="0" tIns="0" bIns="0">
-            <a:spAutoFit/>
-          </a:bodyPr>
-          <a:lstStyle/>
-          <a:p>
-            <a:pPr algn="l">
-              <a:spcAft>
-                <a:spcPts val="1800"/>
-              </a:spcAft>
-            </a:pPr>
-            <a:r>
-              <a:rPr sz="4000" b="0" i="1">
-                <a:solidFill>
-                  <a:srgbClr val="1C1B19"/>
-                </a:solidFill>
-                <a:latin typeface="Source Serif 4"/>
-              </a:rPr>
-              <a:t>Five lines on your card. Be specific.</a:t>
-            </a:r>
-          </a:p>
-        </p:txBody>
-      </p:sp>
-      <p:sp>
-        <p:nvSpPr>
-          <p:cNvPr id="7" name="TextBox 6"/>
-          <p:cNvSpPr txBox="1"/>
-          <p:nvPr/>
-        </p:nvSpPr>
-        <p:spPr>
-          <a:xfrm>
-            <a:off x="1188720" y="5120640"/>
-            <a:ext cx="10058400" cy="914400"/>
+            <a:off x="1097280" y="4206240"/>
+            <a:ext cx="10058400" cy="365760"/>
           </a:xfrm>
           <a:prstGeom prst="rect">
             <a:avLst/>
@@ -5268,17 +5565,56 @@
           <a:p>
             <a:pPr algn="l">
               <a:spcAft>
-                <a:spcPts val="810"/>
-              </a:spcAft>
-            </a:pPr>
-            <a:r>
-              <a:rPr sz="1800" b="0" i="0">
-                <a:solidFill>
-                  <a:srgbClr val="5D5A54"/>
+                <a:spcPts val="540"/>
+              </a:spcAft>
+            </a:pPr>
+            <a:r>
+              <a:rPr sz="1200" b="1" i="0">
+                <a:solidFill>
+                  <a:srgbClr val="0B2D5B"/>
                 </a:solidFill>
                 <a:latin typeface="Inter Tight"/>
               </a:rPr>
-              <a:t>My capture point. My weekly review time. One change to my space. What usually blows up my plans. My plan B.</a:t>
+              <a:t>ON THE BVR DINER MENU</a:t>
+            </a:r>
+          </a:p>
+        </p:txBody>
+      </p:sp>
+      <p:sp>
+        <p:nvSpPr>
+          <p:cNvPr id="9" name="TextBox 8"/>
+          <p:cNvSpPr txBox="1"/>
+          <p:nvPr/>
+        </p:nvSpPr>
+        <p:spPr>
+          <a:xfrm>
+            <a:off x="1097280" y="4617720"/>
+            <a:ext cx="10058400" cy="640080"/>
+          </a:xfrm>
+          <a:prstGeom prst="rect">
+            <a:avLst/>
+          </a:prstGeom>
+          <a:noFill/>
+        </p:spPr>
+        <p:txBody>
+          <a:bodyPr wrap="square" anchor="t" lIns="0" rIns="0" tIns="0" bIns="0">
+            <a:spAutoFit/>
+          </a:bodyPr>
+          <a:lstStyle/>
+          <a:p>
+            <a:pPr algn="l">
+              <a:spcAft>
+                <a:spcPts val="900"/>
+              </a:spcAft>
+            </a:pPr>
+            <a:r>
+              <a:rPr sz="2000" b="0" i="0">
+                <a:solidFill>
+                  <a:srgbClr val="1C1B19"/>
+                </a:solidFill>
+                <a:latin typeface="Inter Tight"/>
+              </a:rPr>
+              <a:t>https://rmwtoolkit.github.io/bcds-toolkit/running-the-show-high-school.html</a:t>
             </a:r>
           </a:p>
         </p:txBody>
@@ -5292,6 +5628,2244 @@
 </file>
 
 <file path=ppt/slides/slide12.xml><?xml version="1.0" encoding="utf-8"?>
+<p:sld xmlns:a="http://schemas.openxmlformats.org/drawingml/2006/main" xmlns:p="http://schemas.openxmlformats.org/presentationml/2006/main" xmlns:r="http://schemas.openxmlformats.org/officeDocument/2006/relationships" show="0">
+  <p:cSld>
+    <p:bg>
+      <p:bgPr>
+        <a:solidFill>
+          <a:srgbClr val="EEEBE4"/>
+        </a:solidFill>
+        <a:effectLst/>
+      </p:bgPr>
+    </p:bg>
+    <p:spTree>
+      <p:nvGrpSpPr>
+        <p:cNvPr id="1" name=""/>
+        <p:cNvGrpSpPr/>
+        <p:nvPr/>
+      </p:nvGrpSpPr>
+      <p:grpSpPr/>
+      <p:sp>
+        <p:nvSpPr>
+          <p:cNvPr id="2" name="Rectangle 1"/>
+          <p:cNvSpPr/>
+          <p:nvPr/>
+        </p:nvSpPr>
+        <p:spPr>
+          <a:xfrm>
+            <a:off x="0" y="0"/>
+            <a:ext cx="12191695" cy="384048"/>
+          </a:xfrm>
+          <a:prstGeom prst="rect">
+            <a:avLst/>
+          </a:prstGeom>
+          <a:solidFill>
+            <a:srgbClr val="0B2D5B"/>
+          </a:solidFill>
+          <a:ln>
+            <a:noFill/>
+          </a:ln>
+          <a:effectLst/>
+        </p:spPr>
+        <p:style>
+          <a:lnRef idx="1">
+            <a:schemeClr val="accent1"/>
+          </a:lnRef>
+          <a:fillRef idx="3">
+            <a:schemeClr val="accent1"/>
+          </a:fillRef>
+          <a:effectRef idx="2">
+            <a:schemeClr val="accent1"/>
+          </a:effectRef>
+          <a:fontRef idx="minor">
+            <a:schemeClr val="lt1"/>
+          </a:fontRef>
+        </p:style>
+        <p:txBody>
+          <a:bodyPr rtlCol="0" anchor="ctr"/>
+          <a:lstStyle/>
+          <a:p>
+            <a:pPr algn="ctr"/>
+          </a:p>
+        </p:txBody>
+      </p:sp>
+      <p:sp>
+        <p:nvSpPr>
+          <p:cNvPr id="3" name="TextBox 2"/>
+          <p:cNvSpPr txBox="1"/>
+          <p:nvPr/>
+        </p:nvSpPr>
+        <p:spPr>
+          <a:xfrm>
+            <a:off x="548640" y="100584"/>
+            <a:ext cx="10972800" cy="274320"/>
+          </a:xfrm>
+          <a:prstGeom prst="rect">
+            <a:avLst/>
+          </a:prstGeom>
+          <a:noFill/>
+        </p:spPr>
+        <p:txBody>
+          <a:bodyPr wrap="square" anchor="t" lIns="0" rIns="0" tIns="0" bIns="0">
+            <a:spAutoFit/>
+          </a:bodyPr>
+          <a:lstStyle/>
+          <a:p>
+            <a:pPr algn="l">
+              <a:spcAft>
+                <a:spcPts val="495"/>
+              </a:spcAft>
+            </a:pPr>
+            <a:r>
+              <a:rPr sz="1100" b="1" i="0">
+                <a:solidFill>
+                  <a:srgbClr val="FFFFFF"/>
+                </a:solidFill>
+                <a:latin typeface="Inter Tight"/>
+              </a:rPr>
+              <a:t>TEACHER PAGE  ·  skipped when you present  ·  Lesson plan</a:t>
+            </a:r>
+          </a:p>
+        </p:txBody>
+      </p:sp>
+      <p:sp>
+        <p:nvSpPr>
+          <p:cNvPr id="4" name="TextBox 3"/>
+          <p:cNvSpPr txBox="1"/>
+          <p:nvPr/>
+        </p:nvSpPr>
+        <p:spPr>
+          <a:xfrm>
+            <a:off x="548640" y="685800"/>
+            <a:ext cx="10972800" cy="731520"/>
+          </a:xfrm>
+          <a:prstGeom prst="rect">
+            <a:avLst/>
+          </a:prstGeom>
+          <a:noFill/>
+        </p:spPr>
+        <p:txBody>
+          <a:bodyPr wrap="square" anchor="t" lIns="0" rIns="0" tIns="0" bIns="0">
+            <a:spAutoFit/>
+          </a:bodyPr>
+          <a:lstStyle/>
+          <a:p>
+            <a:pPr algn="l">
+              <a:spcAft>
+                <a:spcPts val="1530"/>
+              </a:spcAft>
+            </a:pPr>
+            <a:r>
+              <a:rPr sz="3400" b="1" i="0">
+                <a:solidFill>
+                  <a:srgbClr val="1C1B19"/>
+                </a:solidFill>
+                <a:latin typeface="Source Serif 4"/>
+              </a:rPr>
+              <a:t>Running the Show</a:t>
+            </a:r>
+          </a:p>
+        </p:txBody>
+      </p:sp>
+      <p:sp>
+        <p:nvSpPr>
+          <p:cNvPr id="5" name="TextBox 4"/>
+          <p:cNvSpPr txBox="1"/>
+          <p:nvPr/>
+        </p:nvSpPr>
+        <p:spPr>
+          <a:xfrm>
+            <a:off x="548640" y="1325880"/>
+            <a:ext cx="10972800" cy="365760"/>
+          </a:xfrm>
+          <a:prstGeom prst="rect">
+            <a:avLst/>
+          </a:prstGeom>
+          <a:noFill/>
+        </p:spPr>
+        <p:txBody>
+          <a:bodyPr wrap="square" anchor="t" lIns="0" rIns="0" tIns="0" bIns="0">
+            <a:spAutoFit/>
+          </a:bodyPr>
+          <a:lstStyle/>
+          <a:p>
+            <a:pPr algn="l">
+              <a:spcAft>
+                <a:spcPts val="630"/>
+              </a:spcAft>
+            </a:pPr>
+            <a:r>
+              <a:rPr sz="1400" b="0" i="0">
+                <a:solidFill>
+                  <a:srgbClr val="5D5A54"/>
+                </a:solidFill>
+                <a:latin typeface="Inter Tight"/>
+              </a:rPr>
+              <a:t>Upper School  ·  45 minutes (20-minute advisory version below)  ·  9th grade advisory, health class, or a counselor-led group</a:t>
+            </a:r>
+          </a:p>
+        </p:txBody>
+      </p:sp>
+      <p:sp>
+        <p:nvSpPr>
+          <p:cNvPr id="6" name="TextBox 5"/>
+          <p:cNvSpPr txBox="1"/>
+          <p:nvPr/>
+        </p:nvSpPr>
+        <p:spPr>
+          <a:xfrm>
+            <a:off x="548640" y="1828800"/>
+            <a:ext cx="5120640" cy="4389120"/>
+          </a:xfrm>
+          <a:prstGeom prst="rect">
+            <a:avLst/>
+          </a:prstGeom>
+          <a:noFill/>
+        </p:spPr>
+        <p:txBody>
+          <a:bodyPr wrap="square" anchor="t" lIns="0" rIns="0" tIns="0" bIns="0">
+            <a:spAutoFit/>
+          </a:bodyPr>
+          <a:lstStyle/>
+          <a:p>
+            <a:pPr algn="l">
+              <a:spcAft>
+                <a:spcPts val="675"/>
+              </a:spcAft>
+            </a:pPr>
+            <a:r>
+              <a:rPr sz="1100" b="1" i="0">
+                <a:solidFill>
+                  <a:srgbClr val="0B2D5B"/>
+                </a:solidFill>
+                <a:latin typeface="Inter Tight"/>
+              </a:rPr>
+              <a:t>GOAL</a:t>
+            </a:r>
+          </a:p>
+          <a:p>
+            <a:pPr algn="l">
+              <a:spcAft>
+                <a:spcPts val="675"/>
+              </a:spcAft>
+            </a:pPr>
+            <a:r>
+              <a:rPr sz="1500" b="0" i="0">
+                <a:solidFill>
+                  <a:srgbClr val="1C1B19"/>
+                </a:solidFill>
+                <a:latin typeface="Source Serif 4"/>
+              </a:rPr>
+              <a:t>Students can name the three skills behind getting things done (working memory, inhibition, flexibility), explain why sleep and stress change how organized anyone looks, and leave with a five-line system that moves the job out of their head: one capture point, a room set up against distraction, a plan B, and a weekly review.</a:t>
+            </a:r>
+          </a:p>
+          <a:p>
+            <a:pPr algn="l">
+              <a:spcAft>
+                <a:spcPts val="675"/>
+              </a:spcAft>
+            </a:pPr>
+            <a:r>
+              <a:rPr sz="1500" b="0" i="0">
+                <a:solidFill>
+                  <a:srgbClr val="1C1B19"/>
+                </a:solidFill>
+                <a:latin typeface="Source Serif 4"/>
+              </a:rPr>
+              <a:t/>
+            </a:r>
+          </a:p>
+          <a:p>
+            <a:pPr algn="l">
+              <a:spcAft>
+                <a:spcPts val="675"/>
+              </a:spcAft>
+            </a:pPr>
+            <a:r>
+              <a:rPr sz="1100" b="1" i="0">
+                <a:solidFill>
+                  <a:srgbClr val="0B2D5B"/>
+                </a:solidFill>
+                <a:latin typeface="Inter Tight"/>
+              </a:rPr>
+              <a:t>MATERIALS</a:t>
+            </a:r>
+          </a:p>
+          <a:p>
+            <a:pPr algn="l">
+              <a:spcAft>
+                <a:spcPts val="675"/>
+              </a:spcAft>
+            </a:pPr>
+            <a:r>
+              <a:rPr sz="1500" b="0" i="0">
+                <a:solidFill>
+                  <a:srgbClr val="1C1B19"/>
+                </a:solidFill>
+                <a:latin typeface="Source Serif 4"/>
+              </a:rPr>
+              <a:t>Index cards for the private system card and the exit card</a:t>
+            </a:r>
+          </a:p>
+          <a:p>
+            <a:pPr algn="l">
+              <a:spcAft>
+                <a:spcPts val="675"/>
+              </a:spcAft>
+            </a:pPr>
+            <a:r>
+              <a:rPr sz="1500" b="0" i="0">
+                <a:solidFill>
+                  <a:srgbClr val="1C1B19"/>
+                </a:solidFill>
+                <a:latin typeface="Source Serif 4"/>
+              </a:rPr>
+              <a:t>Scrap paper for the anonymous tally</a:t>
+            </a:r>
+          </a:p>
+          <a:p>
+            <a:pPr algn="l">
+              <a:spcAft>
+                <a:spcPts val="675"/>
+              </a:spcAft>
+            </a:pPr>
+            <a:r>
+              <a:rPr sz="1500" b="0" i="0">
+                <a:solidFill>
+                  <a:srgbClr val="1C1B19"/>
+                </a:solidFill>
+                <a:latin typeface="Source Serif 4"/>
+              </a:rPr>
+              <a:t>The take-home link (last slide) to share after class</a:t>
+            </a:r>
+          </a:p>
+        </p:txBody>
+      </p:sp>
+      <p:sp>
+        <p:nvSpPr>
+          <p:cNvPr id="7" name="TextBox 6"/>
+          <p:cNvSpPr txBox="1"/>
+          <p:nvPr/>
+        </p:nvSpPr>
+        <p:spPr>
+          <a:xfrm>
+            <a:off x="6126480" y="1828800"/>
+            <a:ext cx="5486400" cy="4389120"/>
+          </a:xfrm>
+          <a:prstGeom prst="rect">
+            <a:avLst/>
+          </a:prstGeom>
+          <a:noFill/>
+        </p:spPr>
+        <p:txBody>
+          <a:bodyPr wrap="square" anchor="t" lIns="0" rIns="0" tIns="0" bIns="0">
+            <a:spAutoFit/>
+          </a:bodyPr>
+          <a:lstStyle/>
+          <a:p>
+            <a:pPr algn="l">
+              <a:spcAft>
+                <a:spcPts val="630"/>
+              </a:spcAft>
+            </a:pPr>
+            <a:r>
+              <a:rPr sz="1100" b="1" i="0">
+                <a:solidFill>
+                  <a:srgbClr val="0B2D5B"/>
+                </a:solidFill>
+                <a:latin typeface="Inter Tight"/>
+              </a:rPr>
+              <a:t>FLOW</a:t>
+            </a:r>
+          </a:p>
+          <a:p>
+            <a:pPr algn="l">
+              <a:spcAft>
+                <a:spcPts val="630"/>
+              </a:spcAft>
+            </a:pPr>
+            <a:r>
+              <a:rPr sz="1300" b="1" i="0">
+                <a:solidFill>
+                  <a:srgbClr val="F47B20"/>
+                </a:solidFill>
+                <a:latin typeface="Inter Tight"/>
+              </a:rPr>
+              <a:t>5 min   </a:t>
+            </a:r>
+            <a:r>
+              <a:rPr sz="1400" b="0" i="0">
+                <a:solidFill>
+                  <a:srgbClr val="1C1B19"/>
+                </a:solidFill>
+                <a:latin typeface="Source Serif 4"/>
+              </a:rPr>
+              <a:t>Myth or fact (stand up, sit down)</a:t>
+            </a:r>
+          </a:p>
+          <a:p>
+            <a:pPr algn="l">
+              <a:spcAft>
+                <a:spcPts val="630"/>
+              </a:spcAft>
+            </a:pPr>
+            <a:r>
+              <a:rPr sz="1300" b="1" i="0">
+                <a:solidFill>
+                  <a:srgbClr val="F47B20"/>
+                </a:solidFill>
+                <a:latin typeface="Inter Tight"/>
+              </a:rPr>
+              <a:t>8 min   </a:t>
+            </a:r>
+            <a:r>
+              <a:rPr sz="1400" b="0" i="0">
+                <a:solidFill>
+                  <a:srgbClr val="1C1B19"/>
+                </a:solidFill>
+                <a:latin typeface="Source Serif 4"/>
+              </a:rPr>
+              <a:t>Three skills, and where they run</a:t>
+            </a:r>
+          </a:p>
+          <a:p>
+            <a:pPr algn="l">
+              <a:spcAft>
+                <a:spcPts val="630"/>
+              </a:spcAft>
+            </a:pPr>
+            <a:r>
+              <a:rPr sz="1300" b="1" i="0">
+                <a:solidFill>
+                  <a:srgbClr val="F47B20"/>
+                </a:solidFill>
+                <a:latin typeface="Inter Tight"/>
+              </a:rPr>
+              <a:t>5 min   </a:t>
+            </a:r>
+            <a:r>
+              <a:rPr sz="1400" b="0" i="0">
+                <a:solidFill>
+                  <a:srgbClr val="1C1B19"/>
+                </a:solidFill>
+                <a:latin typeface="Source Serif 4"/>
+              </a:rPr>
+              <a:t>What knocks them offline (anonymous tally)</a:t>
+            </a:r>
+          </a:p>
+          <a:p>
+            <a:pPr algn="l">
+              <a:spcAft>
+                <a:spcPts val="630"/>
+              </a:spcAft>
+            </a:pPr>
+            <a:r>
+              <a:rPr sz="1300" b="1" i="0">
+                <a:solidFill>
+                  <a:srgbClr val="F47B20"/>
+                </a:solidFill>
+                <a:latin typeface="Inter Tight"/>
+              </a:rPr>
+              <a:t>10 min   </a:t>
+            </a:r>
+            <a:r>
+              <a:rPr sz="1400" b="0" i="0">
+                <a:solidFill>
+                  <a:srgbClr val="1C1B19"/>
+                </a:solidFill>
+                <a:latin typeface="Source Serif 4"/>
+              </a:rPr>
+              <a:t>Offload it: design your system (private card)</a:t>
+            </a:r>
+          </a:p>
+          <a:p>
+            <a:pPr algn="l">
+              <a:spcAft>
+                <a:spcPts val="630"/>
+              </a:spcAft>
+            </a:pPr>
+            <a:r>
+              <a:rPr sz="1300" b="1" i="0">
+                <a:solidFill>
+                  <a:srgbClr val="F47B20"/>
+                </a:solidFill>
+                <a:latin typeface="Inter Tight"/>
+              </a:rPr>
+              <a:t>10 min   </a:t>
+            </a:r>
+            <a:r>
+              <a:rPr sz="1400" b="0" i="0">
+                <a:solidFill>
+                  <a:srgbClr val="1C1B19"/>
+                </a:solidFill>
+                <a:latin typeface="Source Serif 4"/>
+              </a:rPr>
+              <a:t>Three overloaded weeks (small groups)</a:t>
+            </a:r>
+          </a:p>
+          <a:p>
+            <a:pPr algn="l">
+              <a:spcAft>
+                <a:spcPts val="630"/>
+              </a:spcAft>
+            </a:pPr>
+            <a:r>
+              <a:rPr sz="1300" b="1" i="0">
+                <a:solidFill>
+                  <a:srgbClr val="F47B20"/>
+                </a:solidFill>
+                <a:latin typeface="Inter Tight"/>
+              </a:rPr>
+              <a:t>5 min   </a:t>
+            </a:r>
+            <a:r>
+              <a:rPr sz="1400" b="0" i="0">
+                <a:solidFill>
+                  <a:srgbClr val="1C1B19"/>
+                </a:solidFill>
+                <a:latin typeface="Source Serif 4"/>
+              </a:rPr>
+              <a:t>The weekly review</a:t>
+            </a:r>
+          </a:p>
+          <a:p>
+            <a:pPr algn="l">
+              <a:spcAft>
+                <a:spcPts val="630"/>
+              </a:spcAft>
+            </a:pPr>
+            <a:r>
+              <a:rPr sz="1300" b="1" i="0">
+                <a:solidFill>
+                  <a:srgbClr val="F47B20"/>
+                </a:solidFill>
+                <a:latin typeface="Inter Tight"/>
+              </a:rPr>
+              <a:t>2 min   </a:t>
+            </a:r>
+            <a:r>
+              <a:rPr sz="1400" b="0" i="0">
+                <a:solidFill>
+                  <a:srgbClr val="1C1B19"/>
+                </a:solidFill>
+                <a:latin typeface="Source Serif 4"/>
+              </a:rPr>
+              <a:t>Exit card and take-home link</a:t>
+            </a:r>
+          </a:p>
+          <a:p>
+            <a:pPr algn="l">
+              <a:spcAft>
+                <a:spcPts val="630"/>
+              </a:spcAft>
+            </a:pPr>
+            <a:r>
+              <a:rPr sz="1400" b="0" i="0">
+                <a:solidFill>
+                  <a:srgbClr val="1C1B19"/>
+                </a:solidFill>
+                <a:latin typeface="Source Serif 4"/>
+              </a:rPr>
+              <a:t/>
+            </a:r>
+          </a:p>
+          <a:p>
+            <a:pPr algn="l">
+              <a:spcAft>
+                <a:spcPts val="630"/>
+              </a:spcAft>
+            </a:pPr>
+            <a:r>
+              <a:rPr sz="1100" b="1" i="0">
+                <a:solidFill>
+                  <a:srgbClr val="0B2D5B"/>
+                </a:solidFill>
+                <a:latin typeface="Inter Tight"/>
+              </a:rPr>
+              <a:t>SHORT ON TIME (20-MINUTE ADVISORY)</a:t>
+            </a:r>
+          </a:p>
+          <a:p>
+            <a:pPr algn="l">
+              <a:spcAft>
+                <a:spcPts val="630"/>
+              </a:spcAft>
+            </a:pPr>
+            <a:r>
+              <a:rPr sz="1400" b="0" i="0">
+                <a:solidFill>
+                  <a:srgbClr val="1C1B19"/>
+                </a:solidFill>
+                <a:latin typeface="Source Serif 4"/>
+              </a:rPr>
+              <a:t>Myth or fact (5), the offload idea and the five-line card (8), one of the three overloaded weeks (5), exit card (2). The take-home sheet has the weekly review steps.</a:t>
+            </a:r>
+          </a:p>
+        </p:txBody>
+      </p:sp>
+    </p:spTree>
+  </p:cSld>
+  <p:clrMapOvr>
+    <a:masterClrMapping/>
+  </p:clrMapOvr>
+</p:sld>
+</file>
+
+<file path=ppt/slides/slide13.xml><?xml version="1.0" encoding="utf-8"?>
+<p:sld xmlns:a="http://schemas.openxmlformats.org/drawingml/2006/main" xmlns:p="http://schemas.openxmlformats.org/presentationml/2006/main" xmlns:r="http://schemas.openxmlformats.org/officeDocument/2006/relationships" show="0">
+  <p:cSld>
+    <p:bg>
+      <p:bgPr>
+        <a:solidFill>
+          <a:srgbClr val="EEEBE4"/>
+        </a:solidFill>
+        <a:effectLst/>
+      </p:bgPr>
+    </p:bg>
+    <p:spTree>
+      <p:nvGrpSpPr>
+        <p:cNvPr id="1" name=""/>
+        <p:cNvGrpSpPr/>
+        <p:nvPr/>
+      </p:nvGrpSpPr>
+      <p:grpSpPr/>
+      <p:sp>
+        <p:nvSpPr>
+          <p:cNvPr id="2" name="Rectangle 1"/>
+          <p:cNvSpPr/>
+          <p:nvPr/>
+        </p:nvSpPr>
+        <p:spPr>
+          <a:xfrm>
+            <a:off x="0" y="0"/>
+            <a:ext cx="12191695" cy="384048"/>
+          </a:xfrm>
+          <a:prstGeom prst="rect">
+            <a:avLst/>
+          </a:prstGeom>
+          <a:solidFill>
+            <a:srgbClr val="0B2D5B"/>
+          </a:solidFill>
+          <a:ln>
+            <a:noFill/>
+          </a:ln>
+          <a:effectLst/>
+        </p:spPr>
+        <p:style>
+          <a:lnRef idx="1">
+            <a:schemeClr val="accent1"/>
+          </a:lnRef>
+          <a:fillRef idx="3">
+            <a:schemeClr val="accent1"/>
+          </a:fillRef>
+          <a:effectRef idx="2">
+            <a:schemeClr val="accent1"/>
+          </a:effectRef>
+          <a:fontRef idx="minor">
+            <a:schemeClr val="lt1"/>
+          </a:fontRef>
+        </p:style>
+        <p:txBody>
+          <a:bodyPr rtlCol="0" anchor="ctr"/>
+          <a:lstStyle/>
+          <a:p>
+            <a:pPr algn="ctr"/>
+          </a:p>
+        </p:txBody>
+      </p:sp>
+      <p:sp>
+        <p:nvSpPr>
+          <p:cNvPr id="3" name="TextBox 2"/>
+          <p:cNvSpPr txBox="1"/>
+          <p:nvPr/>
+        </p:nvSpPr>
+        <p:spPr>
+          <a:xfrm>
+            <a:off x="548640" y="100584"/>
+            <a:ext cx="10972800" cy="274320"/>
+          </a:xfrm>
+          <a:prstGeom prst="rect">
+            <a:avLst/>
+          </a:prstGeom>
+          <a:noFill/>
+        </p:spPr>
+        <p:txBody>
+          <a:bodyPr wrap="square" anchor="t" lIns="0" rIns="0" tIns="0" bIns="0">
+            <a:spAutoFit/>
+          </a:bodyPr>
+          <a:lstStyle/>
+          <a:p>
+            <a:pPr algn="l">
+              <a:spcAft>
+                <a:spcPts val="495"/>
+              </a:spcAft>
+            </a:pPr>
+            <a:r>
+              <a:rPr sz="1100" b="1" i="0">
+                <a:solidFill>
+                  <a:srgbClr val="FFFFFF"/>
+                </a:solidFill>
+                <a:latin typeface="Inter Tight"/>
+              </a:rPr>
+              <a:t>TEACHER PAGE  ·  skipped when you present  ·  Before you teach</a:t>
+            </a:r>
+          </a:p>
+        </p:txBody>
+      </p:sp>
+      <p:sp>
+        <p:nvSpPr>
+          <p:cNvPr id="4" name="TextBox 3"/>
+          <p:cNvSpPr txBox="1"/>
+          <p:nvPr/>
+        </p:nvSpPr>
+        <p:spPr>
+          <a:xfrm>
+            <a:off x="548640" y="685800"/>
+            <a:ext cx="10972800" cy="640080"/>
+          </a:xfrm>
+          <a:prstGeom prst="rect">
+            <a:avLst/>
+          </a:prstGeom>
+          <a:noFill/>
+        </p:spPr>
+        <p:txBody>
+          <a:bodyPr wrap="square" anchor="t" lIns="0" rIns="0" tIns="0" bIns="0">
+            <a:spAutoFit/>
+          </a:bodyPr>
+          <a:lstStyle/>
+          <a:p>
+            <a:pPr algn="l">
+              <a:spcAft>
+                <a:spcPts val="1350"/>
+              </a:spcAft>
+            </a:pPr>
+            <a:r>
+              <a:rPr sz="3000" b="1" i="0">
+                <a:solidFill>
+                  <a:srgbClr val="1C1B19"/>
+                </a:solidFill>
+                <a:latin typeface="Source Serif 4"/>
+              </a:rPr>
+              <a:t>Before you teach</a:t>
+            </a:r>
+          </a:p>
+        </p:txBody>
+      </p:sp>
+      <p:sp>
+        <p:nvSpPr>
+          <p:cNvPr id="5" name="TextBox 4"/>
+          <p:cNvSpPr txBox="1"/>
+          <p:nvPr/>
+        </p:nvSpPr>
+        <p:spPr>
+          <a:xfrm>
+            <a:off x="548640" y="1463040"/>
+            <a:ext cx="5394960" cy="4937760"/>
+          </a:xfrm>
+          <a:prstGeom prst="rect">
+            <a:avLst/>
+          </a:prstGeom>
+          <a:noFill/>
+        </p:spPr>
+        <p:txBody>
+          <a:bodyPr wrap="square" anchor="t" lIns="0" rIns="0" tIns="0" bIns="0">
+            <a:spAutoFit/>
+          </a:bodyPr>
+          <a:lstStyle/>
+          <a:p>
+            <a:pPr algn="l">
+              <a:spcAft>
+                <a:spcPts val="585"/>
+              </a:spcAft>
+            </a:pPr>
+            <a:r>
+              <a:rPr sz="1500" b="1" i="0">
+                <a:solidFill>
+                  <a:srgbClr val="1C1B19"/>
+                </a:solidFill>
+                <a:latin typeface="Source Serif 4"/>
+              </a:rPr>
+              <a:t>Assume students with ADHD and learning differences are in the room.</a:t>
+            </a:r>
+          </a:p>
+          <a:p>
+            <a:pPr algn="l">
+              <a:spcAft>
+                <a:spcPts val="585"/>
+              </a:spcAft>
+            </a:pPr>
+            <a:r>
+              <a:rPr sz="1300" b="0" i="0">
+                <a:solidFill>
+                  <a:srgbClr val="1C1B19"/>
+                </a:solidFill>
+                <a:latin typeface="Source Serif 4"/>
+              </a:rPr>
+              <a:t>Some have a diagnosis and a learning plan, some are waiting on an evaluation, and some have never been checked. Never ask who has ADHD or who has a plan. Talk about executive function as skills everyone uses, with some brains working harder at them.</a:t>
+            </a:r>
+          </a:p>
+          <a:p>
+            <a:pPr algn="l">
+              <a:spcAft>
+                <a:spcPts val="585"/>
+              </a:spcAft>
+            </a:pPr>
+            <a:r>
+              <a:rPr sz="1300" b="0" i="0">
+                <a:solidFill>
+                  <a:srgbClr val="1C1B19"/>
+                </a:solidFill>
+                <a:latin typeface="Source Serif 4"/>
+              </a:rPr>
+              <a:t/>
+            </a:r>
+          </a:p>
+          <a:p>
+            <a:pPr algn="l">
+              <a:spcAft>
+                <a:spcPts val="585"/>
+              </a:spcAft>
+            </a:pPr>
+            <a:r>
+              <a:rPr sz="1500" b="1" i="0">
+                <a:solidFill>
+                  <a:srgbClr val="1C1B19"/>
+                </a:solidFill>
+                <a:latin typeface="Source Serif 4"/>
+              </a:rPr>
+              <a:t>Drop the word "lazy."</a:t>
+            </a:r>
+          </a:p>
+          <a:p>
+            <a:pPr algn="l">
+              <a:spcAft>
+                <a:spcPts val="585"/>
+              </a:spcAft>
+            </a:pPr>
+            <a:r>
+              <a:rPr sz="1300" b="0" i="0">
+                <a:solidFill>
+                  <a:srgbClr val="1C1B19"/>
+                </a:solidFill>
+                <a:latin typeface="Source Serif 4"/>
+              </a:rPr>
+              <a:t>Many 9th graders have already heard "you're so capable" in that tone. If a student calls themselves lazy or bad at school, name the condition instead: short sleep, a hard week, a missing system. Keep it off any one student's record in front of the class.</a:t>
+            </a:r>
+          </a:p>
+          <a:p>
+            <a:pPr algn="l">
+              <a:spcAft>
+                <a:spcPts val="585"/>
+              </a:spcAft>
+            </a:pPr>
+            <a:r>
+              <a:rPr sz="1300" b="0" i="0">
+                <a:solidFill>
+                  <a:srgbClr val="1C1B19"/>
+                </a:solidFill>
+                <a:latin typeface="Source Serif 4"/>
+              </a:rPr>
+              <a:t/>
+            </a:r>
+          </a:p>
+          <a:p>
+            <a:pPr algn="l">
+              <a:spcAft>
+                <a:spcPts val="585"/>
+              </a:spcAft>
+            </a:pPr>
+            <a:r>
+              <a:rPr sz="1500" b="1" i="0">
+                <a:solidFill>
+                  <a:srgbClr val="1C1B19"/>
+                </a:solidFill>
+                <a:latin typeface="Source Serif 4"/>
+              </a:rPr>
+              <a:t>Home responsibilities stay private.</a:t>
+            </a:r>
+          </a:p>
+          <a:p>
+            <a:pPr algn="l">
+              <a:spcAft>
+                <a:spcPts val="585"/>
+              </a:spcAft>
+            </a:pPr>
+            <a:r>
+              <a:rPr sz="1300" b="0" i="0">
+                <a:solidFill>
+                  <a:srgbClr val="1C1B19"/>
+                </a:solidFill>
+                <a:latin typeface="Source Serif 4"/>
+              </a:rPr>
+              <a:t>Some students watch siblings, work, or travel between two homes. The system card goes home with them. Nobody explains why their afternoons are full.</a:t>
+            </a:r>
+          </a:p>
+          <a:p>
+            <a:pPr algn="l">
+              <a:spcAft>
+                <a:spcPts val="585"/>
+              </a:spcAft>
+            </a:pPr>
+            <a:r>
+              <a:rPr sz="1300" b="0" i="0">
+                <a:solidFill>
+                  <a:srgbClr val="1C1B19"/>
+                </a:solidFill>
+                <a:latin typeface="Source Serif 4"/>
+              </a:rPr>
+              <a:t/>
+            </a:r>
+          </a:p>
+        </p:txBody>
+      </p:sp>
+      <p:sp>
+        <p:nvSpPr>
+          <p:cNvPr id="6" name="TextBox 5"/>
+          <p:cNvSpPr txBox="1"/>
+          <p:nvPr/>
+        </p:nvSpPr>
+        <p:spPr>
+          <a:xfrm>
+            <a:off x="6217920" y="1463040"/>
+            <a:ext cx="5394960" cy="4937760"/>
+          </a:xfrm>
+          <a:prstGeom prst="rect">
+            <a:avLst/>
+          </a:prstGeom>
+          <a:noFill/>
+        </p:spPr>
+        <p:txBody>
+          <a:bodyPr wrap="square" anchor="t" lIns="0" rIns="0" tIns="0" bIns="0">
+            <a:spAutoFit/>
+          </a:bodyPr>
+          <a:lstStyle/>
+          <a:p>
+            <a:pPr algn="l">
+              <a:spcAft>
+                <a:spcPts val="585"/>
+              </a:spcAft>
+            </a:pPr>
+            <a:r>
+              <a:rPr sz="1500" b="1" i="0">
+                <a:solidFill>
+                  <a:srgbClr val="1C1B19"/>
+                </a:solidFill>
+                <a:latin typeface="Source Serif 4"/>
+              </a:rPr>
+              <a:t>Know who handles evaluations at your school.</a:t>
+            </a:r>
+          </a:p>
+          <a:p>
+            <a:pPr algn="l">
+              <a:spcAft>
+                <a:spcPts val="585"/>
+              </a:spcAft>
+            </a:pPr>
+            <a:r>
+              <a:rPr sz="1300" b="0" i="0">
+                <a:solidFill>
+                  <a:srgbClr val="1C1B19"/>
+                </a:solidFill>
+                <a:latin typeface="Source Serif 4"/>
+              </a:rPr>
+              <a:t>If a student says "I've always been like this," thank them and point them to a counselor or learning specialist after class. Know ahead of time who that is and how a learning plan conversation starts, so you can answer in one sentence.</a:t>
+            </a:r>
+          </a:p>
+          <a:p>
+            <a:pPr algn="l">
+              <a:spcAft>
+                <a:spcPts val="585"/>
+              </a:spcAft>
+            </a:pPr>
+            <a:r>
+              <a:rPr sz="1300" b="0" i="0">
+                <a:solidFill>
+                  <a:srgbClr val="1C1B19"/>
+                </a:solidFill>
+                <a:latin typeface="Source Serif 4"/>
+              </a:rPr>
+              <a:t/>
+            </a:r>
+          </a:p>
+          <a:p>
+            <a:pPr algn="l">
+              <a:spcAft>
+                <a:spcPts val="585"/>
+              </a:spcAft>
+            </a:pPr>
+            <a:r>
+              <a:rPr sz="1500" b="1" i="0">
+                <a:solidFill>
+                  <a:srgbClr val="1C1B19"/>
+                </a:solidFill>
+                <a:latin typeface="Source Serif 4"/>
+              </a:rPr>
+              <a:t>Stress and sleep can be the bigger story.</a:t>
+            </a:r>
+          </a:p>
+          <a:p>
+            <a:pPr algn="l">
+              <a:spcAft>
+                <a:spcPts val="585"/>
+              </a:spcAft>
+            </a:pPr>
+            <a:r>
+              <a:rPr sz="1300" b="0" i="0">
+                <a:solidFill>
+                  <a:srgbClr val="1C1B19"/>
+                </a:solidFill>
+                <a:latin typeface="Source Serif 4"/>
+              </a:rPr>
+              <a:t>If a student describes not sleeping, feeling hopeless about school, or seeing themselves as a failure, follow up privately and bring in a counselor. Don't ask about any of this in class.</a:t>
+            </a:r>
+          </a:p>
+          <a:p>
+            <a:pPr algn="l">
+              <a:spcAft>
+                <a:spcPts val="585"/>
+              </a:spcAft>
+            </a:pPr>
+            <a:r>
+              <a:rPr sz="1300" b="0" i="0">
+                <a:solidFill>
+                  <a:srgbClr val="1C1B19"/>
+                </a:solidFill>
+                <a:latin typeface="Source Serif 4"/>
+              </a:rPr>
+              <a:t/>
+            </a:r>
+          </a:p>
+          <a:p>
+            <a:pPr algn="l">
+              <a:spcAft>
+                <a:spcPts val="585"/>
+              </a:spcAft>
+            </a:pPr>
+            <a:r>
+              <a:rPr sz="1500" b="1" i="0">
+                <a:solidFill>
+                  <a:srgbClr val="1C1B19"/>
+                </a:solidFill>
+                <a:latin typeface="Source Serif 4"/>
+              </a:rPr>
+              <a:t>Keep the phone research honest.</a:t>
+            </a:r>
+          </a:p>
+          <a:p>
+            <a:pPr algn="l">
+              <a:spcAft>
+                <a:spcPts val="585"/>
+              </a:spcAft>
+            </a:pPr>
+            <a:r>
+              <a:rPr sz="1300" b="0" i="0">
+                <a:solidFill>
+                  <a:srgbClr val="1C1B19"/>
+                </a:solidFill>
+                <a:latin typeface="Source Serif 4"/>
+              </a:rPr>
+              <a:t>The 2009 Stanford multitasking study hasn't always repeated in later work. Present it as a warning sign. The cost of switching tasks is the well-established part, and it's enough. Skip the phone lecture; students tune out fast.</a:t>
+            </a:r>
+          </a:p>
+          <a:p>
+            <a:pPr algn="l">
+              <a:spcAft>
+                <a:spcPts val="585"/>
+              </a:spcAft>
+            </a:pPr>
+            <a:r>
+              <a:rPr sz="1300" b="0" i="0">
+                <a:solidFill>
+                  <a:srgbClr val="1C1B19"/>
+                </a:solidFill>
+                <a:latin typeface="Source Serif 4"/>
+              </a:rPr>
+              <a:t/>
+            </a:r>
+          </a:p>
+        </p:txBody>
+      </p:sp>
+    </p:spTree>
+  </p:cSld>
+  <p:clrMapOvr>
+    <a:masterClrMapping/>
+  </p:clrMapOvr>
+</p:sld>
+</file>
+
+<file path=ppt/slides/slide14.xml><?xml version="1.0" encoding="utf-8"?>
+<p:sld xmlns:a="http://schemas.openxmlformats.org/drawingml/2006/main" xmlns:p="http://schemas.openxmlformats.org/presentationml/2006/main" xmlns:r="http://schemas.openxmlformats.org/officeDocument/2006/relationships" show="0">
+  <p:cSld>
+    <p:bg>
+      <p:bgPr>
+        <a:solidFill>
+          <a:srgbClr val="EEEBE4"/>
+        </a:solidFill>
+        <a:effectLst/>
+      </p:bgPr>
+    </p:bg>
+    <p:spTree>
+      <p:nvGrpSpPr>
+        <p:cNvPr id="1" name=""/>
+        <p:cNvGrpSpPr/>
+        <p:nvPr/>
+      </p:nvGrpSpPr>
+      <p:grpSpPr/>
+      <p:sp>
+        <p:nvSpPr>
+          <p:cNvPr id="2" name="Rectangle 1"/>
+          <p:cNvSpPr/>
+          <p:nvPr/>
+        </p:nvSpPr>
+        <p:spPr>
+          <a:xfrm>
+            <a:off x="0" y="0"/>
+            <a:ext cx="12191695" cy="384048"/>
+          </a:xfrm>
+          <a:prstGeom prst="rect">
+            <a:avLst/>
+          </a:prstGeom>
+          <a:solidFill>
+            <a:srgbClr val="0B2D5B"/>
+          </a:solidFill>
+          <a:ln>
+            <a:noFill/>
+          </a:ln>
+          <a:effectLst/>
+        </p:spPr>
+        <p:style>
+          <a:lnRef idx="1">
+            <a:schemeClr val="accent1"/>
+          </a:lnRef>
+          <a:fillRef idx="3">
+            <a:schemeClr val="accent1"/>
+          </a:fillRef>
+          <a:effectRef idx="2">
+            <a:schemeClr val="accent1"/>
+          </a:effectRef>
+          <a:fontRef idx="minor">
+            <a:schemeClr val="lt1"/>
+          </a:fontRef>
+        </p:style>
+        <p:txBody>
+          <a:bodyPr rtlCol="0" anchor="ctr"/>
+          <a:lstStyle/>
+          <a:p>
+            <a:pPr algn="ctr"/>
+          </a:p>
+        </p:txBody>
+      </p:sp>
+      <p:sp>
+        <p:nvSpPr>
+          <p:cNvPr id="3" name="TextBox 2"/>
+          <p:cNvSpPr txBox="1"/>
+          <p:nvPr/>
+        </p:nvSpPr>
+        <p:spPr>
+          <a:xfrm>
+            <a:off x="548640" y="100584"/>
+            <a:ext cx="10972800" cy="274320"/>
+          </a:xfrm>
+          <a:prstGeom prst="rect">
+            <a:avLst/>
+          </a:prstGeom>
+          <a:noFill/>
+        </p:spPr>
+        <p:txBody>
+          <a:bodyPr wrap="square" anchor="t" lIns="0" rIns="0" tIns="0" bIns="0">
+            <a:spAutoFit/>
+          </a:bodyPr>
+          <a:lstStyle/>
+          <a:p>
+            <a:pPr algn="l">
+              <a:spcAft>
+                <a:spcPts val="495"/>
+              </a:spcAft>
+            </a:pPr>
+            <a:r>
+              <a:rPr sz="1100" b="1" i="0">
+                <a:solidFill>
+                  <a:srgbClr val="FFFFFF"/>
+                </a:solidFill>
+                <a:latin typeface="Inter Tight"/>
+              </a:rPr>
+              <a:t>TEACHER PAGE  ·  skipped when you present  ·  Every student in the room</a:t>
+            </a:r>
+          </a:p>
+        </p:txBody>
+      </p:sp>
+      <p:sp>
+        <p:nvSpPr>
+          <p:cNvPr id="4" name="TextBox 3"/>
+          <p:cNvSpPr txBox="1"/>
+          <p:nvPr/>
+        </p:nvSpPr>
+        <p:spPr>
+          <a:xfrm>
+            <a:off x="548640" y="685800"/>
+            <a:ext cx="10972800" cy="640080"/>
+          </a:xfrm>
+          <a:prstGeom prst="rect">
+            <a:avLst/>
+          </a:prstGeom>
+          <a:noFill/>
+        </p:spPr>
+        <p:txBody>
+          <a:bodyPr wrap="square" anchor="t" lIns="0" rIns="0" tIns="0" bIns="0">
+            <a:spAutoFit/>
+          </a:bodyPr>
+          <a:lstStyle/>
+          <a:p>
+            <a:pPr algn="l">
+              <a:spcAft>
+                <a:spcPts val="1350"/>
+              </a:spcAft>
+            </a:pPr>
+            <a:r>
+              <a:rPr sz="3000" b="1" i="0">
+                <a:solidFill>
+                  <a:srgbClr val="1C1B19"/>
+                </a:solidFill>
+                <a:latin typeface="Source Serif 4"/>
+              </a:rPr>
+              <a:t>Every student in the room</a:t>
+            </a:r>
+          </a:p>
+        </p:txBody>
+      </p:sp>
+      <p:sp>
+        <p:nvSpPr>
+          <p:cNvPr id="5" name="TextBox 4"/>
+          <p:cNvSpPr txBox="1"/>
+          <p:nvPr/>
+        </p:nvSpPr>
+        <p:spPr>
+          <a:xfrm>
+            <a:off x="548640" y="1325880"/>
+            <a:ext cx="10972800" cy="365760"/>
+          </a:xfrm>
+          <a:prstGeom prst="rect">
+            <a:avLst/>
+          </a:prstGeom>
+          <a:noFill/>
+        </p:spPr>
+        <p:txBody>
+          <a:bodyPr wrap="square" anchor="t" lIns="0" rIns="0" tIns="0" bIns="0">
+            <a:spAutoFit/>
+          </a:bodyPr>
+          <a:lstStyle/>
+          <a:p>
+            <a:pPr algn="l">
+              <a:spcAft>
+                <a:spcPts val="630"/>
+              </a:spcAft>
+            </a:pPr>
+            <a:r>
+              <a:rPr sz="1400" b="0" i="0">
+                <a:solidFill>
+                  <a:srgbClr val="5D5A54"/>
+                </a:solidFill>
+                <a:latin typeface="Inter Tight"/>
+              </a:rPr>
+              <a:t>Culture, family, identity, ability and money: what to keep in mind for this topic.</a:t>
+            </a:r>
+          </a:p>
+        </p:txBody>
+      </p:sp>
+      <p:sp>
+        <p:nvSpPr>
+          <p:cNvPr id="6" name="TextBox 5"/>
+          <p:cNvSpPr txBox="1"/>
+          <p:nvPr/>
+        </p:nvSpPr>
+        <p:spPr>
+          <a:xfrm>
+            <a:off x="548640" y="1828800"/>
+            <a:ext cx="5394960" cy="4572000"/>
+          </a:xfrm>
+          <a:prstGeom prst="rect">
+            <a:avLst/>
+          </a:prstGeom>
+          <a:noFill/>
+        </p:spPr>
+        <p:txBody>
+          <a:bodyPr wrap="square" anchor="t" lIns="0" rIns="0" tIns="0" bIns="0">
+            <a:spAutoFit/>
+          </a:bodyPr>
+          <a:lstStyle/>
+          <a:p>
+            <a:pPr algn="l">
+              <a:spcAft>
+                <a:spcPts val="585"/>
+              </a:spcAft>
+            </a:pPr>
+            <a:r>
+              <a:rPr sz="1500" b="1" i="0">
+                <a:solidFill>
+                  <a:srgbClr val="1C1B19"/>
+                </a:solidFill>
+                <a:latin typeface="Source Serif 4"/>
+              </a:rPr>
+              <a:t>Fixed blocks look different in every home.</a:t>
+            </a:r>
+          </a:p>
+          <a:p>
+            <a:pPr algn="l">
+              <a:spcAft>
+                <a:spcPts val="585"/>
+              </a:spcAft>
+            </a:pPr>
+            <a:r>
+              <a:rPr sz="1300" b="0" i="0">
+                <a:solidFill>
+                  <a:srgbClr val="1C1B19"/>
+                </a:solidFill>
+                <a:latin typeface="Source Serif 4"/>
+              </a:rPr>
+              <a:t>Some students pick up a sibling, watch younger cousins until a grandparent gets home, or split the week between two homes with two calendars. Treat these as the frame the plan fits around. The Nia scenario is built for this.</a:t>
+            </a:r>
+          </a:p>
+          <a:p>
+            <a:pPr algn="l">
+              <a:spcAft>
+                <a:spcPts val="585"/>
+              </a:spcAft>
+            </a:pPr>
+            <a:r>
+              <a:rPr sz="1300" b="0" i="0">
+                <a:solidFill>
+                  <a:srgbClr val="1C1B19"/>
+                </a:solidFill>
+                <a:latin typeface="Source Serif 4"/>
+              </a:rPr>
+              <a:t/>
+            </a:r>
+          </a:p>
+          <a:p>
+            <a:pPr algn="l">
+              <a:spcAft>
+                <a:spcPts val="585"/>
+              </a:spcAft>
+            </a:pPr>
+            <a:r>
+              <a:rPr sz="1500" b="1" i="0">
+                <a:solidFill>
+                  <a:srgbClr val="1C1B19"/>
+                </a:solidFill>
+                <a:latin typeface="Source Serif 4"/>
+              </a:rPr>
+              <a:t>A system shouldn't cost money or space.</a:t>
+            </a:r>
+          </a:p>
+          <a:p>
+            <a:pPr algn="l">
+              <a:spcAft>
+                <a:spcPts val="585"/>
+              </a:spcAft>
+            </a:pPr>
+            <a:r>
+              <a:rPr sz="1300" b="0" i="0">
+                <a:solidFill>
+                  <a:srgbClr val="1C1B19"/>
+                </a:solidFill>
+                <a:latin typeface="Source Serif 4"/>
+              </a:rPr>
+              <a:t>A paper list is free and works. Not every student has a desk, a quiet room, or a phone that can live in another room. "Design the room" can mean headphones, the library before school, or the phone face down in a backpack.</a:t>
+            </a:r>
+          </a:p>
+          <a:p>
+            <a:pPr algn="l">
+              <a:spcAft>
+                <a:spcPts val="585"/>
+              </a:spcAft>
+            </a:pPr>
+            <a:r>
+              <a:rPr sz="1300" b="0" i="0">
+                <a:solidFill>
+                  <a:srgbClr val="1C1B19"/>
+                </a:solidFill>
+                <a:latin typeface="Source Serif 4"/>
+              </a:rPr>
+              <a:t/>
+            </a:r>
+          </a:p>
+          <a:p>
+            <a:pPr algn="l">
+              <a:spcAft>
+                <a:spcPts val="585"/>
+              </a:spcAft>
+            </a:pPr>
+            <a:r>
+              <a:rPr sz="1500" b="1" i="0">
+                <a:solidFill>
+                  <a:srgbClr val="1C1B19"/>
+                </a:solidFill>
+                <a:latin typeface="Source Serif 4"/>
+              </a:rPr>
+              <a:t>ADHD and learning differences.</a:t>
+            </a:r>
+          </a:p>
+          <a:p>
+            <a:pPr algn="l">
+              <a:spcAft>
+                <a:spcPts val="585"/>
+              </a:spcAft>
+            </a:pPr>
+            <a:r>
+              <a:rPr sz="1300" b="0" i="0">
+                <a:solidFill>
+                  <a:srgbClr val="1C1B19"/>
+                </a:solidFill>
+                <a:latin typeface="Source Serif 4"/>
+              </a:rPr>
+              <a:t>ADHD is largely a difference in executive function and has nothing to do with intelligence or effort. More outside structure helps. Some families are wary of evaluations or labels; present an evaluation as information that can open supports like a learning plan, and leave the decision with the student and family.</a:t>
+            </a:r>
+          </a:p>
+          <a:p>
+            <a:pPr algn="l">
+              <a:spcAft>
+                <a:spcPts val="585"/>
+              </a:spcAft>
+            </a:pPr>
+            <a:r>
+              <a:rPr sz="1300" b="0" i="0">
+                <a:solidFill>
+                  <a:srgbClr val="1C1B19"/>
+                </a:solidFill>
+                <a:latin typeface="Source Serif 4"/>
+              </a:rPr>
+              <a:t/>
+            </a:r>
+          </a:p>
+        </p:txBody>
+      </p:sp>
+      <p:sp>
+        <p:nvSpPr>
+          <p:cNvPr id="7" name="TextBox 6"/>
+          <p:cNvSpPr txBox="1"/>
+          <p:nvPr/>
+        </p:nvSpPr>
+        <p:spPr>
+          <a:xfrm>
+            <a:off x="6217920" y="1828800"/>
+            <a:ext cx="5394960" cy="4572000"/>
+          </a:xfrm>
+          <a:prstGeom prst="rect">
+            <a:avLst/>
+          </a:prstGeom>
+          <a:noFill/>
+        </p:spPr>
+        <p:txBody>
+          <a:bodyPr wrap="square" anchor="t" lIns="0" rIns="0" tIns="0" bIns="0">
+            <a:spAutoFit/>
+          </a:bodyPr>
+          <a:lstStyle/>
+          <a:p>
+            <a:pPr algn="l">
+              <a:spcAft>
+                <a:spcPts val="585"/>
+              </a:spcAft>
+            </a:pPr>
+            <a:r>
+              <a:rPr sz="1500" b="1" i="0">
+                <a:solidFill>
+                  <a:srgbClr val="1C1B19"/>
+                </a:solidFill>
+                <a:latin typeface="Source Serif 4"/>
+              </a:rPr>
+              <a:t>Faith commitments are fixed blocks too.</a:t>
+            </a:r>
+          </a:p>
+          <a:p>
+            <a:pPr algn="l">
+              <a:spcAft>
+                <a:spcPts val="585"/>
+              </a:spcAft>
+            </a:pPr>
+            <a:r>
+              <a:rPr sz="1300" b="0" i="0">
+                <a:solidFill>
+                  <a:srgbClr val="1C1B19"/>
+                </a:solidFill>
+                <a:latin typeface="Source Serif 4"/>
+              </a:rPr>
+              <a:t>Religious services, holy days, and evening classes at a faith community belong on the calendar first, the same as practice. For students without those, the review step simply skips it.</a:t>
+            </a:r>
+          </a:p>
+          <a:p>
+            <a:pPr algn="l">
+              <a:spcAft>
+                <a:spcPts val="585"/>
+              </a:spcAft>
+            </a:pPr>
+            <a:r>
+              <a:rPr sz="1300" b="0" i="0">
+                <a:solidFill>
+                  <a:srgbClr val="1C1B19"/>
+                </a:solidFill>
+                <a:latin typeface="Source Serif 4"/>
+              </a:rPr>
+              <a:t/>
+            </a:r>
+          </a:p>
+          <a:p>
+            <a:pPr algn="l">
+              <a:spcAft>
+                <a:spcPts val="585"/>
+              </a:spcAft>
+            </a:pPr>
+            <a:r>
+              <a:rPr sz="1500" b="1" i="0">
+                <a:solidFill>
+                  <a:srgbClr val="1C1B19"/>
+                </a:solidFill>
+                <a:latin typeface="Source Serif 4"/>
+              </a:rPr>
+              <a:t>Asking a teacher for help varies by upbringing.</a:t>
+            </a:r>
+          </a:p>
+          <a:p>
+            <a:pPr algn="l">
+              <a:spcAft>
+                <a:spcPts val="585"/>
+              </a:spcAft>
+            </a:pPr>
+            <a:r>
+              <a:rPr sz="1300" b="0" i="0">
+                <a:solidFill>
+                  <a:srgbClr val="1C1B19"/>
+                </a:solidFill>
+                <a:latin typeface="Source Serif 4"/>
+              </a:rPr>
+              <a:t>In some homes questioning an adult or asking for an extension feels disrespectful. Model the exact words for "email a teacher now" so it reads as planning ahead, which most teachers welcome.</a:t>
+            </a:r>
+          </a:p>
+          <a:p>
+            <a:pPr algn="l">
+              <a:spcAft>
+                <a:spcPts val="585"/>
+              </a:spcAft>
+            </a:pPr>
+            <a:r>
+              <a:rPr sz="1300" b="0" i="0">
+                <a:solidFill>
+                  <a:srgbClr val="1C1B19"/>
+                </a:solidFill>
+                <a:latin typeface="Source Serif 4"/>
+              </a:rPr>
+              <a:t/>
+            </a:r>
+          </a:p>
+          <a:p>
+            <a:pPr algn="l">
+              <a:spcAft>
+                <a:spcPts val="585"/>
+              </a:spcAft>
+            </a:pPr>
+            <a:r>
+              <a:rPr sz="1500" b="1" i="0">
+                <a:solidFill>
+                  <a:srgbClr val="1C1B19"/>
+                </a:solidFill>
+                <a:latin typeface="Source Serif 4"/>
+              </a:rPr>
+              <a:t>Language at home.</a:t>
+            </a:r>
+          </a:p>
+          <a:p>
+            <a:pPr algn="l">
+              <a:spcAft>
+                <a:spcPts val="585"/>
+              </a:spcAft>
+            </a:pPr>
+            <a:r>
+              <a:rPr sz="1300" b="0" i="0">
+                <a:solidFill>
+                  <a:srgbClr val="1C1B19"/>
+                </a:solidFill>
+                <a:latin typeface="Source Serif 4"/>
+              </a:rPr>
+              <a:t>Some students translate forms and emails for their family, which is one more thing to track. If an evaluation comes up, families can ask the school for an interpreter. The take-home sheet is in plain language they can share.</a:t>
+            </a:r>
+          </a:p>
+          <a:p>
+            <a:pPr algn="l">
+              <a:spcAft>
+                <a:spcPts val="585"/>
+              </a:spcAft>
+            </a:pPr>
+            <a:r>
+              <a:rPr sz="1300" b="0" i="0">
+                <a:solidFill>
+                  <a:srgbClr val="1C1B19"/>
+                </a:solidFill>
+                <a:latin typeface="Source Serif 4"/>
+              </a:rPr>
+              <a:t/>
+            </a:r>
+          </a:p>
+        </p:txBody>
+      </p:sp>
+    </p:spTree>
+  </p:cSld>
+  <p:clrMapOvr>
+    <a:masterClrMapping/>
+  </p:clrMapOvr>
+</p:sld>
+</file>
+
+<file path=ppt/slides/slide15.xml><?xml version="1.0" encoding="utf-8"?>
+<p:sld xmlns:a="http://schemas.openxmlformats.org/drawingml/2006/main" xmlns:p="http://schemas.openxmlformats.org/presentationml/2006/main" xmlns:r="http://schemas.openxmlformats.org/officeDocument/2006/relationships" show="0">
+  <p:cSld>
+    <p:bg>
+      <p:bgPr>
+        <a:solidFill>
+          <a:srgbClr val="EEEBE4"/>
+        </a:solidFill>
+        <a:effectLst/>
+      </p:bgPr>
+    </p:bg>
+    <p:spTree>
+      <p:nvGrpSpPr>
+        <p:cNvPr id="1" name=""/>
+        <p:cNvGrpSpPr/>
+        <p:nvPr/>
+      </p:nvGrpSpPr>
+      <p:grpSpPr/>
+      <p:sp>
+        <p:nvSpPr>
+          <p:cNvPr id="2" name="Rectangle 1"/>
+          <p:cNvSpPr/>
+          <p:nvPr/>
+        </p:nvSpPr>
+        <p:spPr>
+          <a:xfrm>
+            <a:off x="0" y="0"/>
+            <a:ext cx="12191695" cy="384048"/>
+          </a:xfrm>
+          <a:prstGeom prst="rect">
+            <a:avLst/>
+          </a:prstGeom>
+          <a:solidFill>
+            <a:srgbClr val="0B2D5B"/>
+          </a:solidFill>
+          <a:ln>
+            <a:noFill/>
+          </a:ln>
+          <a:effectLst/>
+        </p:spPr>
+        <p:style>
+          <a:lnRef idx="1">
+            <a:schemeClr val="accent1"/>
+          </a:lnRef>
+          <a:fillRef idx="3">
+            <a:schemeClr val="accent1"/>
+          </a:fillRef>
+          <a:effectRef idx="2">
+            <a:schemeClr val="accent1"/>
+          </a:effectRef>
+          <a:fontRef idx="minor">
+            <a:schemeClr val="lt1"/>
+          </a:fontRef>
+        </p:style>
+        <p:txBody>
+          <a:bodyPr rtlCol="0" anchor="ctr"/>
+          <a:lstStyle/>
+          <a:p>
+            <a:pPr algn="ctr"/>
+          </a:p>
+        </p:txBody>
+      </p:sp>
+      <p:sp>
+        <p:nvSpPr>
+          <p:cNvPr id="3" name="TextBox 2"/>
+          <p:cNvSpPr txBox="1"/>
+          <p:nvPr/>
+        </p:nvSpPr>
+        <p:spPr>
+          <a:xfrm>
+            <a:off x="548640" y="100584"/>
+            <a:ext cx="10972800" cy="274320"/>
+          </a:xfrm>
+          <a:prstGeom prst="rect">
+            <a:avLst/>
+          </a:prstGeom>
+          <a:noFill/>
+        </p:spPr>
+        <p:txBody>
+          <a:bodyPr wrap="square" anchor="t" lIns="0" rIns="0" tIns="0" bIns="0">
+            <a:spAutoFit/>
+          </a:bodyPr>
+          <a:lstStyle/>
+          <a:p>
+            <a:pPr algn="l">
+              <a:spcAft>
+                <a:spcPts val="495"/>
+              </a:spcAft>
+            </a:pPr>
+            <a:r>
+              <a:rPr sz="1100" b="1" i="0">
+                <a:solidFill>
+                  <a:srgbClr val="FFFFFF"/>
+                </a:solidFill>
+                <a:latin typeface="Inter Tight"/>
+              </a:rPr>
+              <a:t>TEACHER PAGE  ·  skipped when you present  ·  Background</a:t>
+            </a:r>
+          </a:p>
+        </p:txBody>
+      </p:sp>
+      <p:sp>
+        <p:nvSpPr>
+          <p:cNvPr id="4" name="TextBox 3"/>
+          <p:cNvSpPr txBox="1"/>
+          <p:nvPr/>
+        </p:nvSpPr>
+        <p:spPr>
+          <a:xfrm>
+            <a:off x="548640" y="685800"/>
+            <a:ext cx="10972800" cy="640080"/>
+          </a:xfrm>
+          <a:prstGeom prst="rect">
+            <a:avLst/>
+          </a:prstGeom>
+          <a:noFill/>
+        </p:spPr>
+        <p:txBody>
+          <a:bodyPr wrap="square" anchor="t" lIns="0" rIns="0" tIns="0" bIns="0">
+            <a:spAutoFit/>
+          </a:bodyPr>
+          <a:lstStyle/>
+          <a:p>
+            <a:pPr algn="l">
+              <a:spcAft>
+                <a:spcPts val="1350"/>
+              </a:spcAft>
+            </a:pPr>
+            <a:r>
+              <a:rPr sz="3000" b="1" i="0">
+                <a:solidFill>
+                  <a:srgbClr val="1C1B19"/>
+                </a:solidFill>
+                <a:latin typeface="Source Serif 4"/>
+              </a:rPr>
+              <a:t>What the research says</a:t>
+            </a:r>
+          </a:p>
+        </p:txBody>
+      </p:sp>
+      <p:sp>
+        <p:nvSpPr>
+          <p:cNvPr id="5" name="TextBox 4"/>
+          <p:cNvSpPr txBox="1"/>
+          <p:nvPr/>
+        </p:nvSpPr>
+        <p:spPr>
+          <a:xfrm>
+            <a:off x="548640" y="1463040"/>
+            <a:ext cx="5394960" cy="4937760"/>
+          </a:xfrm>
+          <a:prstGeom prst="rect">
+            <a:avLst/>
+          </a:prstGeom>
+          <a:noFill/>
+        </p:spPr>
+        <p:txBody>
+          <a:bodyPr wrap="square" anchor="t" lIns="0" rIns="0" tIns="0" bIns="0">
+            <a:spAutoFit/>
+          </a:bodyPr>
+          <a:lstStyle/>
+          <a:p>
+            <a:pPr algn="l">
+              <a:spcAft>
+                <a:spcPts val="585"/>
+              </a:spcAft>
+            </a:pPr>
+            <a:r>
+              <a:rPr sz="1300" b="0" i="0">
+                <a:solidFill>
+                  <a:srgbClr val="1C1B19"/>
+                </a:solidFill>
+                <a:latin typeface="Source Serif 4"/>
+              </a:rPr>
+              <a:t>College students given a set of thinking tasks showed three related but separate abilities: updating (working memory), inhibition, and shifting (flexibility).</a:t>
+            </a:r>
+          </a:p>
+          <a:p>
+            <a:pPr algn="l">
+              <a:spcAft>
+                <a:spcPts val="585"/>
+              </a:spcAft>
+            </a:pPr>
+            <a:r>
+              <a:rPr sz="1050" b="0" i="0">
+                <a:solidFill>
+                  <a:srgbClr val="5D5A54"/>
+                </a:solidFill>
+                <a:latin typeface="Inter Tight"/>
+              </a:rPr>
+              <a:t>Miyake et al., Cognitive Psychology, 2000</a:t>
+            </a:r>
+          </a:p>
+          <a:p>
+            <a:pPr algn="l">
+              <a:spcAft>
+                <a:spcPts val="585"/>
+              </a:spcAft>
+            </a:pPr>
+            <a:r>
+              <a:rPr sz="1300" b="0" i="0">
+                <a:solidFill>
+                  <a:srgbClr val="1C1B19"/>
+                </a:solidFill>
+                <a:latin typeface="Source Serif 4"/>
+              </a:rPr>
+              <a:t>Four things reliably weaken executive function: stress, poor sleep, loneliness, and lack of exercise.</a:t>
+            </a:r>
+          </a:p>
+          <a:p>
+            <a:pPr algn="l">
+              <a:spcAft>
+                <a:spcPts val="585"/>
+              </a:spcAft>
+            </a:pPr>
+            <a:r>
+              <a:rPr sz="1050" b="0" i="0">
+                <a:solidFill>
+                  <a:srgbClr val="5D5A54"/>
+                </a:solidFill>
+                <a:latin typeface="Inter Tight"/>
+              </a:rPr>
+              <a:t>Diamond, Annual Review of Psychology, 2013</a:t>
+            </a:r>
+          </a:p>
+          <a:p>
+            <a:pPr algn="l">
+              <a:spcAft>
+                <a:spcPts val="585"/>
+              </a:spcAft>
+            </a:pPr>
+            <a:r>
+              <a:rPr sz="1300" b="0" i="0">
+                <a:solidFill>
+                  <a:srgbClr val="1C1B19"/>
+                </a:solidFill>
+                <a:latin typeface="Source Serif 4"/>
+              </a:rPr>
+              <a:t>Scanning the same young people every two years from childhood into their early 20s, the dorsolateral prefrontal cortex was among the last areas to mature, finishing at the end of adolescence.</a:t>
+            </a:r>
+          </a:p>
+          <a:p>
+            <a:pPr algn="l">
+              <a:spcAft>
+                <a:spcPts val="585"/>
+              </a:spcAft>
+            </a:pPr>
+            <a:r>
+              <a:rPr sz="1050" b="0" i="0">
+                <a:solidFill>
+                  <a:srgbClr val="5D5A54"/>
+                </a:solidFill>
+                <a:latin typeface="Inter Tight"/>
+              </a:rPr>
+              <a:t>Gogtay et al., PNAS, 2004</a:t>
+            </a:r>
+          </a:p>
+        </p:txBody>
+      </p:sp>
+      <p:sp>
+        <p:nvSpPr>
+          <p:cNvPr id="6" name="TextBox 5"/>
+          <p:cNvSpPr txBox="1"/>
+          <p:nvPr/>
+        </p:nvSpPr>
+        <p:spPr>
+          <a:xfrm>
+            <a:off x="6217920" y="1463040"/>
+            <a:ext cx="5394960" cy="4937760"/>
+          </a:xfrm>
+          <a:prstGeom prst="rect">
+            <a:avLst/>
+          </a:prstGeom>
+          <a:noFill/>
+        </p:spPr>
+        <p:txBody>
+          <a:bodyPr wrap="square" anchor="t" lIns="0" rIns="0" tIns="0" bIns="0">
+            <a:spAutoFit/>
+          </a:bodyPr>
+          <a:lstStyle/>
+          <a:p>
+            <a:pPr algn="l">
+              <a:spcAft>
+                <a:spcPts val="585"/>
+              </a:spcAft>
+            </a:pPr>
+            <a:r>
+              <a:rPr sz="1300" b="0" i="0">
+                <a:solidFill>
+                  <a:srgbClr val="1C1B19"/>
+                </a:solidFill>
+                <a:latin typeface="Source Serif 4"/>
+              </a:rPr>
+              <a:t>The Dunedin study followed about 1,000 New Zealanders from birth to 32. Childhood self-control predicted adult health, finances, and run-ins with the law, even after accounting for IQ and family income.</a:t>
+            </a:r>
+          </a:p>
+          <a:p>
+            <a:pPr algn="l">
+              <a:spcAft>
+                <a:spcPts val="585"/>
+              </a:spcAft>
+            </a:pPr>
+            <a:r>
+              <a:rPr sz="1050" b="0" i="0">
+                <a:solidFill>
+                  <a:srgbClr val="5D5A54"/>
+                </a:solidFill>
+                <a:latin typeface="Inter Tight"/>
+              </a:rPr>
+              <a:t>Moffitt et al., PNAS, 2011</a:t>
+            </a:r>
+          </a:p>
+          <a:p>
+            <a:pPr algn="l">
+              <a:spcAft>
+                <a:spcPts val="585"/>
+              </a:spcAft>
+            </a:pPr>
+            <a:r>
+              <a:rPr sz="1300" b="0" i="0">
+                <a:solidFill>
+                  <a:srgbClr val="1C1B19"/>
+                </a:solidFill>
+                <a:latin typeface="Source Serif 4"/>
+              </a:rPr>
+              <a:t>In the same study, people whose self-control improved over time did better as adults than their childhood scores predicted.</a:t>
+            </a:r>
+          </a:p>
+          <a:p>
+            <a:pPr algn="l">
+              <a:spcAft>
+                <a:spcPts val="585"/>
+              </a:spcAft>
+            </a:pPr>
+            <a:r>
+              <a:rPr sz="1050" b="0" i="0">
+                <a:solidFill>
+                  <a:srgbClr val="5D5A54"/>
+                </a:solidFill>
+                <a:latin typeface="Inter Tight"/>
+              </a:rPr>
+              <a:t>Moffitt et al., PNAS, 2011</a:t>
+            </a:r>
+          </a:p>
+          <a:p>
+            <a:pPr algn="l">
+              <a:spcAft>
+                <a:spcPts val="585"/>
+              </a:spcAft>
+            </a:pPr>
+            <a:r>
+              <a:rPr sz="1300" b="0" i="0">
+                <a:solidFill>
+                  <a:srgbClr val="1C1B19"/>
+                </a:solidFill>
+                <a:latin typeface="Source Serif 4"/>
+              </a:rPr>
+              <a:t>Heavy media multitaskers were worse at filtering out distractions and slower at switching tasks than light multitaskers. Later studies haven't all found the same thing; the cost of switching tasks is well established.</a:t>
+            </a:r>
+          </a:p>
+          <a:p>
+            <a:pPr algn="l">
+              <a:spcAft>
+                <a:spcPts val="585"/>
+              </a:spcAft>
+            </a:pPr>
+            <a:r>
+              <a:rPr sz="1050" b="0" i="0">
+                <a:solidFill>
+                  <a:srgbClr val="5D5A54"/>
+                </a:solidFill>
+                <a:latin typeface="Inter Tight"/>
+              </a:rPr>
+              <a:t>Ophir, Nass and Wagner, PNAS, 2009 (Stanford)</a:t>
+            </a:r>
+          </a:p>
+        </p:txBody>
+      </p:sp>
+    </p:spTree>
+  </p:cSld>
+  <p:clrMapOvr>
+    <a:masterClrMapping/>
+  </p:clrMapOvr>
+</p:sld>
+</file>
+
+<file path=ppt/slides/slide2.xml><?xml version="1.0" encoding="utf-8"?>
+<p:sld xmlns:a="http://schemas.openxmlformats.org/drawingml/2006/main" xmlns:p="http://schemas.openxmlformats.org/presentationml/2006/main" xmlns:r="http://schemas.openxmlformats.org/officeDocument/2006/relationships">
+  <p:cSld>
+    <p:bg>
+      <p:bgPr>
+        <a:solidFill>
+          <a:srgbClr val="0B2D5B"/>
+        </a:solidFill>
+        <a:effectLst/>
+      </p:bgPr>
+    </p:bg>
+    <p:spTree>
+      <p:nvGrpSpPr>
+        <p:cNvPr id="1" name=""/>
+        <p:cNvGrpSpPr/>
+        <p:nvPr/>
+      </p:nvGrpSpPr>
+      <p:grpSpPr/>
+      <p:sp>
+        <p:nvSpPr>
+          <p:cNvPr id="2" name="Rectangle 1"/>
+          <p:cNvSpPr/>
+          <p:nvPr/>
+        </p:nvSpPr>
+        <p:spPr>
+          <a:xfrm>
+            <a:off x="548640" y="502920"/>
+            <a:ext cx="457200" cy="54864"/>
+          </a:xfrm>
+          <a:prstGeom prst="rect">
+            <a:avLst/>
+          </a:prstGeom>
+          <a:solidFill>
+            <a:srgbClr val="F47B20"/>
+          </a:solidFill>
+          <a:ln>
+            <a:noFill/>
+          </a:ln>
+          <a:effectLst/>
+        </p:spPr>
+        <p:style>
+          <a:lnRef idx="1">
+            <a:schemeClr val="accent1"/>
+          </a:lnRef>
+          <a:fillRef idx="3">
+            <a:schemeClr val="accent1"/>
+          </a:fillRef>
+          <a:effectRef idx="2">
+            <a:schemeClr val="accent1"/>
+          </a:effectRef>
+          <a:fontRef idx="minor">
+            <a:schemeClr val="lt1"/>
+          </a:fontRef>
+        </p:style>
+        <p:txBody>
+          <a:bodyPr rtlCol="0" anchor="ctr"/>
+          <a:lstStyle/>
+          <a:p>
+            <a:pPr algn="ctr"/>
+          </a:p>
+        </p:txBody>
+      </p:sp>
+      <p:sp>
+        <p:nvSpPr>
+          <p:cNvPr id="3" name="TextBox 2"/>
+          <p:cNvSpPr txBox="1"/>
+          <p:nvPr/>
+        </p:nvSpPr>
+        <p:spPr>
+          <a:xfrm>
+            <a:off x="1143000" y="393192"/>
+            <a:ext cx="8229600" cy="274320"/>
+          </a:xfrm>
+          <a:prstGeom prst="rect">
+            <a:avLst/>
+          </a:prstGeom>
+          <a:noFill/>
+        </p:spPr>
+        <p:txBody>
+          <a:bodyPr wrap="square" anchor="t" lIns="0" rIns="0" tIns="0" bIns="0">
+            <a:spAutoFit/>
+          </a:bodyPr>
+          <a:lstStyle/>
+          <a:p>
+            <a:pPr algn="l">
+              <a:spcAft>
+                <a:spcPts val="540"/>
+              </a:spcAft>
+            </a:pPr>
+            <a:r>
+              <a:rPr sz="1200" b="1" i="0">
+                <a:solidFill>
+                  <a:srgbClr val="5D5A54"/>
+                </a:solidFill>
+                <a:latin typeface="Inter Tight"/>
+              </a:rPr>
+              <a:t>RUNNING THE SHOW</a:t>
+            </a:r>
+          </a:p>
+        </p:txBody>
+      </p:sp>
+      <p:sp>
+        <p:nvSpPr>
+          <p:cNvPr id="4" name="TextBox 3"/>
+          <p:cNvSpPr txBox="1"/>
+          <p:nvPr/>
+        </p:nvSpPr>
+        <p:spPr>
+          <a:xfrm>
+            <a:off x="8229600" y="6400800"/>
+            <a:ext cx="3410712" cy="274320"/>
+          </a:xfrm>
+          <a:prstGeom prst="rect">
+            <a:avLst/>
+          </a:prstGeom>
+          <a:noFill/>
+        </p:spPr>
+        <p:txBody>
+          <a:bodyPr wrap="square" anchor="t" lIns="0" rIns="0" tIns="0" bIns="0">
+            <a:spAutoFit/>
+          </a:bodyPr>
+          <a:lstStyle/>
+          <a:p>
+            <a:pPr algn="r">
+              <a:spcAft>
+                <a:spcPts val="450"/>
+              </a:spcAft>
+            </a:pPr>
+            <a:r>
+              <a:rPr sz="1000" b="0" i="0">
+                <a:solidFill>
+                  <a:srgbClr val="5D5A54"/>
+                </a:solidFill>
+                <a:latin typeface="Inter Tight"/>
+              </a:rPr>
+              <a:t>Beaver Counseling</a:t>
+            </a:r>
+          </a:p>
+        </p:txBody>
+      </p:sp>
+      <p:sp>
+        <p:nvSpPr>
+          <p:cNvPr id="5" name="TextBox 4"/>
+          <p:cNvSpPr txBox="1"/>
+          <p:nvPr/>
+        </p:nvSpPr>
+        <p:spPr>
+          <a:xfrm>
+            <a:off x="822960" y="2011680"/>
+            <a:ext cx="10515600" cy="1463040"/>
+          </a:xfrm>
+          <a:prstGeom prst="rect">
+            <a:avLst/>
+          </a:prstGeom>
+          <a:noFill/>
+        </p:spPr>
+        <p:txBody>
+          <a:bodyPr wrap="square" anchor="b" lIns="0" rIns="0" tIns="0" bIns="0">
+            <a:spAutoFit/>
+          </a:bodyPr>
+          <a:lstStyle/>
+          <a:p>
+            <a:pPr algn="l">
+              <a:spcAft>
+                <a:spcPts val="2700"/>
+              </a:spcAft>
+            </a:pPr>
+            <a:r>
+              <a:rPr sz="6000" b="1" i="0">
+                <a:solidFill>
+                  <a:srgbClr val="FFFFFF"/>
+                </a:solidFill>
+                <a:latin typeface="Source Serif 4"/>
+              </a:rPr>
+              <a:t>Running the Show</a:t>
+            </a:r>
+          </a:p>
+        </p:txBody>
+      </p:sp>
+      <p:sp>
+        <p:nvSpPr>
+          <p:cNvPr id="6" name="TextBox 5"/>
+          <p:cNvSpPr txBox="1"/>
+          <p:nvPr/>
+        </p:nvSpPr>
+        <p:spPr>
+          <a:xfrm>
+            <a:off x="822960" y="3611880"/>
+            <a:ext cx="10515600" cy="914400"/>
+          </a:xfrm>
+          <a:prstGeom prst="rect">
+            <a:avLst/>
+          </a:prstGeom>
+          <a:noFill/>
+        </p:spPr>
+        <p:txBody>
+          <a:bodyPr wrap="square" anchor="t" lIns="0" rIns="0" tIns="0" bIns="0">
+            <a:spAutoFit/>
+          </a:bodyPr>
+          <a:lstStyle/>
+          <a:p>
+            <a:pPr algn="l">
+              <a:spcAft>
+                <a:spcPts val="1080"/>
+              </a:spcAft>
+            </a:pPr>
+            <a:r>
+              <a:rPr sz="2400" b="0" i="1">
+                <a:solidFill>
+                  <a:srgbClr val="E8E4DA"/>
+                </a:solidFill>
+                <a:latin typeface="Source Serif 4"/>
+              </a:rPr>
+              <a:t>Smart enough. Still dropping balls.</a:t>
+            </a:r>
+          </a:p>
+        </p:txBody>
+      </p:sp>
+      <p:sp>
+        <p:nvSpPr>
+          <p:cNvPr id="7" name="TextBox 6"/>
+          <p:cNvSpPr txBox="1"/>
+          <p:nvPr/>
+        </p:nvSpPr>
+        <p:spPr>
+          <a:xfrm>
+            <a:off x="822960" y="6035040"/>
+            <a:ext cx="7315200" cy="365760"/>
+          </a:xfrm>
+          <a:prstGeom prst="rect">
+            <a:avLst/>
+          </a:prstGeom>
+          <a:noFill/>
+        </p:spPr>
+        <p:txBody>
+          <a:bodyPr wrap="square" anchor="t" lIns="0" rIns="0" tIns="0" bIns="0">
+            <a:spAutoFit/>
+          </a:bodyPr>
+          <a:lstStyle/>
+          <a:p>
+            <a:pPr algn="l">
+              <a:spcAft>
+                <a:spcPts val="585"/>
+              </a:spcAft>
+            </a:pPr>
+            <a:r>
+              <a:rPr sz="1300" b="0" i="0">
+                <a:solidFill>
+                  <a:srgbClr val="E8E4DA"/>
+                </a:solidFill>
+                <a:latin typeface="Inter Tight"/>
+              </a:rPr>
+              <a:t>Beaver Upper School · Counseling</a:t>
+            </a:r>
+          </a:p>
+        </p:txBody>
+      </p:sp>
+    </p:spTree>
+  </p:cSld>
+  <p:clrMapOvr>
+    <a:masterClrMapping/>
+  </p:clrMapOvr>
+</p:sld>
+</file>
+
+<file path=ppt/slides/slide3.xml><?xml version="1.0" encoding="utf-8"?>
 <p:sld xmlns:a="http://schemas.openxmlformats.org/drawingml/2006/main" xmlns:p="http://schemas.openxmlformats.org/presentationml/2006/main" xmlns:r="http://schemas.openxmlformats.org/officeDocument/2006/relationships">
   <p:cSld>
     <p:bg>
@@ -5387,7 +7961,7 @@
                 </a:solidFill>
                 <a:latin typeface="Inter Tight"/>
               </a:rPr>
-              <a:t>THREE OVERLOADED WEEKS</a:t>
+              <a:t>MYTH OR FACT?</a:t>
             </a:r>
           </a:p>
         </p:txBody>
@@ -5440,7 +8014,7 @@
         <p:spPr>
           <a:xfrm>
             <a:off x="822960" y="1005840"/>
-            <a:ext cx="10515600" cy="914400"/>
+            <a:ext cx="10515600" cy="1097280"/>
           </a:xfrm>
           <a:prstGeom prst="rect">
             <a:avLst/>
@@ -5455,77 +8029,31 @@
           <a:p>
             <a:pPr algn="l">
               <a:spcAft>
-                <a:spcPts val="1530"/>
-              </a:spcAft>
-            </a:pPr>
-            <a:r>
-              <a:rPr sz="3400" b="1" i="0">
+                <a:spcPts val="1620"/>
+              </a:spcAft>
+            </a:pPr>
+            <a:r>
+              <a:rPr sz="3600" b="1" i="0">
                 <a:solidFill>
                   <a:srgbClr val="1C1B19"/>
                 </a:solidFill>
                 <a:latin typeface="Source Serif 4"/>
               </a:rPr>
-              <a:t>Which skill needs the backup?</a:t>
-            </a:r>
-          </a:p>
-        </p:txBody>
-      </p:sp>
-      <p:sp>
-        <p:nvSpPr>
-          <p:cNvPr id="6" name="Rectangle 5"/>
-          <p:cNvSpPr/>
-          <p:nvPr/>
-        </p:nvSpPr>
-        <p:spPr>
-          <a:xfrm>
-            <a:off x="822960" y="2103120"/>
-            <a:ext cx="3322320" cy="3840480"/>
-          </a:xfrm>
-          <a:prstGeom prst="rect">
-            <a:avLst/>
-          </a:prstGeom>
-          <a:solidFill>
-            <a:srgbClr val="FFFFFF"/>
-          </a:solidFill>
-          <a:ln w="15875">
-            <a:solidFill>
-              <a:srgbClr val="D8D2C6"/>
-            </a:solidFill>
-          </a:ln>
-          <a:effectLst/>
-        </p:spPr>
-        <p:style>
-          <a:lnRef idx="1">
-            <a:schemeClr val="accent1"/>
-          </a:lnRef>
-          <a:fillRef idx="3">
-            <a:schemeClr val="accent1"/>
-          </a:fillRef>
-          <a:effectRef idx="2">
-            <a:schemeClr val="accent1"/>
-          </a:effectRef>
-          <a:fontRef idx="minor">
-            <a:schemeClr val="lt1"/>
-          </a:fontRef>
-        </p:style>
-        <p:txBody>
-          <a:bodyPr rtlCol="0" anchor="ctr"/>
-          <a:lstStyle/>
-          <a:p>
-            <a:pPr algn="ctr"/>
-          </a:p>
-        </p:txBody>
-      </p:sp>
-      <p:sp>
-        <p:nvSpPr>
-          <p:cNvPr id="7" name="TextBox 6"/>
+              <a:t>Stand up if you think it's a fact.</a:t>
+            </a:r>
+          </a:p>
+        </p:txBody>
+      </p:sp>
+      <p:sp>
+        <p:nvSpPr>
+          <p:cNvPr id="6" name="TextBox 5"/>
           <p:cNvSpPr txBox="1"/>
           <p:nvPr/>
         </p:nvSpPr>
         <p:spPr>
           <a:xfrm>
-            <a:off x="1051560" y="2286000"/>
-            <a:ext cx="2865120" cy="365760"/>
+            <a:off x="822960" y="2057400"/>
+            <a:ext cx="548640" cy="804672"/>
           </a:xfrm>
           <a:prstGeom prst="rect">
             <a:avLst/>
@@ -5540,31 +8068,31 @@
           <a:p>
             <a:pPr algn="l">
               <a:spcAft>
-                <a:spcPts val="585"/>
-              </a:spcAft>
-            </a:pPr>
-            <a:r>
-              <a:rPr sz="1300" b="1" i="0">
-                <a:solidFill>
-                  <a:srgbClr val="0B2D5B"/>
-                </a:solidFill>
-                <a:latin typeface="Inter Tight"/>
-              </a:rPr>
-              <a:t>DEV</a:t>
-            </a:r>
-          </a:p>
-        </p:txBody>
-      </p:sp>
-      <p:sp>
-        <p:nvSpPr>
-          <p:cNvPr id="8" name="TextBox 7"/>
+                <a:spcPts val="1170"/>
+              </a:spcAft>
+            </a:pPr>
+            <a:r>
+              <a:rPr sz="2600" b="1" i="0">
+                <a:solidFill>
+                  <a:srgbClr val="F47B20"/>
+                </a:solidFill>
+                <a:latin typeface="Source Serif 4"/>
+              </a:rPr>
+              <a:t>1</a:t>
+            </a:r>
+          </a:p>
+        </p:txBody>
+      </p:sp>
+      <p:sp>
+        <p:nvSpPr>
+          <p:cNvPr id="7" name="TextBox 6"/>
           <p:cNvSpPr txBox="1"/>
           <p:nvPr/>
         </p:nvSpPr>
         <p:spPr>
           <a:xfrm>
-            <a:off x="1051560" y="2743200"/>
-            <a:ext cx="2865120" cy="3017520"/>
+            <a:off x="1463040" y="2093976"/>
+            <a:ext cx="9875520" cy="804672"/>
           </a:xfrm>
           <a:prstGeom prst="rect">
             <a:avLst/>
@@ -5579,77 +8107,31 @@
           <a:p>
             <a:pPr algn="l">
               <a:spcAft>
-                <a:spcPts val="810"/>
-              </a:spcAft>
-            </a:pPr>
-            <a:r>
-              <a:rPr sz="1800" b="0" i="0">
+                <a:spcPts val="945"/>
+              </a:spcAft>
+            </a:pPr>
+            <a:r>
+              <a:rPr sz="2100" b="1" i="0">
                 <a:solidFill>
                   <a:srgbClr val="1C1B19"/>
                 </a:solidFill>
                 <a:latin typeface="Source Serif 4"/>
               </a:rPr>
-              <a:t>Plays JV soccer and keeps missing small things: a field trip form, a quiz date, a rehearsal change. Each was posted somewhere different.</a:t>
-            </a:r>
-          </a:p>
-        </p:txBody>
-      </p:sp>
-      <p:sp>
-        <p:nvSpPr>
-          <p:cNvPr id="9" name="Rectangle 8"/>
-          <p:cNvSpPr/>
-          <p:nvPr/>
-        </p:nvSpPr>
-        <p:spPr>
-          <a:xfrm>
-            <a:off x="4419600" y="2103120"/>
-            <a:ext cx="3322320" cy="3840480"/>
-          </a:xfrm>
-          <a:prstGeom prst="rect">
-            <a:avLst/>
-          </a:prstGeom>
-          <a:solidFill>
-            <a:srgbClr val="FFFFFF"/>
-          </a:solidFill>
-          <a:ln w="15875">
-            <a:solidFill>
-              <a:srgbClr val="D8D2C6"/>
-            </a:solidFill>
-          </a:ln>
-          <a:effectLst/>
-        </p:spPr>
-        <p:style>
-          <a:lnRef idx="1">
-            <a:schemeClr val="accent1"/>
-          </a:lnRef>
-          <a:fillRef idx="3">
-            <a:schemeClr val="accent1"/>
-          </a:fillRef>
-          <a:effectRef idx="2">
-            <a:schemeClr val="accent1"/>
-          </a:effectRef>
-          <a:fontRef idx="minor">
-            <a:schemeClr val="lt1"/>
-          </a:fontRef>
-        </p:style>
-        <p:txBody>
-          <a:bodyPr rtlCol="0" anchor="ctr"/>
-          <a:lstStyle/>
-          <a:p>
-            <a:pPr algn="ctr"/>
-          </a:p>
-        </p:txBody>
-      </p:sp>
-      <p:sp>
-        <p:nvSpPr>
-          <p:cNvPr id="10" name="TextBox 9"/>
+              <a:t>Some people just aren't organized.</a:t>
+            </a:r>
+          </a:p>
+        </p:txBody>
+      </p:sp>
+      <p:sp>
+        <p:nvSpPr>
+          <p:cNvPr id="8" name="TextBox 7"/>
           <p:cNvSpPr txBox="1"/>
           <p:nvPr/>
         </p:nvSpPr>
         <p:spPr>
           <a:xfrm>
-            <a:off x="4648200" y="2286000"/>
-            <a:ext cx="2865120" cy="365760"/>
+            <a:off x="822960" y="2862072"/>
+            <a:ext cx="548640" cy="804672"/>
           </a:xfrm>
           <a:prstGeom prst="rect">
             <a:avLst/>
@@ -5664,31 +8146,31 @@
           <a:p>
             <a:pPr algn="l">
               <a:spcAft>
-                <a:spcPts val="585"/>
-              </a:spcAft>
-            </a:pPr>
-            <a:r>
-              <a:rPr sz="1300" b="1" i="0">
-                <a:solidFill>
-                  <a:srgbClr val="0B2D5B"/>
-                </a:solidFill>
-                <a:latin typeface="Inter Tight"/>
-              </a:rPr>
-              <a:t>NIA</a:t>
-            </a:r>
-          </a:p>
-        </p:txBody>
-      </p:sp>
-      <p:sp>
-        <p:nvSpPr>
-          <p:cNvPr id="11" name="TextBox 10"/>
+                <a:spcPts val="1170"/>
+              </a:spcAft>
+            </a:pPr>
+            <a:r>
+              <a:rPr sz="2600" b="1" i="0">
+                <a:solidFill>
+                  <a:srgbClr val="F47B20"/>
+                </a:solidFill>
+                <a:latin typeface="Source Serif 4"/>
+              </a:rPr>
+              <a:t>2</a:t>
+            </a:r>
+          </a:p>
+        </p:txBody>
+      </p:sp>
+      <p:sp>
+        <p:nvSpPr>
+          <p:cNvPr id="9" name="TextBox 8"/>
           <p:cNvSpPr txBox="1"/>
           <p:nvPr/>
         </p:nvSpPr>
         <p:spPr>
           <a:xfrm>
-            <a:off x="4648200" y="2743200"/>
-            <a:ext cx="2865120" cy="3017520"/>
+            <a:off x="1463040" y="2898648"/>
+            <a:ext cx="9875520" cy="804672"/>
           </a:xfrm>
           <a:prstGeom prst="rect">
             <a:avLst/>
@@ -5703,77 +8185,31 @@
           <a:p>
             <a:pPr algn="l">
               <a:spcAft>
-                <a:spcPts val="810"/>
-              </a:spcAft>
-            </a:pPr>
-            <a:r>
-              <a:rPr sz="1800" b="0" i="0">
+                <a:spcPts val="945"/>
+              </a:spcAft>
+            </a:pPr>
+            <a:r>
+              <a:rPr sz="2100" b="1" i="0">
                 <a:solidFill>
                   <a:srgbClr val="1C1B19"/>
                 </a:solidFill>
                 <a:latin typeface="Source Serif 4"/>
               </a:rPr>
-              <a:t>Watches her two younger brothers after school until her grandfather gets home at 6:30. Every 3:30 plan falls apart, and homework starts at 9.</a:t>
-            </a:r>
-          </a:p>
-        </p:txBody>
-      </p:sp>
-      <p:sp>
-        <p:nvSpPr>
-          <p:cNvPr id="12" name="Rectangle 11"/>
-          <p:cNvSpPr/>
-          <p:nvPr/>
-        </p:nvSpPr>
-        <p:spPr>
-          <a:xfrm>
-            <a:off x="8016239" y="2103120"/>
-            <a:ext cx="3322320" cy="3840480"/>
-          </a:xfrm>
-          <a:prstGeom prst="rect">
-            <a:avLst/>
-          </a:prstGeom>
-          <a:solidFill>
-            <a:srgbClr val="FFFFFF"/>
-          </a:solidFill>
-          <a:ln w="15875">
-            <a:solidFill>
-              <a:srgbClr val="D8D2C6"/>
-            </a:solidFill>
-          </a:ln>
-          <a:effectLst/>
-        </p:spPr>
-        <p:style>
-          <a:lnRef idx="1">
-            <a:schemeClr val="accent1"/>
-          </a:lnRef>
-          <a:fillRef idx="3">
-            <a:schemeClr val="accent1"/>
-          </a:fillRef>
-          <a:effectRef idx="2">
-            <a:schemeClr val="accent1"/>
-          </a:effectRef>
-          <a:fontRef idx="minor">
-            <a:schemeClr val="lt1"/>
-          </a:fontRef>
-        </p:style>
-        <p:txBody>
-          <a:bodyPr rtlCol="0" anchor="ctr"/>
-          <a:lstStyle/>
-          <a:p>
-            <a:pPr algn="ctr"/>
-          </a:p>
-        </p:txBody>
-      </p:sp>
-      <p:sp>
-        <p:nvSpPr>
-          <p:cNvPr id="13" name="TextBox 12"/>
+              <a:t>Some people are great at multitasking.</a:t>
+            </a:r>
+          </a:p>
+        </p:txBody>
+      </p:sp>
+      <p:sp>
+        <p:nvSpPr>
+          <p:cNvPr id="10" name="TextBox 9"/>
           <p:cNvSpPr txBox="1"/>
           <p:nvPr/>
         </p:nvSpPr>
         <p:spPr>
           <a:xfrm>
-            <a:off x="8244839" y="2286000"/>
-            <a:ext cx="2865120" cy="365760"/>
+            <a:off x="822960" y="3666744"/>
+            <a:ext cx="548640" cy="804672"/>
           </a:xfrm>
           <a:prstGeom prst="rect">
             <a:avLst/>
@@ -5788,31 +8224,31 @@
           <a:p>
             <a:pPr algn="l">
               <a:spcAft>
-                <a:spcPts val="585"/>
-              </a:spcAft>
-            </a:pPr>
-            <a:r>
-              <a:rPr sz="1300" b="1" i="0">
-                <a:solidFill>
-                  <a:srgbClr val="0B2D5B"/>
-                </a:solidFill>
-                <a:latin typeface="Inter Tight"/>
-              </a:rPr>
-              <a:t>LUIS</a:t>
-            </a:r>
-          </a:p>
-        </p:txBody>
-      </p:sp>
-      <p:sp>
-        <p:nvSpPr>
-          <p:cNvPr id="14" name="TextBox 13"/>
+                <a:spcPts val="1170"/>
+              </a:spcAft>
+            </a:pPr>
+            <a:r>
+              <a:rPr sz="2600" b="1" i="0">
+                <a:solidFill>
+                  <a:srgbClr val="F47B20"/>
+                </a:solidFill>
+                <a:latin typeface="Source Serif 4"/>
+              </a:rPr>
+              <a:t>3</a:t>
+            </a:r>
+          </a:p>
+        </p:txBody>
+      </p:sp>
+      <p:sp>
+        <p:nvSpPr>
+          <p:cNvPr id="11" name="TextBox 10"/>
           <p:cNvSpPr txBox="1"/>
           <p:nvPr/>
         </p:nvSpPr>
         <p:spPr>
           <a:xfrm>
-            <a:off x="8244839" y="2743200"/>
-            <a:ext cx="2865120" cy="3017520"/>
+            <a:off x="1463040" y="3703320"/>
+            <a:ext cx="9875520" cy="804672"/>
           </a:xfrm>
           <a:prstGeom prst="rect">
             <a:avLst/>
@@ -5827,17 +8263,173 @@
           <a:p>
             <a:pPr algn="l">
               <a:spcAft>
-                <a:spcPts val="810"/>
-              </a:spcAft>
-            </a:pPr>
-            <a:r>
-              <a:rPr sz="1800" b="0" i="0">
+                <a:spcPts val="945"/>
+              </a:spcAft>
+            </a:pPr>
+            <a:r>
+              <a:rPr sz="2100" b="1" i="0">
                 <a:solidFill>
                   <a:srgbClr val="1C1B19"/>
                 </a:solidFill>
                 <a:latin typeface="Source Serif 4"/>
               </a:rPr>
-              <a:t>Sits down to write his lab report at 8 with his phone next to the laptop. By 9:15 he has a title and a long group chat thread.</a:t>
+              <a:t>Self-control as a kid predicts adult health and money.</a:t>
+            </a:r>
+          </a:p>
+        </p:txBody>
+      </p:sp>
+      <p:sp>
+        <p:nvSpPr>
+          <p:cNvPr id="12" name="TextBox 11"/>
+          <p:cNvSpPr txBox="1"/>
+          <p:nvPr/>
+        </p:nvSpPr>
+        <p:spPr>
+          <a:xfrm>
+            <a:off x="822960" y="4471416"/>
+            <a:ext cx="548640" cy="804672"/>
+          </a:xfrm>
+          <a:prstGeom prst="rect">
+            <a:avLst/>
+          </a:prstGeom>
+          <a:noFill/>
+        </p:spPr>
+        <p:txBody>
+          <a:bodyPr wrap="square" anchor="t" lIns="0" rIns="0" tIns="0" bIns="0">
+            <a:spAutoFit/>
+          </a:bodyPr>
+          <a:lstStyle/>
+          <a:p>
+            <a:pPr algn="l">
+              <a:spcAft>
+                <a:spcPts val="1170"/>
+              </a:spcAft>
+            </a:pPr>
+            <a:r>
+              <a:rPr sz="2600" b="1" i="0">
+                <a:solidFill>
+                  <a:srgbClr val="F47B20"/>
+                </a:solidFill>
+                <a:latin typeface="Source Serif 4"/>
+              </a:rPr>
+              <a:t>4</a:t>
+            </a:r>
+          </a:p>
+        </p:txBody>
+      </p:sp>
+      <p:sp>
+        <p:nvSpPr>
+          <p:cNvPr id="13" name="TextBox 12"/>
+          <p:cNvSpPr txBox="1"/>
+          <p:nvPr/>
+        </p:nvSpPr>
+        <p:spPr>
+          <a:xfrm>
+            <a:off x="1463040" y="4507992"/>
+            <a:ext cx="9875520" cy="804672"/>
+          </a:xfrm>
+          <a:prstGeom prst="rect">
+            <a:avLst/>
+          </a:prstGeom>
+          <a:noFill/>
+        </p:spPr>
+        <p:txBody>
+          <a:bodyPr wrap="square" anchor="t" lIns="0" rIns="0" tIns="0" bIns="0">
+            <a:spAutoFit/>
+          </a:bodyPr>
+          <a:lstStyle/>
+          <a:p>
+            <a:pPr algn="l">
+              <a:spcAft>
+                <a:spcPts val="945"/>
+              </a:spcAft>
+            </a:pPr>
+            <a:r>
+              <a:rPr sz="2100" b="1" i="0">
+                <a:solidFill>
+                  <a:srgbClr val="1C1B19"/>
+                </a:solidFill>
+                <a:latin typeface="Source Serif 4"/>
+              </a:rPr>
+              <a:t>The brain's planning workspace finishes maturing last.</a:t>
+            </a:r>
+          </a:p>
+        </p:txBody>
+      </p:sp>
+      <p:sp>
+        <p:nvSpPr>
+          <p:cNvPr id="14" name="TextBox 13"/>
+          <p:cNvSpPr txBox="1"/>
+          <p:nvPr/>
+        </p:nvSpPr>
+        <p:spPr>
+          <a:xfrm>
+            <a:off x="822960" y="5276088"/>
+            <a:ext cx="548640" cy="804672"/>
+          </a:xfrm>
+          <a:prstGeom prst="rect">
+            <a:avLst/>
+          </a:prstGeom>
+          <a:noFill/>
+        </p:spPr>
+        <p:txBody>
+          <a:bodyPr wrap="square" anchor="t" lIns="0" rIns="0" tIns="0" bIns="0">
+            <a:spAutoFit/>
+          </a:bodyPr>
+          <a:lstStyle/>
+          <a:p>
+            <a:pPr algn="l">
+              <a:spcAft>
+                <a:spcPts val="1170"/>
+              </a:spcAft>
+            </a:pPr>
+            <a:r>
+              <a:rPr sz="2600" b="1" i="0">
+                <a:solidFill>
+                  <a:srgbClr val="F47B20"/>
+                </a:solidFill>
+                <a:latin typeface="Source Serif 4"/>
+              </a:rPr>
+              <a:t>5</a:t>
+            </a:r>
+          </a:p>
+        </p:txBody>
+      </p:sp>
+      <p:sp>
+        <p:nvSpPr>
+          <p:cNvPr id="15" name="TextBox 14"/>
+          <p:cNvSpPr txBox="1"/>
+          <p:nvPr/>
+        </p:nvSpPr>
+        <p:spPr>
+          <a:xfrm>
+            <a:off x="1463040" y="5312664"/>
+            <a:ext cx="9875520" cy="804672"/>
+          </a:xfrm>
+          <a:prstGeom prst="rect">
+            <a:avLst/>
+          </a:prstGeom>
+          <a:noFill/>
+        </p:spPr>
+        <p:txBody>
+          <a:bodyPr wrap="square" anchor="t" lIns="0" rIns="0" tIns="0" bIns="0">
+            <a:spAutoFit/>
+          </a:bodyPr>
+          <a:lstStyle/>
+          <a:p>
+            <a:pPr algn="l">
+              <a:spcAft>
+                <a:spcPts val="945"/>
+              </a:spcAft>
+            </a:pPr>
+            <a:r>
+              <a:rPr sz="2100" b="1" i="0">
+                <a:solidFill>
+                  <a:srgbClr val="1C1B19"/>
+                </a:solidFill>
+                <a:latin typeface="Source Serif 4"/>
+              </a:rPr>
+              <a:t>One short night doesn't change how organized you are.</a:t>
             </a:r>
           </a:p>
         </p:txBody>
@@ -5850,7 +8442,7 @@
 </p:sld>
 </file>
 
-<file path=ppt/slides/slide13.xml><?xml version="1.0" encoding="utf-8"?>
+<file path=ppt/slides/slide4.xml><?xml version="1.0" encoding="utf-8"?>
 <p:sld xmlns:a="http://schemas.openxmlformats.org/drawingml/2006/main" xmlns:p="http://schemas.openxmlformats.org/presentationml/2006/main" xmlns:r="http://schemas.openxmlformats.org/officeDocument/2006/relationships">
   <p:cSld>
     <p:bg>
@@ -5946,7 +8538,7 @@
                 </a:solidFill>
                 <a:latin typeface="Inter Tight"/>
               </a:rPr>
-              <a:t>THE HABIT THAT HOLDS IT TOGETHER</a:t>
+              <a:t>MYTH OR FACT?</a:t>
             </a:r>
           </a:p>
         </p:txBody>
@@ -6024,7 +8616,7 @@
                 </a:solidFill>
                 <a:latin typeface="Source Serif 4"/>
               </a:rPr>
-              <a:t>A weekly review, about 20 minutes</a:t>
+              <a:t>The answers</a:t>
             </a:r>
           </a:p>
         </p:txBody>
@@ -6102,7 +8694,7 @@
                 </a:solidFill>
                 <a:latin typeface="Source Serif 4"/>
               </a:rPr>
-              <a:t>Empty everything into one list.</a:t>
+              <a:t>Myth.</a:t>
             </a:r>
           </a:p>
           <a:p>
@@ -6118,7 +8710,7 @@
                 </a:solidFill>
                 <a:latin typeface="Source Serif 4"/>
               </a:rPr>
-              <a:t>Class pages, email, texts, backpack, sticky notes.</a:t>
+              <a:t>Organization is skills plus tools. "Not organized yet" is more accurate.</a:t>
             </a:r>
           </a:p>
         </p:txBody>
@@ -6196,7 +8788,7 @@
                 </a:solidFill>
                 <a:latin typeface="Source Serif 4"/>
               </a:rPr>
-              <a:t>Fixed things first.</a:t>
+              <a:t>Myth.</a:t>
             </a:r>
           </a:p>
           <a:p>
@@ -6212,7 +8804,7 @@
                 </a:solidFill>
                 <a:latin typeface="Source Serif 4"/>
               </a:rPr>
-              <a:t>Classes, practice, shifts, services, picking up a sibling.</a:t>
+              <a:t>Almost everyone pays a cost each switch.</a:t>
             </a:r>
           </a:p>
         </p:txBody>
@@ -6290,7 +8882,7 @@
                 </a:solidFill>
                 <a:latin typeface="Source Serif 4"/>
               </a:rPr>
-              <a:t>Break big things into dated steps.</a:t>
+              <a:t>Fact.</a:t>
             </a:r>
           </a:p>
           <a:p>
@@ -6306,7 +8898,7 @@
                 </a:solidFill>
                 <a:latin typeface="Source Serif 4"/>
               </a:rPr>
-              <a:t>"Tue: pick sources. Thu: outline."</a:t>
+              <a:t>And people who improved did better than predicted.</a:t>
             </a:r>
           </a:p>
         </p:txBody>
@@ -6384,7 +8976,7 @@
                 </a:solidFill>
                 <a:latin typeface="Source Serif 4"/>
               </a:rPr>
-              <a:t>Spot the crunch day.</a:t>
+              <a:t>Fact.</a:t>
             </a:r>
           </a:p>
           <a:p>
@@ -6400,7 +8992,7 @@
                 </a:solidFill>
                 <a:latin typeface="Source Serif 4"/>
               </a:rPr>
-              <a:t>Move work earlier or email a teacher now.</a:t>
+              <a:t>It's among the last areas to mature, around the end of adolescence.</a:t>
             </a:r>
           </a:p>
         </p:txBody>
@@ -6478,7 +9070,7 @@
                 </a:solidFill>
                 <a:latin typeface="Source Serif 4"/>
               </a:rPr>
-              <a:t>Close it out every night.</a:t>
+              <a:t>Myth.</a:t>
             </a:r>
           </a:p>
           <a:p>
@@ -6494,7 +9086,7 @@
                 </a:solidFill>
                 <a:latin typeface="Source Serif 4"/>
               </a:rPr>
-              <a:t>Two minutes: what's due tomorrow, and is it done?</a:t>
+              <a:t>Short sleep weakens the exact skills you need.</a:t>
             </a:r>
           </a:p>
         </p:txBody>
@@ -6507,7 +9099,7 @@
 </p:sld>
 </file>
 
-<file path=ppt/slides/slide14.xml><?xml version="1.0" encoding="utf-8"?>
+<file path=ppt/slides/slide5.xml><?xml version="1.0" encoding="utf-8"?>
 <p:sld xmlns:a="http://schemas.openxmlformats.org/drawingml/2006/main" xmlns:p="http://schemas.openxmlformats.org/presentationml/2006/main" xmlns:r="http://schemas.openxmlformats.org/officeDocument/2006/relationships">
   <p:cSld>
     <p:bg>
@@ -6603,7 +9195,7 @@
                 </a:solidFill>
                 <a:latin typeface="Inter Tight"/>
               </a:rPr>
-              <a:t>BEFORE YOU GO</a:t>
+              <a:t>THREE SKILLS, NOT ONE</a:t>
             </a:r>
           </a:p>
         </p:txBody>
@@ -6655,8 +9247,8 @@
         </p:nvSpPr>
         <p:spPr>
           <a:xfrm>
-            <a:off x="822960" y="1188720"/>
-            <a:ext cx="10515600" cy="914400"/>
+            <a:off x="822960" y="1005840"/>
+            <a:ext cx="10515600" cy="1097280"/>
           </a:xfrm>
           <a:prstGeom prst="rect">
             <a:avLst/>
@@ -6681,7 +9273,7 @@
                 </a:solidFill>
                 <a:latin typeface="Source Serif 4"/>
               </a:rPr>
-              <a:t>Exit card</a:t>
+              <a:t>What "executive function" actually means</a:t>
             </a:r>
           </a:p>
         </p:txBody>
@@ -6694,8 +9286,8 @@
         </p:nvSpPr>
         <p:spPr>
           <a:xfrm>
-            <a:off x="822960" y="2286000"/>
-            <a:ext cx="10515600" cy="1463040"/>
+            <a:off x="822960" y="2194560"/>
+            <a:ext cx="548640" cy="1051560"/>
           </a:xfrm>
           <a:prstGeom prst="rect">
             <a:avLst/>
@@ -6710,77 +9302,31 @@
           <a:p>
             <a:pPr algn="l">
               <a:spcAft>
-                <a:spcPts val="1080"/>
-              </a:spcAft>
-            </a:pPr>
-            <a:r>
-              <a:rPr sz="2400" b="0" i="0">
-                <a:solidFill>
-                  <a:srgbClr val="1C1B19"/>
-                </a:solidFill>
-                <a:latin typeface="Source Serif 4"/>
-              </a:rPr>
-              <a:t>When is your first weekly review? Put it in your calendar with an alarm before you leave.</a:t>
-            </a:r>
-          </a:p>
-        </p:txBody>
-      </p:sp>
-      <p:sp>
-        <p:nvSpPr>
-          <p:cNvPr id="7" name="Rectangle 6"/>
-          <p:cNvSpPr/>
-          <p:nvPr/>
-        </p:nvSpPr>
-        <p:spPr>
-          <a:xfrm>
-            <a:off x="822960" y="4023360"/>
-            <a:ext cx="10515600" cy="1371600"/>
-          </a:xfrm>
-          <a:prstGeom prst="rect">
-            <a:avLst/>
-          </a:prstGeom>
-          <a:solidFill>
-            <a:srgbClr val="FFFFFF"/>
-          </a:solidFill>
-          <a:ln w="15875">
-            <a:solidFill>
-              <a:srgbClr val="1C1B19"/>
-            </a:solidFill>
-          </a:ln>
-          <a:effectLst/>
-        </p:spPr>
-        <p:style>
-          <a:lnRef idx="1">
-            <a:schemeClr val="accent1"/>
-          </a:lnRef>
-          <a:fillRef idx="3">
-            <a:schemeClr val="accent1"/>
-          </a:fillRef>
-          <a:effectRef idx="2">
-            <a:schemeClr val="accent1"/>
-          </a:effectRef>
-          <a:fontRef idx="minor">
-            <a:schemeClr val="lt1"/>
-          </a:fontRef>
-        </p:style>
-        <p:txBody>
-          <a:bodyPr rtlCol="0" anchor="ctr"/>
-          <a:lstStyle/>
-          <a:p>
-            <a:pPr algn="ctr"/>
-          </a:p>
-        </p:txBody>
-      </p:sp>
-      <p:sp>
-        <p:nvSpPr>
-          <p:cNvPr id="8" name="TextBox 7"/>
+                <a:spcPts val="1170"/>
+              </a:spcAft>
+            </a:pPr>
+            <a:r>
+              <a:rPr sz="2600" b="1" i="0">
+                <a:solidFill>
+                  <a:srgbClr val="F47B20"/>
+                </a:solidFill>
+                <a:latin typeface="Source Serif 4"/>
+              </a:rPr>
+              <a:t>1</a:t>
+            </a:r>
+          </a:p>
+        </p:txBody>
+      </p:sp>
+      <p:sp>
+        <p:nvSpPr>
+          <p:cNvPr id="7" name="TextBox 6"/>
           <p:cNvSpPr txBox="1"/>
           <p:nvPr/>
         </p:nvSpPr>
         <p:spPr>
           <a:xfrm>
-            <a:off x="1097280" y="4206240"/>
-            <a:ext cx="10058400" cy="365760"/>
+            <a:off x="1463040" y="2231136"/>
+            <a:ext cx="9875520" cy="1051560"/>
           </a:xfrm>
           <a:prstGeom prst="rect">
             <a:avLst/>
@@ -6795,31 +9341,47 @@
           <a:p>
             <a:pPr algn="l">
               <a:spcAft>
-                <a:spcPts val="540"/>
-              </a:spcAft>
-            </a:pPr>
-            <a:r>
-              <a:rPr sz="1200" b="1" i="0">
-                <a:solidFill>
-                  <a:srgbClr val="0B2D5B"/>
-                </a:solidFill>
-                <a:latin typeface="Inter Tight"/>
-              </a:rPr>
-              <a:t>ON THE BVR DINER MENU</a:t>
-            </a:r>
-          </a:p>
-        </p:txBody>
-      </p:sp>
-      <p:sp>
-        <p:nvSpPr>
-          <p:cNvPr id="9" name="TextBox 8"/>
+                <a:spcPts val="945"/>
+              </a:spcAft>
+            </a:pPr>
+            <a:r>
+              <a:rPr sz="2100" b="1" i="0">
+                <a:solidFill>
+                  <a:srgbClr val="1C1B19"/>
+                </a:solidFill>
+                <a:latin typeface="Source Serif 4"/>
+              </a:rPr>
+              <a:t>Working memory: holding and updating.</a:t>
+            </a:r>
+          </a:p>
+          <a:p>
+            <a:pPr algn="l">
+              <a:spcAft>
+                <a:spcPts val="945"/>
+              </a:spcAft>
+            </a:pPr>
+            <a:r>
+              <a:rPr sz="1600" b="0" i="0">
+                <a:solidFill>
+                  <a:srgbClr val="5D5A54"/>
+                </a:solidFill>
+                <a:latin typeface="Source Serif 4"/>
+              </a:rPr>
+              <a:t>Keeping the steps in mind while you work.</a:t>
+            </a:r>
+          </a:p>
+        </p:txBody>
+      </p:sp>
+      <p:sp>
+        <p:nvSpPr>
+          <p:cNvPr id="8" name="TextBox 7"/>
           <p:cNvSpPr txBox="1"/>
           <p:nvPr/>
         </p:nvSpPr>
         <p:spPr>
           <a:xfrm>
-            <a:off x="1097280" y="4617720"/>
-            <a:ext cx="10058400" cy="640080"/>
+            <a:off x="822960" y="3246120"/>
+            <a:ext cx="548640" cy="1051560"/>
           </a:xfrm>
           <a:prstGeom prst="rect">
             <a:avLst/>
@@ -6834,101 +9396,31 @@
           <a:p>
             <a:pPr algn="l">
               <a:spcAft>
-                <a:spcPts val="900"/>
-              </a:spcAft>
-            </a:pPr>
-            <a:r>
-              <a:rPr sz="2000" b="0" i="0">
-                <a:solidFill>
-                  <a:srgbClr val="1C1B19"/>
-                </a:solidFill>
-                <a:latin typeface="Inter Tight"/>
-              </a:rPr>
-              <a:t>https://rmwtoolkit.github.io/bcds-toolkit/running-the-show-high-school.html</a:t>
-            </a:r>
-          </a:p>
-        </p:txBody>
-      </p:sp>
-    </p:spTree>
-  </p:cSld>
-  <p:clrMapOvr>
-    <a:masterClrMapping/>
-  </p:clrMapOvr>
-</p:sld>
-</file>
-
-<file path=ppt/slides/slide2.xml><?xml version="1.0" encoding="utf-8"?>
-<p:sld xmlns:a="http://schemas.openxmlformats.org/drawingml/2006/main" xmlns:p="http://schemas.openxmlformats.org/presentationml/2006/main" xmlns:r="http://schemas.openxmlformats.org/officeDocument/2006/relationships" show="0">
-  <p:cSld>
-    <p:bg>
-      <p:bgPr>
-        <a:solidFill>
-          <a:srgbClr val="EEEBE4"/>
-        </a:solidFill>
-        <a:effectLst/>
-      </p:bgPr>
-    </p:bg>
-    <p:spTree>
-      <p:nvGrpSpPr>
-        <p:cNvPr id="1" name=""/>
-        <p:cNvGrpSpPr/>
-        <p:nvPr/>
-      </p:nvGrpSpPr>
-      <p:grpSpPr/>
-      <p:sp>
-        <p:nvSpPr>
-          <p:cNvPr id="2" name="Rectangle 1"/>
-          <p:cNvSpPr/>
-          <p:nvPr/>
-        </p:nvSpPr>
-        <p:spPr>
-          <a:xfrm>
-            <a:off x="0" y="0"/>
-            <a:ext cx="12191695" cy="384048"/>
-          </a:xfrm>
-          <a:prstGeom prst="rect">
-            <a:avLst/>
-          </a:prstGeom>
-          <a:solidFill>
-            <a:srgbClr val="0B2D5B"/>
-          </a:solidFill>
-          <a:ln>
-            <a:noFill/>
-          </a:ln>
-          <a:effectLst/>
-        </p:spPr>
-        <p:style>
-          <a:lnRef idx="1">
-            <a:schemeClr val="accent1"/>
-          </a:lnRef>
-          <a:fillRef idx="3">
-            <a:schemeClr val="accent1"/>
-          </a:fillRef>
-          <a:effectRef idx="2">
-            <a:schemeClr val="accent1"/>
-          </a:effectRef>
-          <a:fontRef idx="minor">
-            <a:schemeClr val="lt1"/>
-          </a:fontRef>
-        </p:style>
-        <p:txBody>
-          <a:bodyPr rtlCol="0" anchor="ctr"/>
-          <a:lstStyle/>
-          <a:p>
-            <a:pPr algn="ctr"/>
-          </a:p>
-        </p:txBody>
-      </p:sp>
-      <p:sp>
-        <p:nvSpPr>
-          <p:cNvPr id="3" name="TextBox 2"/>
+                <a:spcPts val="1170"/>
+              </a:spcAft>
+            </a:pPr>
+            <a:r>
+              <a:rPr sz="2600" b="1" i="0">
+                <a:solidFill>
+                  <a:srgbClr val="F47B20"/>
+                </a:solidFill>
+                <a:latin typeface="Source Serif 4"/>
+              </a:rPr>
+              <a:t>2</a:t>
+            </a:r>
+          </a:p>
+        </p:txBody>
+      </p:sp>
+      <p:sp>
+        <p:nvSpPr>
+          <p:cNvPr id="9" name="TextBox 8"/>
           <p:cNvSpPr txBox="1"/>
           <p:nvPr/>
         </p:nvSpPr>
         <p:spPr>
           <a:xfrm>
-            <a:off x="548640" y="100584"/>
-            <a:ext cx="10972800" cy="274320"/>
+            <a:off x="1463040" y="3282696"/>
+            <a:ext cx="9875520" cy="1051560"/>
           </a:xfrm>
           <a:prstGeom prst="rect">
             <a:avLst/>
@@ -6943,31 +9435,47 @@
           <a:p>
             <a:pPr algn="l">
               <a:spcAft>
-                <a:spcPts val="495"/>
-              </a:spcAft>
-            </a:pPr>
-            <a:r>
-              <a:rPr sz="1100" b="1" i="0">
-                <a:solidFill>
-                  <a:srgbClr val="FFFFFF"/>
-                </a:solidFill>
-                <a:latin typeface="Inter Tight"/>
-              </a:rPr>
-              <a:t>TEACHER PAGE  ·  skipped when you present  ·  Before you teach</a:t>
-            </a:r>
-          </a:p>
-        </p:txBody>
-      </p:sp>
-      <p:sp>
-        <p:nvSpPr>
-          <p:cNvPr id="4" name="TextBox 3"/>
+                <a:spcPts val="945"/>
+              </a:spcAft>
+            </a:pPr>
+            <a:r>
+              <a:rPr sz="2100" b="1" i="0">
+                <a:solidFill>
+                  <a:srgbClr val="1C1B19"/>
+                </a:solidFill>
+                <a:latin typeface="Source Serif 4"/>
+              </a:rPr>
+              <a:t>Inhibition: skipping the easy thing.</a:t>
+            </a:r>
+          </a:p>
+          <a:p>
+            <a:pPr algn="l">
+              <a:spcAft>
+                <a:spcPts val="945"/>
+              </a:spcAft>
+            </a:pPr>
+            <a:r>
+              <a:rPr sz="1600" b="0" i="0">
+                <a:solidFill>
+                  <a:srgbClr val="5D5A54"/>
+                </a:solidFill>
+                <a:latin typeface="Source Serif 4"/>
+              </a:rPr>
+              <a:t>Ignoring the buzz, finishing the paragraph.</a:t>
+            </a:r>
+          </a:p>
+        </p:txBody>
+      </p:sp>
+      <p:sp>
+        <p:nvSpPr>
+          <p:cNvPr id="10" name="TextBox 9"/>
           <p:cNvSpPr txBox="1"/>
           <p:nvPr/>
         </p:nvSpPr>
         <p:spPr>
           <a:xfrm>
-            <a:off x="548640" y="685800"/>
-            <a:ext cx="10972800" cy="640080"/>
+            <a:off x="822960" y="4297679"/>
+            <a:ext cx="548640" cy="1051560"/>
           </a:xfrm>
           <a:prstGeom prst="rect">
             <a:avLst/>
@@ -6982,31 +9490,31 @@
           <a:p>
             <a:pPr algn="l">
               <a:spcAft>
-                <a:spcPts val="1350"/>
-              </a:spcAft>
-            </a:pPr>
-            <a:r>
-              <a:rPr sz="3000" b="1" i="0">
-                <a:solidFill>
-                  <a:srgbClr val="1C1B19"/>
-                </a:solidFill>
-                <a:latin typeface="Source Serif 4"/>
-              </a:rPr>
-              <a:t>Before you teach</a:t>
-            </a:r>
-          </a:p>
-        </p:txBody>
-      </p:sp>
-      <p:sp>
-        <p:nvSpPr>
-          <p:cNvPr id="5" name="TextBox 4"/>
+                <a:spcPts val="1170"/>
+              </a:spcAft>
+            </a:pPr>
+            <a:r>
+              <a:rPr sz="2600" b="1" i="0">
+                <a:solidFill>
+                  <a:srgbClr val="F47B20"/>
+                </a:solidFill>
+                <a:latin typeface="Source Serif 4"/>
+              </a:rPr>
+              <a:t>3</a:t>
+            </a:r>
+          </a:p>
+        </p:txBody>
+      </p:sp>
+      <p:sp>
+        <p:nvSpPr>
+          <p:cNvPr id="11" name="TextBox 10"/>
           <p:cNvSpPr txBox="1"/>
           <p:nvPr/>
         </p:nvSpPr>
         <p:spPr>
           <a:xfrm>
-            <a:off x="548640" y="1463040"/>
-            <a:ext cx="5394960" cy="4937760"/>
+            <a:off x="1463040" y="4334255"/>
+            <a:ext cx="9875520" cy="1051560"/>
           </a:xfrm>
           <a:prstGeom prst="rect">
             <a:avLst/>
@@ -7021,1484 +9529,33 @@
           <a:p>
             <a:pPr algn="l">
               <a:spcAft>
-                <a:spcPts val="585"/>
-              </a:spcAft>
-            </a:pPr>
-            <a:r>
-              <a:rPr sz="1500" b="1" i="0">
+                <a:spcPts val="945"/>
+              </a:spcAft>
+            </a:pPr>
+            <a:r>
+              <a:rPr sz="2100" b="1" i="0">
                 <a:solidFill>
                   <a:srgbClr val="1C1B19"/>
                 </a:solidFill>
                 <a:latin typeface="Source Serif 4"/>
               </a:rPr>
-              <a:t>Assume students with ADHD and learning differences are in the room.</a:t>
-            </a:r>
-          </a:p>
-          <a:p>
-            <a:pPr algn="l">
-              <a:spcAft>
-                <a:spcPts val="585"/>
-              </a:spcAft>
-            </a:pPr>
-            <a:r>
-              <a:rPr sz="1300" b="0" i="0">
-                <a:solidFill>
-                  <a:srgbClr val="1C1B19"/>
-                </a:solidFill>
-                <a:latin typeface="Source Serif 4"/>
-              </a:rPr>
-              <a:t>Some have a diagnosis and a learning plan, some are waiting on an evaluation, and some have never been checked. Never ask who has ADHD or who has a plan. Talk about executive function as skills everyone uses, with some brains working harder at them.</a:t>
-            </a:r>
-          </a:p>
-          <a:p>
-            <a:pPr algn="l">
-              <a:spcAft>
-                <a:spcPts val="585"/>
-              </a:spcAft>
-            </a:pPr>
-            <a:r>
-              <a:rPr sz="1300" b="0" i="0">
-                <a:solidFill>
-                  <a:srgbClr val="1C1B19"/>
-                </a:solidFill>
-                <a:latin typeface="Source Serif 4"/>
-              </a:rPr>
-              <a:t/>
-            </a:r>
-          </a:p>
-          <a:p>
-            <a:pPr algn="l">
-              <a:spcAft>
-                <a:spcPts val="585"/>
-              </a:spcAft>
-            </a:pPr>
-            <a:r>
-              <a:rPr sz="1500" b="1" i="0">
-                <a:solidFill>
-                  <a:srgbClr val="1C1B19"/>
-                </a:solidFill>
-                <a:latin typeface="Source Serif 4"/>
-              </a:rPr>
-              <a:t>Drop the word "lazy."</a:t>
-            </a:r>
-          </a:p>
-          <a:p>
-            <a:pPr algn="l">
-              <a:spcAft>
-                <a:spcPts val="585"/>
-              </a:spcAft>
-            </a:pPr>
-            <a:r>
-              <a:rPr sz="1300" b="0" i="0">
-                <a:solidFill>
-                  <a:srgbClr val="1C1B19"/>
-                </a:solidFill>
-                <a:latin typeface="Source Serif 4"/>
-              </a:rPr>
-              <a:t>Many 9th graders have already heard "you're so capable" in that tone. If a student calls themselves lazy or bad at school, name the condition instead: short sleep, a hard week, a missing system. Keep it off any one student's record in front of the class.</a:t>
-            </a:r>
-          </a:p>
-          <a:p>
-            <a:pPr algn="l">
-              <a:spcAft>
-                <a:spcPts val="585"/>
-              </a:spcAft>
-            </a:pPr>
-            <a:r>
-              <a:rPr sz="1300" b="0" i="0">
-                <a:solidFill>
-                  <a:srgbClr val="1C1B19"/>
-                </a:solidFill>
-                <a:latin typeface="Source Serif 4"/>
-              </a:rPr>
-              <a:t/>
-            </a:r>
-          </a:p>
-          <a:p>
-            <a:pPr algn="l">
-              <a:spcAft>
-                <a:spcPts val="585"/>
-              </a:spcAft>
-            </a:pPr>
-            <a:r>
-              <a:rPr sz="1500" b="1" i="0">
-                <a:solidFill>
-                  <a:srgbClr val="1C1B19"/>
-                </a:solidFill>
-                <a:latin typeface="Source Serif 4"/>
-              </a:rPr>
-              <a:t>Home responsibilities stay private.</a:t>
-            </a:r>
-          </a:p>
-          <a:p>
-            <a:pPr algn="l">
-              <a:spcAft>
-                <a:spcPts val="585"/>
-              </a:spcAft>
-            </a:pPr>
-            <a:r>
-              <a:rPr sz="1300" b="0" i="0">
-                <a:solidFill>
-                  <a:srgbClr val="1C1B19"/>
-                </a:solidFill>
-                <a:latin typeface="Source Serif 4"/>
-              </a:rPr>
-              <a:t>Some students watch siblings, work, or travel between two homes. The system card goes home with them. Nobody explains why their afternoons are full.</a:t>
-            </a:r>
-          </a:p>
-          <a:p>
-            <a:pPr algn="l">
-              <a:spcAft>
-                <a:spcPts val="585"/>
-              </a:spcAft>
-            </a:pPr>
-            <a:r>
-              <a:rPr sz="1300" b="0" i="0">
-                <a:solidFill>
-                  <a:srgbClr val="1C1B19"/>
-                </a:solidFill>
-                <a:latin typeface="Source Serif 4"/>
-              </a:rPr>
-              <a:t/>
-            </a:r>
-          </a:p>
-        </p:txBody>
-      </p:sp>
-      <p:sp>
-        <p:nvSpPr>
-          <p:cNvPr id="6" name="TextBox 5"/>
-          <p:cNvSpPr txBox="1"/>
-          <p:nvPr/>
-        </p:nvSpPr>
-        <p:spPr>
-          <a:xfrm>
-            <a:off x="6217920" y="1463040"/>
-            <a:ext cx="5394960" cy="4937760"/>
-          </a:xfrm>
-          <a:prstGeom prst="rect">
-            <a:avLst/>
-          </a:prstGeom>
-          <a:noFill/>
-        </p:spPr>
-        <p:txBody>
-          <a:bodyPr wrap="square" anchor="t" lIns="0" rIns="0" tIns="0" bIns="0">
-            <a:spAutoFit/>
-          </a:bodyPr>
-          <a:lstStyle/>
-          <a:p>
-            <a:pPr algn="l">
-              <a:spcAft>
-                <a:spcPts val="585"/>
-              </a:spcAft>
-            </a:pPr>
-            <a:r>
-              <a:rPr sz="1500" b="1" i="0">
-                <a:solidFill>
-                  <a:srgbClr val="1C1B19"/>
-                </a:solidFill>
-                <a:latin typeface="Source Serif 4"/>
-              </a:rPr>
-              <a:t>Know who handles evaluations at your school.</a:t>
-            </a:r>
-          </a:p>
-          <a:p>
-            <a:pPr algn="l">
-              <a:spcAft>
-                <a:spcPts val="585"/>
-              </a:spcAft>
-            </a:pPr>
-            <a:r>
-              <a:rPr sz="1300" b="0" i="0">
-                <a:solidFill>
-                  <a:srgbClr val="1C1B19"/>
-                </a:solidFill>
-                <a:latin typeface="Source Serif 4"/>
-              </a:rPr>
-              <a:t>If a student says "I've always been like this," thank them and point them to a counselor or learning specialist after class. Know ahead of time who that is and how a learning plan conversation starts, so you can answer in one sentence.</a:t>
-            </a:r>
-          </a:p>
-          <a:p>
-            <a:pPr algn="l">
-              <a:spcAft>
-                <a:spcPts val="585"/>
-              </a:spcAft>
-            </a:pPr>
-            <a:r>
-              <a:rPr sz="1300" b="0" i="0">
-                <a:solidFill>
-                  <a:srgbClr val="1C1B19"/>
-                </a:solidFill>
-                <a:latin typeface="Source Serif 4"/>
-              </a:rPr>
-              <a:t/>
-            </a:r>
-          </a:p>
-          <a:p>
-            <a:pPr algn="l">
-              <a:spcAft>
-                <a:spcPts val="585"/>
-              </a:spcAft>
-            </a:pPr>
-            <a:r>
-              <a:rPr sz="1500" b="1" i="0">
-                <a:solidFill>
-                  <a:srgbClr val="1C1B19"/>
-                </a:solidFill>
-                <a:latin typeface="Source Serif 4"/>
-              </a:rPr>
-              <a:t>Stress and sleep can be the bigger story.</a:t>
-            </a:r>
-          </a:p>
-          <a:p>
-            <a:pPr algn="l">
-              <a:spcAft>
-                <a:spcPts val="585"/>
-              </a:spcAft>
-            </a:pPr>
-            <a:r>
-              <a:rPr sz="1300" b="0" i="0">
-                <a:solidFill>
-                  <a:srgbClr val="1C1B19"/>
-                </a:solidFill>
-                <a:latin typeface="Source Serif 4"/>
-              </a:rPr>
-              <a:t>If a student describes not sleeping, feeling hopeless about school, or seeing themselves as a failure, follow up privately and bring in a counselor. Don't ask about any of this in class.</a:t>
-            </a:r>
-          </a:p>
-          <a:p>
-            <a:pPr algn="l">
-              <a:spcAft>
-                <a:spcPts val="585"/>
-              </a:spcAft>
-            </a:pPr>
-            <a:r>
-              <a:rPr sz="1300" b="0" i="0">
-                <a:solidFill>
-                  <a:srgbClr val="1C1B19"/>
-                </a:solidFill>
-                <a:latin typeface="Source Serif 4"/>
-              </a:rPr>
-              <a:t/>
-            </a:r>
-          </a:p>
-          <a:p>
-            <a:pPr algn="l">
-              <a:spcAft>
-                <a:spcPts val="585"/>
-              </a:spcAft>
-            </a:pPr>
-            <a:r>
-              <a:rPr sz="1500" b="1" i="0">
-                <a:solidFill>
-                  <a:srgbClr val="1C1B19"/>
-                </a:solidFill>
-                <a:latin typeface="Source Serif 4"/>
-              </a:rPr>
-              <a:t>Keep the phone research honest.</a:t>
-            </a:r>
-          </a:p>
-          <a:p>
-            <a:pPr algn="l">
-              <a:spcAft>
-                <a:spcPts val="585"/>
-              </a:spcAft>
-            </a:pPr>
-            <a:r>
-              <a:rPr sz="1300" b="0" i="0">
-                <a:solidFill>
-                  <a:srgbClr val="1C1B19"/>
-                </a:solidFill>
-                <a:latin typeface="Source Serif 4"/>
-              </a:rPr>
-              <a:t>The 2009 Stanford multitasking study hasn't always repeated in later work. Present it as a warning sign. The cost of switching tasks is the well-established part, and it's enough. Skip the phone lecture; students tune out fast.</a:t>
-            </a:r>
-          </a:p>
-          <a:p>
-            <a:pPr algn="l">
-              <a:spcAft>
-                <a:spcPts val="585"/>
-              </a:spcAft>
-            </a:pPr>
-            <a:r>
-              <a:rPr sz="1300" b="0" i="0">
-                <a:solidFill>
-                  <a:srgbClr val="1C1B19"/>
-                </a:solidFill>
-                <a:latin typeface="Source Serif 4"/>
-              </a:rPr>
-              <a:t/>
-            </a:r>
-          </a:p>
-        </p:txBody>
-      </p:sp>
-    </p:spTree>
-  </p:cSld>
-  <p:clrMapOvr>
-    <a:masterClrMapping/>
-  </p:clrMapOvr>
-</p:sld>
-</file>
-
-<file path=ppt/slides/slide3.xml><?xml version="1.0" encoding="utf-8"?>
-<p:sld xmlns:a="http://schemas.openxmlformats.org/drawingml/2006/main" xmlns:p="http://schemas.openxmlformats.org/presentationml/2006/main" xmlns:r="http://schemas.openxmlformats.org/officeDocument/2006/relationships" show="0">
-  <p:cSld>
-    <p:bg>
-      <p:bgPr>
-        <a:solidFill>
-          <a:srgbClr val="EEEBE4"/>
-        </a:solidFill>
-        <a:effectLst/>
-      </p:bgPr>
-    </p:bg>
-    <p:spTree>
-      <p:nvGrpSpPr>
-        <p:cNvPr id="1" name=""/>
-        <p:cNvGrpSpPr/>
-        <p:nvPr/>
-      </p:nvGrpSpPr>
-      <p:grpSpPr/>
-      <p:sp>
-        <p:nvSpPr>
-          <p:cNvPr id="2" name="Rectangle 1"/>
-          <p:cNvSpPr/>
-          <p:nvPr/>
-        </p:nvSpPr>
-        <p:spPr>
-          <a:xfrm>
-            <a:off x="0" y="0"/>
-            <a:ext cx="12191695" cy="384048"/>
-          </a:xfrm>
-          <a:prstGeom prst="rect">
-            <a:avLst/>
-          </a:prstGeom>
-          <a:solidFill>
-            <a:srgbClr val="0B2D5B"/>
-          </a:solidFill>
-          <a:ln>
-            <a:noFill/>
-          </a:ln>
-          <a:effectLst/>
-        </p:spPr>
-        <p:style>
-          <a:lnRef idx="1">
-            <a:schemeClr val="accent1"/>
-          </a:lnRef>
-          <a:fillRef idx="3">
-            <a:schemeClr val="accent1"/>
-          </a:fillRef>
-          <a:effectRef idx="2">
-            <a:schemeClr val="accent1"/>
-          </a:effectRef>
-          <a:fontRef idx="minor">
-            <a:schemeClr val="lt1"/>
-          </a:fontRef>
-        </p:style>
-        <p:txBody>
-          <a:bodyPr rtlCol="0" anchor="ctr"/>
-          <a:lstStyle/>
-          <a:p>
-            <a:pPr algn="ctr"/>
-          </a:p>
-        </p:txBody>
-      </p:sp>
-      <p:sp>
-        <p:nvSpPr>
-          <p:cNvPr id="3" name="TextBox 2"/>
-          <p:cNvSpPr txBox="1"/>
-          <p:nvPr/>
-        </p:nvSpPr>
-        <p:spPr>
-          <a:xfrm>
-            <a:off x="548640" y="100584"/>
-            <a:ext cx="10972800" cy="274320"/>
-          </a:xfrm>
-          <a:prstGeom prst="rect">
-            <a:avLst/>
-          </a:prstGeom>
-          <a:noFill/>
-        </p:spPr>
-        <p:txBody>
-          <a:bodyPr wrap="square" anchor="t" lIns="0" rIns="0" tIns="0" bIns="0">
-            <a:spAutoFit/>
-          </a:bodyPr>
-          <a:lstStyle/>
-          <a:p>
-            <a:pPr algn="l">
-              <a:spcAft>
-                <a:spcPts val="495"/>
-              </a:spcAft>
-            </a:pPr>
-            <a:r>
-              <a:rPr sz="1100" b="1" i="0">
-                <a:solidFill>
-                  <a:srgbClr val="FFFFFF"/>
-                </a:solidFill>
-                <a:latin typeface="Inter Tight"/>
-              </a:rPr>
-              <a:t>TEACHER PAGE  ·  skipped when you present  ·  Every student in the room</a:t>
-            </a:r>
-          </a:p>
-        </p:txBody>
-      </p:sp>
-      <p:sp>
-        <p:nvSpPr>
-          <p:cNvPr id="4" name="TextBox 3"/>
-          <p:cNvSpPr txBox="1"/>
-          <p:nvPr/>
-        </p:nvSpPr>
-        <p:spPr>
-          <a:xfrm>
-            <a:off x="548640" y="685800"/>
-            <a:ext cx="10972800" cy="640080"/>
-          </a:xfrm>
-          <a:prstGeom prst="rect">
-            <a:avLst/>
-          </a:prstGeom>
-          <a:noFill/>
-        </p:spPr>
-        <p:txBody>
-          <a:bodyPr wrap="square" anchor="t" lIns="0" rIns="0" tIns="0" bIns="0">
-            <a:spAutoFit/>
-          </a:bodyPr>
-          <a:lstStyle/>
-          <a:p>
-            <a:pPr algn="l">
-              <a:spcAft>
-                <a:spcPts val="1350"/>
-              </a:spcAft>
-            </a:pPr>
-            <a:r>
-              <a:rPr sz="3000" b="1" i="0">
-                <a:solidFill>
-                  <a:srgbClr val="1C1B19"/>
-                </a:solidFill>
-                <a:latin typeface="Source Serif 4"/>
-              </a:rPr>
-              <a:t>Every student in the room</a:t>
-            </a:r>
-          </a:p>
-        </p:txBody>
-      </p:sp>
-      <p:sp>
-        <p:nvSpPr>
-          <p:cNvPr id="5" name="TextBox 4"/>
-          <p:cNvSpPr txBox="1"/>
-          <p:nvPr/>
-        </p:nvSpPr>
-        <p:spPr>
-          <a:xfrm>
-            <a:off x="548640" y="1325880"/>
-            <a:ext cx="10972800" cy="365760"/>
-          </a:xfrm>
-          <a:prstGeom prst="rect">
-            <a:avLst/>
-          </a:prstGeom>
-          <a:noFill/>
-        </p:spPr>
-        <p:txBody>
-          <a:bodyPr wrap="square" anchor="t" lIns="0" rIns="0" tIns="0" bIns="0">
-            <a:spAutoFit/>
-          </a:bodyPr>
-          <a:lstStyle/>
-          <a:p>
-            <a:pPr algn="l">
-              <a:spcAft>
-                <a:spcPts val="630"/>
-              </a:spcAft>
-            </a:pPr>
-            <a:r>
-              <a:rPr sz="1400" b="0" i="0">
+              <a:t>Flexibility: switching gears.</a:t>
+            </a:r>
+          </a:p>
+          <a:p>
+            <a:pPr algn="l">
+              <a:spcAft>
+                <a:spcPts val="945"/>
+              </a:spcAft>
+            </a:pPr>
+            <a:r>
+              <a:rPr sz="1600" b="0" i="0">
                 <a:solidFill>
                   <a:srgbClr val="5D5A54"/>
                 </a:solidFill>
-                <a:latin typeface="Inter Tight"/>
-              </a:rPr>
-              <a:t>Culture, family, identity, ability and money: what to keep in mind for this topic.</a:t>
-            </a:r>
-          </a:p>
-        </p:txBody>
-      </p:sp>
-      <p:sp>
-        <p:nvSpPr>
-          <p:cNvPr id="6" name="TextBox 5"/>
-          <p:cNvSpPr txBox="1"/>
-          <p:nvPr/>
-        </p:nvSpPr>
-        <p:spPr>
-          <a:xfrm>
-            <a:off x="548640" y="1828800"/>
-            <a:ext cx="5394960" cy="4572000"/>
-          </a:xfrm>
-          <a:prstGeom prst="rect">
-            <a:avLst/>
-          </a:prstGeom>
-          <a:noFill/>
-        </p:spPr>
-        <p:txBody>
-          <a:bodyPr wrap="square" anchor="t" lIns="0" rIns="0" tIns="0" bIns="0">
-            <a:spAutoFit/>
-          </a:bodyPr>
-          <a:lstStyle/>
-          <a:p>
-            <a:pPr algn="l">
-              <a:spcAft>
-                <a:spcPts val="585"/>
-              </a:spcAft>
-            </a:pPr>
-            <a:r>
-              <a:rPr sz="1500" b="1" i="0">
-                <a:solidFill>
-                  <a:srgbClr val="1C1B19"/>
-                </a:solidFill>
-                <a:latin typeface="Source Serif 4"/>
-              </a:rPr>
-              <a:t>Fixed blocks look different in every home.</a:t>
-            </a:r>
-          </a:p>
-          <a:p>
-            <a:pPr algn="l">
-              <a:spcAft>
-                <a:spcPts val="585"/>
-              </a:spcAft>
-            </a:pPr>
-            <a:r>
-              <a:rPr sz="1300" b="0" i="0">
-                <a:solidFill>
-                  <a:srgbClr val="1C1B19"/>
-                </a:solidFill>
-                <a:latin typeface="Source Serif 4"/>
-              </a:rPr>
-              <a:t>Some students pick up a sibling, watch younger cousins until a grandparent gets home, or split the week between two homes with two calendars. Treat these as the frame the plan fits around. The Nia scenario is built for this.</a:t>
-            </a:r>
-          </a:p>
-          <a:p>
-            <a:pPr algn="l">
-              <a:spcAft>
-                <a:spcPts val="585"/>
-              </a:spcAft>
-            </a:pPr>
-            <a:r>
-              <a:rPr sz="1300" b="0" i="0">
-                <a:solidFill>
-                  <a:srgbClr val="1C1B19"/>
-                </a:solidFill>
-                <a:latin typeface="Source Serif 4"/>
-              </a:rPr>
-              <a:t/>
-            </a:r>
-          </a:p>
-          <a:p>
-            <a:pPr algn="l">
-              <a:spcAft>
-                <a:spcPts val="585"/>
-              </a:spcAft>
-            </a:pPr>
-            <a:r>
-              <a:rPr sz="1500" b="1" i="0">
-                <a:solidFill>
-                  <a:srgbClr val="1C1B19"/>
-                </a:solidFill>
-                <a:latin typeface="Source Serif 4"/>
-              </a:rPr>
-              <a:t>A system shouldn't cost money or space.</a:t>
-            </a:r>
-          </a:p>
-          <a:p>
-            <a:pPr algn="l">
-              <a:spcAft>
-                <a:spcPts val="585"/>
-              </a:spcAft>
-            </a:pPr>
-            <a:r>
-              <a:rPr sz="1300" b="0" i="0">
-                <a:solidFill>
-                  <a:srgbClr val="1C1B19"/>
-                </a:solidFill>
-                <a:latin typeface="Source Serif 4"/>
-              </a:rPr>
-              <a:t>A paper list is free and works. Not every student has a desk, a quiet room, or a phone that can live in another room. "Design the room" can mean headphones, the library before school, or the phone face down in a backpack.</a:t>
-            </a:r>
-          </a:p>
-          <a:p>
-            <a:pPr algn="l">
-              <a:spcAft>
-                <a:spcPts val="585"/>
-              </a:spcAft>
-            </a:pPr>
-            <a:r>
-              <a:rPr sz="1300" b="0" i="0">
-                <a:solidFill>
-                  <a:srgbClr val="1C1B19"/>
-                </a:solidFill>
-                <a:latin typeface="Source Serif 4"/>
-              </a:rPr>
-              <a:t/>
-            </a:r>
-          </a:p>
-          <a:p>
-            <a:pPr algn="l">
-              <a:spcAft>
-                <a:spcPts val="585"/>
-              </a:spcAft>
-            </a:pPr>
-            <a:r>
-              <a:rPr sz="1500" b="1" i="0">
-                <a:solidFill>
-                  <a:srgbClr val="1C1B19"/>
-                </a:solidFill>
-                <a:latin typeface="Source Serif 4"/>
-              </a:rPr>
-              <a:t>ADHD and learning differences.</a:t>
-            </a:r>
-          </a:p>
-          <a:p>
-            <a:pPr algn="l">
-              <a:spcAft>
-                <a:spcPts val="585"/>
-              </a:spcAft>
-            </a:pPr>
-            <a:r>
-              <a:rPr sz="1300" b="0" i="0">
-                <a:solidFill>
-                  <a:srgbClr val="1C1B19"/>
-                </a:solidFill>
-                <a:latin typeface="Source Serif 4"/>
-              </a:rPr>
-              <a:t>ADHD is largely a difference in executive function and has nothing to do with intelligence or effort. More outside structure helps. Some families are wary of evaluations or labels; present an evaluation as information that can open supports like a learning plan, and leave the decision with the student and family.</a:t>
-            </a:r>
-          </a:p>
-          <a:p>
-            <a:pPr algn="l">
-              <a:spcAft>
-                <a:spcPts val="585"/>
-              </a:spcAft>
-            </a:pPr>
-            <a:r>
-              <a:rPr sz="1300" b="0" i="0">
-                <a:solidFill>
-                  <a:srgbClr val="1C1B19"/>
-                </a:solidFill>
-                <a:latin typeface="Source Serif 4"/>
-              </a:rPr>
-              <a:t/>
-            </a:r>
-          </a:p>
-        </p:txBody>
-      </p:sp>
-      <p:sp>
-        <p:nvSpPr>
-          <p:cNvPr id="7" name="TextBox 6"/>
-          <p:cNvSpPr txBox="1"/>
-          <p:nvPr/>
-        </p:nvSpPr>
-        <p:spPr>
-          <a:xfrm>
-            <a:off x="6217920" y="1828800"/>
-            <a:ext cx="5394960" cy="4572000"/>
-          </a:xfrm>
-          <a:prstGeom prst="rect">
-            <a:avLst/>
-          </a:prstGeom>
-          <a:noFill/>
-        </p:spPr>
-        <p:txBody>
-          <a:bodyPr wrap="square" anchor="t" lIns="0" rIns="0" tIns="0" bIns="0">
-            <a:spAutoFit/>
-          </a:bodyPr>
-          <a:lstStyle/>
-          <a:p>
-            <a:pPr algn="l">
-              <a:spcAft>
-                <a:spcPts val="585"/>
-              </a:spcAft>
-            </a:pPr>
-            <a:r>
-              <a:rPr sz="1500" b="1" i="0">
-                <a:solidFill>
-                  <a:srgbClr val="1C1B19"/>
-                </a:solidFill>
-                <a:latin typeface="Source Serif 4"/>
-              </a:rPr>
-              <a:t>Faith commitments are fixed blocks too.</a:t>
-            </a:r>
-          </a:p>
-          <a:p>
-            <a:pPr algn="l">
-              <a:spcAft>
-                <a:spcPts val="585"/>
-              </a:spcAft>
-            </a:pPr>
-            <a:r>
-              <a:rPr sz="1300" b="0" i="0">
-                <a:solidFill>
-                  <a:srgbClr val="1C1B19"/>
-                </a:solidFill>
-                <a:latin typeface="Source Serif 4"/>
-              </a:rPr>
-              <a:t>Religious services, holy days, and evening classes at a faith community belong on the calendar first, the same as practice. For students without those, the review step simply skips it.</a:t>
-            </a:r>
-          </a:p>
-          <a:p>
-            <a:pPr algn="l">
-              <a:spcAft>
-                <a:spcPts val="585"/>
-              </a:spcAft>
-            </a:pPr>
-            <a:r>
-              <a:rPr sz="1300" b="0" i="0">
-                <a:solidFill>
-                  <a:srgbClr val="1C1B19"/>
-                </a:solidFill>
-                <a:latin typeface="Source Serif 4"/>
-              </a:rPr>
-              <a:t/>
-            </a:r>
-          </a:p>
-          <a:p>
-            <a:pPr algn="l">
-              <a:spcAft>
-                <a:spcPts val="585"/>
-              </a:spcAft>
-            </a:pPr>
-            <a:r>
-              <a:rPr sz="1500" b="1" i="0">
-                <a:solidFill>
-                  <a:srgbClr val="1C1B19"/>
-                </a:solidFill>
-                <a:latin typeface="Source Serif 4"/>
-              </a:rPr>
-              <a:t>Asking a teacher for help varies by upbringing.</a:t>
-            </a:r>
-          </a:p>
-          <a:p>
-            <a:pPr algn="l">
-              <a:spcAft>
-                <a:spcPts val="585"/>
-              </a:spcAft>
-            </a:pPr>
-            <a:r>
-              <a:rPr sz="1300" b="0" i="0">
-                <a:solidFill>
-                  <a:srgbClr val="1C1B19"/>
-                </a:solidFill>
-                <a:latin typeface="Source Serif 4"/>
-              </a:rPr>
-              <a:t>In some homes questioning an adult or asking for an extension feels disrespectful. Model the exact words for "email a teacher now" so it reads as planning ahead, which most teachers welcome.</a:t>
-            </a:r>
-          </a:p>
-          <a:p>
-            <a:pPr algn="l">
-              <a:spcAft>
-                <a:spcPts val="585"/>
-              </a:spcAft>
-            </a:pPr>
-            <a:r>
-              <a:rPr sz="1300" b="0" i="0">
-                <a:solidFill>
-                  <a:srgbClr val="1C1B19"/>
-                </a:solidFill>
-                <a:latin typeface="Source Serif 4"/>
-              </a:rPr>
-              <a:t/>
-            </a:r>
-          </a:p>
-          <a:p>
-            <a:pPr algn="l">
-              <a:spcAft>
-                <a:spcPts val="585"/>
-              </a:spcAft>
-            </a:pPr>
-            <a:r>
-              <a:rPr sz="1500" b="1" i="0">
-                <a:solidFill>
-                  <a:srgbClr val="1C1B19"/>
-                </a:solidFill>
-                <a:latin typeface="Source Serif 4"/>
-              </a:rPr>
-              <a:t>Language at home.</a:t>
-            </a:r>
-          </a:p>
-          <a:p>
-            <a:pPr algn="l">
-              <a:spcAft>
-                <a:spcPts val="585"/>
-              </a:spcAft>
-            </a:pPr>
-            <a:r>
-              <a:rPr sz="1300" b="0" i="0">
-                <a:solidFill>
-                  <a:srgbClr val="1C1B19"/>
-                </a:solidFill>
-                <a:latin typeface="Source Serif 4"/>
-              </a:rPr>
-              <a:t>Some students translate forms and emails for their family, which is one more thing to track. If an evaluation comes up, families can ask the school for an interpreter. The take-home sheet is in plain language they can share.</a:t>
-            </a:r>
-          </a:p>
-          <a:p>
-            <a:pPr algn="l">
-              <a:spcAft>
-                <a:spcPts val="585"/>
-              </a:spcAft>
-            </a:pPr>
-            <a:r>
-              <a:rPr sz="1300" b="0" i="0">
-                <a:solidFill>
-                  <a:srgbClr val="1C1B19"/>
-                </a:solidFill>
-                <a:latin typeface="Source Serif 4"/>
-              </a:rPr>
-              <a:t/>
-            </a:r>
-          </a:p>
-        </p:txBody>
-      </p:sp>
-    </p:spTree>
-  </p:cSld>
-  <p:clrMapOvr>
-    <a:masterClrMapping/>
-  </p:clrMapOvr>
-</p:sld>
-</file>
-
-<file path=ppt/slides/slide4.xml><?xml version="1.0" encoding="utf-8"?>
-<p:sld xmlns:a="http://schemas.openxmlformats.org/drawingml/2006/main" xmlns:p="http://schemas.openxmlformats.org/presentationml/2006/main" xmlns:r="http://schemas.openxmlformats.org/officeDocument/2006/relationships" show="0">
-  <p:cSld>
-    <p:bg>
-      <p:bgPr>
-        <a:solidFill>
-          <a:srgbClr val="EEEBE4"/>
-        </a:solidFill>
-        <a:effectLst/>
-      </p:bgPr>
-    </p:bg>
-    <p:spTree>
-      <p:nvGrpSpPr>
-        <p:cNvPr id="1" name=""/>
-        <p:cNvGrpSpPr/>
-        <p:nvPr/>
-      </p:nvGrpSpPr>
-      <p:grpSpPr/>
-      <p:sp>
-        <p:nvSpPr>
-          <p:cNvPr id="2" name="Rectangle 1"/>
-          <p:cNvSpPr/>
-          <p:nvPr/>
-        </p:nvSpPr>
-        <p:spPr>
-          <a:xfrm>
-            <a:off x="0" y="0"/>
-            <a:ext cx="12191695" cy="384048"/>
-          </a:xfrm>
-          <a:prstGeom prst="rect">
-            <a:avLst/>
-          </a:prstGeom>
-          <a:solidFill>
-            <a:srgbClr val="0B2D5B"/>
-          </a:solidFill>
-          <a:ln>
-            <a:noFill/>
-          </a:ln>
-          <a:effectLst/>
-        </p:spPr>
-        <p:style>
-          <a:lnRef idx="1">
-            <a:schemeClr val="accent1"/>
-          </a:lnRef>
-          <a:fillRef idx="3">
-            <a:schemeClr val="accent1"/>
-          </a:fillRef>
-          <a:effectRef idx="2">
-            <a:schemeClr val="accent1"/>
-          </a:effectRef>
-          <a:fontRef idx="minor">
-            <a:schemeClr val="lt1"/>
-          </a:fontRef>
-        </p:style>
-        <p:txBody>
-          <a:bodyPr rtlCol="0" anchor="ctr"/>
-          <a:lstStyle/>
-          <a:p>
-            <a:pPr algn="ctr"/>
-          </a:p>
-        </p:txBody>
-      </p:sp>
-      <p:sp>
-        <p:nvSpPr>
-          <p:cNvPr id="3" name="TextBox 2"/>
-          <p:cNvSpPr txBox="1"/>
-          <p:nvPr/>
-        </p:nvSpPr>
-        <p:spPr>
-          <a:xfrm>
-            <a:off x="548640" y="100584"/>
-            <a:ext cx="10972800" cy="274320"/>
-          </a:xfrm>
-          <a:prstGeom prst="rect">
-            <a:avLst/>
-          </a:prstGeom>
-          <a:noFill/>
-        </p:spPr>
-        <p:txBody>
-          <a:bodyPr wrap="square" anchor="t" lIns="0" rIns="0" tIns="0" bIns="0">
-            <a:spAutoFit/>
-          </a:bodyPr>
-          <a:lstStyle/>
-          <a:p>
-            <a:pPr algn="l">
-              <a:spcAft>
-                <a:spcPts val="495"/>
-              </a:spcAft>
-            </a:pPr>
-            <a:r>
-              <a:rPr sz="1100" b="1" i="0">
-                <a:solidFill>
-                  <a:srgbClr val="FFFFFF"/>
-                </a:solidFill>
-                <a:latin typeface="Inter Tight"/>
-              </a:rPr>
-              <a:t>TEACHER PAGE  ·  skipped when you present  ·  Background</a:t>
-            </a:r>
-          </a:p>
-        </p:txBody>
-      </p:sp>
-      <p:sp>
-        <p:nvSpPr>
-          <p:cNvPr id="4" name="TextBox 3"/>
-          <p:cNvSpPr txBox="1"/>
-          <p:nvPr/>
-        </p:nvSpPr>
-        <p:spPr>
-          <a:xfrm>
-            <a:off x="548640" y="685800"/>
-            <a:ext cx="10972800" cy="640080"/>
-          </a:xfrm>
-          <a:prstGeom prst="rect">
-            <a:avLst/>
-          </a:prstGeom>
-          <a:noFill/>
-        </p:spPr>
-        <p:txBody>
-          <a:bodyPr wrap="square" anchor="t" lIns="0" rIns="0" tIns="0" bIns="0">
-            <a:spAutoFit/>
-          </a:bodyPr>
-          <a:lstStyle/>
-          <a:p>
-            <a:pPr algn="l">
-              <a:spcAft>
-                <a:spcPts val="1350"/>
-              </a:spcAft>
-            </a:pPr>
-            <a:r>
-              <a:rPr sz="3000" b="1" i="0">
-                <a:solidFill>
-                  <a:srgbClr val="1C1B19"/>
-                </a:solidFill>
-                <a:latin typeface="Source Serif 4"/>
-              </a:rPr>
-              <a:t>What the research says</a:t>
-            </a:r>
-          </a:p>
-        </p:txBody>
-      </p:sp>
-      <p:sp>
-        <p:nvSpPr>
-          <p:cNvPr id="5" name="TextBox 4"/>
-          <p:cNvSpPr txBox="1"/>
-          <p:nvPr/>
-        </p:nvSpPr>
-        <p:spPr>
-          <a:xfrm>
-            <a:off x="548640" y="1463040"/>
-            <a:ext cx="5394960" cy="4937760"/>
-          </a:xfrm>
-          <a:prstGeom prst="rect">
-            <a:avLst/>
-          </a:prstGeom>
-          <a:noFill/>
-        </p:spPr>
-        <p:txBody>
-          <a:bodyPr wrap="square" anchor="t" lIns="0" rIns="0" tIns="0" bIns="0">
-            <a:spAutoFit/>
-          </a:bodyPr>
-          <a:lstStyle/>
-          <a:p>
-            <a:pPr algn="l">
-              <a:spcAft>
-                <a:spcPts val="585"/>
-              </a:spcAft>
-            </a:pPr>
-            <a:r>
-              <a:rPr sz="1300" b="0" i="0">
-                <a:solidFill>
-                  <a:srgbClr val="1C1B19"/>
-                </a:solidFill>
-                <a:latin typeface="Source Serif 4"/>
-              </a:rPr>
-              <a:t>College students given a set of thinking tasks showed three related but separate abilities: updating (working memory), inhibition, and shifting (flexibility).</a:t>
-            </a:r>
-          </a:p>
-          <a:p>
-            <a:pPr algn="l">
-              <a:spcAft>
-                <a:spcPts val="585"/>
-              </a:spcAft>
-            </a:pPr>
-            <a:r>
-              <a:rPr sz="1050" b="0" i="0">
-                <a:solidFill>
-                  <a:srgbClr val="5D5A54"/>
-                </a:solidFill>
-                <a:latin typeface="Inter Tight"/>
-              </a:rPr>
-              <a:t>Miyake et al., Cognitive Psychology, 2000</a:t>
-            </a:r>
-          </a:p>
-          <a:p>
-            <a:pPr algn="l">
-              <a:spcAft>
-                <a:spcPts val="585"/>
-              </a:spcAft>
-            </a:pPr>
-            <a:r>
-              <a:rPr sz="1300" b="0" i="0">
-                <a:solidFill>
-                  <a:srgbClr val="1C1B19"/>
-                </a:solidFill>
-                <a:latin typeface="Source Serif 4"/>
-              </a:rPr>
-              <a:t>Four things reliably weaken executive function: stress, poor sleep, loneliness, and lack of exercise.</a:t>
-            </a:r>
-          </a:p>
-          <a:p>
-            <a:pPr algn="l">
-              <a:spcAft>
-                <a:spcPts val="585"/>
-              </a:spcAft>
-            </a:pPr>
-            <a:r>
-              <a:rPr sz="1050" b="0" i="0">
-                <a:solidFill>
-                  <a:srgbClr val="5D5A54"/>
-                </a:solidFill>
-                <a:latin typeface="Inter Tight"/>
-              </a:rPr>
-              <a:t>Diamond, Annual Review of Psychology, 2013</a:t>
-            </a:r>
-          </a:p>
-          <a:p>
-            <a:pPr algn="l">
-              <a:spcAft>
-                <a:spcPts val="585"/>
-              </a:spcAft>
-            </a:pPr>
-            <a:r>
-              <a:rPr sz="1300" b="0" i="0">
-                <a:solidFill>
-                  <a:srgbClr val="1C1B19"/>
-                </a:solidFill>
-                <a:latin typeface="Source Serif 4"/>
-              </a:rPr>
-              <a:t>Scanning the same young people every two years from childhood into their early 20s, the dorsolateral prefrontal cortex was among the last areas to mature, finishing at the end of adolescence.</a:t>
-            </a:r>
-          </a:p>
-          <a:p>
-            <a:pPr algn="l">
-              <a:spcAft>
-                <a:spcPts val="585"/>
-              </a:spcAft>
-            </a:pPr>
-            <a:r>
-              <a:rPr sz="1050" b="0" i="0">
-                <a:solidFill>
-                  <a:srgbClr val="5D5A54"/>
-                </a:solidFill>
-                <a:latin typeface="Inter Tight"/>
-              </a:rPr>
-              <a:t>Gogtay et al., PNAS, 2004</a:t>
-            </a:r>
-          </a:p>
-        </p:txBody>
-      </p:sp>
-      <p:sp>
-        <p:nvSpPr>
-          <p:cNvPr id="6" name="TextBox 5"/>
-          <p:cNvSpPr txBox="1"/>
-          <p:nvPr/>
-        </p:nvSpPr>
-        <p:spPr>
-          <a:xfrm>
-            <a:off x="6217920" y="1463040"/>
-            <a:ext cx="5394960" cy="4937760"/>
-          </a:xfrm>
-          <a:prstGeom prst="rect">
-            <a:avLst/>
-          </a:prstGeom>
-          <a:noFill/>
-        </p:spPr>
-        <p:txBody>
-          <a:bodyPr wrap="square" anchor="t" lIns="0" rIns="0" tIns="0" bIns="0">
-            <a:spAutoFit/>
-          </a:bodyPr>
-          <a:lstStyle/>
-          <a:p>
-            <a:pPr algn="l">
-              <a:spcAft>
-                <a:spcPts val="585"/>
-              </a:spcAft>
-            </a:pPr>
-            <a:r>
-              <a:rPr sz="1300" b="0" i="0">
-                <a:solidFill>
-                  <a:srgbClr val="1C1B19"/>
-                </a:solidFill>
-                <a:latin typeface="Source Serif 4"/>
-              </a:rPr>
-              <a:t>The Dunedin study followed about 1,000 New Zealanders from birth to 32. Childhood self-control predicted adult health, finances, and run-ins with the law, even after accounting for IQ and family income.</a:t>
-            </a:r>
-          </a:p>
-          <a:p>
-            <a:pPr algn="l">
-              <a:spcAft>
-                <a:spcPts val="585"/>
-              </a:spcAft>
-            </a:pPr>
-            <a:r>
-              <a:rPr sz="1050" b="0" i="0">
-                <a:solidFill>
-                  <a:srgbClr val="5D5A54"/>
-                </a:solidFill>
-                <a:latin typeface="Inter Tight"/>
-              </a:rPr>
-              <a:t>Moffitt et al., PNAS, 2011</a:t>
-            </a:r>
-          </a:p>
-          <a:p>
-            <a:pPr algn="l">
-              <a:spcAft>
-                <a:spcPts val="585"/>
-              </a:spcAft>
-            </a:pPr>
-            <a:r>
-              <a:rPr sz="1300" b="0" i="0">
-                <a:solidFill>
-                  <a:srgbClr val="1C1B19"/>
-                </a:solidFill>
-                <a:latin typeface="Source Serif 4"/>
-              </a:rPr>
-              <a:t>In the same study, people whose self-control improved over time did better as adults than their childhood scores predicted.</a:t>
-            </a:r>
-          </a:p>
-          <a:p>
-            <a:pPr algn="l">
-              <a:spcAft>
-                <a:spcPts val="585"/>
-              </a:spcAft>
-            </a:pPr>
-            <a:r>
-              <a:rPr sz="1050" b="0" i="0">
-                <a:solidFill>
-                  <a:srgbClr val="5D5A54"/>
-                </a:solidFill>
-                <a:latin typeface="Inter Tight"/>
-              </a:rPr>
-              <a:t>Moffitt et al., PNAS, 2011</a:t>
-            </a:r>
-          </a:p>
-          <a:p>
-            <a:pPr algn="l">
-              <a:spcAft>
-                <a:spcPts val="585"/>
-              </a:spcAft>
-            </a:pPr>
-            <a:r>
-              <a:rPr sz="1300" b="0" i="0">
-                <a:solidFill>
-                  <a:srgbClr val="1C1B19"/>
-                </a:solidFill>
-                <a:latin typeface="Source Serif 4"/>
-              </a:rPr>
-              <a:t>Heavy media multitaskers were worse at filtering out distractions and slower at switching tasks than light multitaskers. Later studies haven't all found the same thing; the cost of switching tasks is well established.</a:t>
-            </a:r>
-          </a:p>
-          <a:p>
-            <a:pPr algn="l">
-              <a:spcAft>
-                <a:spcPts val="585"/>
-              </a:spcAft>
-            </a:pPr>
-            <a:r>
-              <a:rPr sz="1050" b="0" i="0">
-                <a:solidFill>
-                  <a:srgbClr val="5D5A54"/>
-                </a:solidFill>
-                <a:latin typeface="Inter Tight"/>
-              </a:rPr>
-              <a:t>Ophir, Nass and Wagner, PNAS, 2009 (Stanford)</a:t>
-            </a:r>
-          </a:p>
-        </p:txBody>
-      </p:sp>
-    </p:spTree>
-  </p:cSld>
-  <p:clrMapOvr>
-    <a:masterClrMapping/>
-  </p:clrMapOvr>
-</p:sld>
-</file>
-
-<file path=ppt/slides/slide5.xml><?xml version="1.0" encoding="utf-8"?>
-<p:sld xmlns:a="http://schemas.openxmlformats.org/drawingml/2006/main" xmlns:p="http://schemas.openxmlformats.org/presentationml/2006/main" xmlns:r="http://schemas.openxmlformats.org/officeDocument/2006/relationships">
-  <p:cSld>
-    <p:bg>
-      <p:bgPr>
-        <a:solidFill>
-          <a:srgbClr val="0B2D5B"/>
-        </a:solidFill>
-        <a:effectLst/>
-      </p:bgPr>
-    </p:bg>
-    <p:spTree>
-      <p:nvGrpSpPr>
-        <p:cNvPr id="1" name=""/>
-        <p:cNvGrpSpPr/>
-        <p:nvPr/>
-      </p:nvGrpSpPr>
-      <p:grpSpPr/>
-      <p:sp>
-        <p:nvSpPr>
-          <p:cNvPr id="2" name="Rectangle 1"/>
-          <p:cNvSpPr/>
-          <p:nvPr/>
-        </p:nvSpPr>
-        <p:spPr>
-          <a:xfrm>
-            <a:off x="548640" y="502920"/>
-            <a:ext cx="457200" cy="54864"/>
-          </a:xfrm>
-          <a:prstGeom prst="rect">
-            <a:avLst/>
-          </a:prstGeom>
-          <a:solidFill>
-            <a:srgbClr val="F47B20"/>
-          </a:solidFill>
-          <a:ln>
-            <a:noFill/>
-          </a:ln>
-          <a:effectLst/>
-        </p:spPr>
-        <p:style>
-          <a:lnRef idx="1">
-            <a:schemeClr val="accent1"/>
-          </a:lnRef>
-          <a:fillRef idx="3">
-            <a:schemeClr val="accent1"/>
-          </a:fillRef>
-          <a:effectRef idx="2">
-            <a:schemeClr val="accent1"/>
-          </a:effectRef>
-          <a:fontRef idx="minor">
-            <a:schemeClr val="lt1"/>
-          </a:fontRef>
-        </p:style>
-        <p:txBody>
-          <a:bodyPr rtlCol="0" anchor="ctr"/>
-          <a:lstStyle/>
-          <a:p>
-            <a:pPr algn="ctr"/>
-          </a:p>
-        </p:txBody>
-      </p:sp>
-      <p:sp>
-        <p:nvSpPr>
-          <p:cNvPr id="3" name="TextBox 2"/>
-          <p:cNvSpPr txBox="1"/>
-          <p:nvPr/>
-        </p:nvSpPr>
-        <p:spPr>
-          <a:xfrm>
-            <a:off x="1143000" y="393192"/>
-            <a:ext cx="8229600" cy="274320"/>
-          </a:xfrm>
-          <a:prstGeom prst="rect">
-            <a:avLst/>
-          </a:prstGeom>
-          <a:noFill/>
-        </p:spPr>
-        <p:txBody>
-          <a:bodyPr wrap="square" anchor="t" lIns="0" rIns="0" tIns="0" bIns="0">
-            <a:spAutoFit/>
-          </a:bodyPr>
-          <a:lstStyle/>
-          <a:p>
-            <a:pPr algn="l">
-              <a:spcAft>
-                <a:spcPts val="540"/>
-              </a:spcAft>
-            </a:pPr>
-            <a:r>
-              <a:rPr sz="1200" b="1" i="0">
-                <a:solidFill>
-                  <a:srgbClr val="5D5A54"/>
-                </a:solidFill>
-                <a:latin typeface="Inter Tight"/>
-              </a:rPr>
-              <a:t>RUNNING THE SHOW</a:t>
-            </a:r>
-          </a:p>
-        </p:txBody>
-      </p:sp>
-      <p:sp>
-        <p:nvSpPr>
-          <p:cNvPr id="4" name="TextBox 3"/>
-          <p:cNvSpPr txBox="1"/>
-          <p:nvPr/>
-        </p:nvSpPr>
-        <p:spPr>
-          <a:xfrm>
-            <a:off x="8229600" y="6400800"/>
-            <a:ext cx="3410712" cy="274320"/>
-          </a:xfrm>
-          <a:prstGeom prst="rect">
-            <a:avLst/>
-          </a:prstGeom>
-          <a:noFill/>
-        </p:spPr>
-        <p:txBody>
-          <a:bodyPr wrap="square" anchor="t" lIns="0" rIns="0" tIns="0" bIns="0">
-            <a:spAutoFit/>
-          </a:bodyPr>
-          <a:lstStyle/>
-          <a:p>
-            <a:pPr algn="r">
-              <a:spcAft>
-                <a:spcPts val="450"/>
-              </a:spcAft>
-            </a:pPr>
-            <a:r>
-              <a:rPr sz="1000" b="0" i="0">
-                <a:solidFill>
-                  <a:srgbClr val="5D5A54"/>
-                </a:solidFill>
-                <a:latin typeface="Inter Tight"/>
-              </a:rPr>
-              <a:t>Beaver Counseling</a:t>
-            </a:r>
-          </a:p>
-        </p:txBody>
-      </p:sp>
-      <p:sp>
-        <p:nvSpPr>
-          <p:cNvPr id="5" name="TextBox 4"/>
-          <p:cNvSpPr txBox="1"/>
-          <p:nvPr/>
-        </p:nvSpPr>
-        <p:spPr>
-          <a:xfrm>
-            <a:off x="822960" y="2011680"/>
-            <a:ext cx="10515600" cy="1463040"/>
-          </a:xfrm>
-          <a:prstGeom prst="rect">
-            <a:avLst/>
-          </a:prstGeom>
-          <a:noFill/>
-        </p:spPr>
-        <p:txBody>
-          <a:bodyPr wrap="square" anchor="b" lIns="0" rIns="0" tIns="0" bIns="0">
-            <a:spAutoFit/>
-          </a:bodyPr>
-          <a:lstStyle/>
-          <a:p>
-            <a:pPr algn="l">
-              <a:spcAft>
-                <a:spcPts val="2700"/>
-              </a:spcAft>
-            </a:pPr>
-            <a:r>
-              <a:rPr sz="6000" b="1" i="0">
-                <a:solidFill>
-                  <a:srgbClr val="FFFFFF"/>
-                </a:solidFill>
-                <a:latin typeface="Source Serif 4"/>
-              </a:rPr>
-              <a:t>Running the Show</a:t>
-            </a:r>
-          </a:p>
-        </p:txBody>
-      </p:sp>
-      <p:sp>
-        <p:nvSpPr>
-          <p:cNvPr id="6" name="TextBox 5"/>
-          <p:cNvSpPr txBox="1"/>
-          <p:nvPr/>
-        </p:nvSpPr>
-        <p:spPr>
-          <a:xfrm>
-            <a:off x="822960" y="3611880"/>
-            <a:ext cx="10515600" cy="914400"/>
-          </a:xfrm>
-          <a:prstGeom prst="rect">
-            <a:avLst/>
-          </a:prstGeom>
-          <a:noFill/>
-        </p:spPr>
-        <p:txBody>
-          <a:bodyPr wrap="square" anchor="t" lIns="0" rIns="0" tIns="0" bIns="0">
-            <a:spAutoFit/>
-          </a:bodyPr>
-          <a:lstStyle/>
-          <a:p>
-            <a:pPr algn="l">
-              <a:spcAft>
-                <a:spcPts val="1080"/>
-              </a:spcAft>
-            </a:pPr>
-            <a:r>
-              <a:rPr sz="2400" b="0" i="1">
-                <a:solidFill>
-                  <a:srgbClr val="E8E4DA"/>
-                </a:solidFill>
-                <a:latin typeface="Source Serif 4"/>
-              </a:rPr>
-              <a:t>Smart enough. Still dropping balls.</a:t>
-            </a:r>
-          </a:p>
-        </p:txBody>
-      </p:sp>
-      <p:sp>
-        <p:nvSpPr>
-          <p:cNvPr id="7" name="TextBox 6"/>
-          <p:cNvSpPr txBox="1"/>
-          <p:nvPr/>
-        </p:nvSpPr>
-        <p:spPr>
-          <a:xfrm>
-            <a:off x="822960" y="6035040"/>
-            <a:ext cx="7315200" cy="365760"/>
-          </a:xfrm>
-          <a:prstGeom prst="rect">
-            <a:avLst/>
-          </a:prstGeom>
-          <a:noFill/>
-        </p:spPr>
-        <p:txBody>
-          <a:bodyPr wrap="square" anchor="t" lIns="0" rIns="0" tIns="0" bIns="0">
-            <a:spAutoFit/>
-          </a:bodyPr>
-          <a:lstStyle/>
-          <a:p>
-            <a:pPr algn="l">
-              <a:spcAft>
-                <a:spcPts val="585"/>
-              </a:spcAft>
-            </a:pPr>
-            <a:r>
-              <a:rPr sz="1300" b="0" i="0">
-                <a:solidFill>
-                  <a:srgbClr val="E8E4DA"/>
-                </a:solidFill>
-                <a:latin typeface="Inter Tight"/>
-              </a:rPr>
-              <a:t>Beaver Upper School · Counseling</a:t>
+                <a:latin typeface="Source Serif 4"/>
+              </a:rPr>
+              <a:t>A new plan when practice moves.</a:t>
             </a:r>
           </a:p>
         </p:txBody>
@@ -8607,7 +9664,7 @@
                 </a:solidFill>
                 <a:latin typeface="Inter Tight"/>
               </a:rPr>
-              <a:t>MYTH OR FACT?</a:t>
+              <a:t>WHAT KNOCKS THEM OFFLINE</a:t>
             </a:r>
           </a:p>
         </p:txBody>
@@ -8659,7 +9716,46 @@
         </p:nvSpPr>
         <p:spPr>
           <a:xfrm>
-            <a:off x="822960" y="1005840"/>
+            <a:off x="822960" y="1463040"/>
+            <a:ext cx="10515600" cy="3291840"/>
+          </a:xfrm>
+          <a:prstGeom prst="rect">
+            <a:avLst/>
+          </a:prstGeom>
+          <a:noFill/>
+        </p:spPr>
+        <p:txBody>
+          <a:bodyPr wrap="square" anchor="ctr" lIns="0" rIns="0" tIns="0" bIns="0">
+            <a:spAutoFit/>
+          </a:bodyPr>
+          <a:lstStyle/>
+          <a:p>
+            <a:pPr algn="l">
+              <a:spcAft>
+                <a:spcPts val="2070"/>
+              </a:spcAft>
+            </a:pPr>
+            <a:r>
+              <a:rPr sz="4600" b="1" i="0">
+                <a:solidFill>
+                  <a:srgbClr val="1C1B19"/>
+                </a:solidFill>
+                <a:latin typeface="Source Serif 4"/>
+              </a:rPr>
+              <a:t>A tired brain looks disorganized.</a:t>
+            </a:r>
+          </a:p>
+        </p:txBody>
+      </p:sp>
+      <p:sp>
+        <p:nvSpPr>
+          <p:cNvPr id="6" name="TextBox 5"/>
+          <p:cNvSpPr txBox="1"/>
+          <p:nvPr/>
+        </p:nvSpPr>
+        <p:spPr>
+          <a:xfrm>
+            <a:off x="822960" y="4846320"/>
             <a:ext cx="10515600" cy="1097280"/>
           </a:xfrm>
           <a:prstGeom prst="rect">
@@ -8675,407 +9771,17 @@
           <a:p>
             <a:pPr algn="l">
               <a:spcAft>
-                <a:spcPts val="1620"/>
-              </a:spcAft>
-            </a:pPr>
-            <a:r>
-              <a:rPr sz="3600" b="1" i="0">
-                <a:solidFill>
-                  <a:srgbClr val="1C1B19"/>
-                </a:solidFill>
-                <a:latin typeface="Source Serif 4"/>
-              </a:rPr>
-              <a:t>Stand up if you think it's a fact.</a:t>
-            </a:r>
-          </a:p>
-        </p:txBody>
-      </p:sp>
-      <p:sp>
-        <p:nvSpPr>
-          <p:cNvPr id="6" name="TextBox 5"/>
-          <p:cNvSpPr txBox="1"/>
-          <p:nvPr/>
-        </p:nvSpPr>
-        <p:spPr>
-          <a:xfrm>
-            <a:off x="822960" y="2057400"/>
-            <a:ext cx="548640" cy="804672"/>
-          </a:xfrm>
-          <a:prstGeom prst="rect">
-            <a:avLst/>
-          </a:prstGeom>
-          <a:noFill/>
-        </p:spPr>
-        <p:txBody>
-          <a:bodyPr wrap="square" anchor="t" lIns="0" rIns="0" tIns="0" bIns="0">
-            <a:spAutoFit/>
-          </a:bodyPr>
-          <a:lstStyle/>
-          <a:p>
-            <a:pPr algn="l">
-              <a:spcAft>
-                <a:spcPts val="1170"/>
-              </a:spcAft>
-            </a:pPr>
-            <a:r>
-              <a:rPr sz="2600" b="1" i="0">
-                <a:solidFill>
-                  <a:srgbClr val="F47B20"/>
-                </a:solidFill>
-                <a:latin typeface="Source Serif 4"/>
-              </a:rPr>
-              <a:t>1</a:t>
-            </a:r>
-          </a:p>
-        </p:txBody>
-      </p:sp>
-      <p:sp>
-        <p:nvSpPr>
-          <p:cNvPr id="7" name="TextBox 6"/>
-          <p:cNvSpPr txBox="1"/>
-          <p:nvPr/>
-        </p:nvSpPr>
-        <p:spPr>
-          <a:xfrm>
-            <a:off x="1463040" y="2093976"/>
-            <a:ext cx="9875520" cy="804672"/>
-          </a:xfrm>
-          <a:prstGeom prst="rect">
-            <a:avLst/>
-          </a:prstGeom>
-          <a:noFill/>
-        </p:spPr>
-        <p:txBody>
-          <a:bodyPr wrap="square" anchor="t" lIns="0" rIns="0" tIns="0" bIns="0">
-            <a:spAutoFit/>
-          </a:bodyPr>
-          <a:lstStyle/>
-          <a:p>
-            <a:pPr algn="l">
-              <a:spcAft>
-                <a:spcPts val="945"/>
-              </a:spcAft>
-            </a:pPr>
-            <a:r>
-              <a:rPr sz="2100" b="1" i="0">
-                <a:solidFill>
-                  <a:srgbClr val="1C1B19"/>
-                </a:solidFill>
-                <a:latin typeface="Source Serif 4"/>
-              </a:rPr>
-              <a:t>Some people just aren't organized.</a:t>
-            </a:r>
-          </a:p>
-        </p:txBody>
-      </p:sp>
-      <p:sp>
-        <p:nvSpPr>
-          <p:cNvPr id="8" name="TextBox 7"/>
-          <p:cNvSpPr txBox="1"/>
-          <p:nvPr/>
-        </p:nvSpPr>
-        <p:spPr>
-          <a:xfrm>
-            <a:off x="822960" y="2862072"/>
-            <a:ext cx="548640" cy="804672"/>
-          </a:xfrm>
-          <a:prstGeom prst="rect">
-            <a:avLst/>
-          </a:prstGeom>
-          <a:noFill/>
-        </p:spPr>
-        <p:txBody>
-          <a:bodyPr wrap="square" anchor="t" lIns="0" rIns="0" tIns="0" bIns="0">
-            <a:spAutoFit/>
-          </a:bodyPr>
-          <a:lstStyle/>
-          <a:p>
-            <a:pPr algn="l">
-              <a:spcAft>
-                <a:spcPts val="1170"/>
-              </a:spcAft>
-            </a:pPr>
-            <a:r>
-              <a:rPr sz="2600" b="1" i="0">
-                <a:solidFill>
-                  <a:srgbClr val="F47B20"/>
-                </a:solidFill>
-                <a:latin typeface="Source Serif 4"/>
-              </a:rPr>
-              <a:t>2</a:t>
-            </a:r>
-          </a:p>
-        </p:txBody>
-      </p:sp>
-      <p:sp>
-        <p:nvSpPr>
-          <p:cNvPr id="9" name="TextBox 8"/>
-          <p:cNvSpPr txBox="1"/>
-          <p:nvPr/>
-        </p:nvSpPr>
-        <p:spPr>
-          <a:xfrm>
-            <a:off x="1463040" y="2898648"/>
-            <a:ext cx="9875520" cy="804672"/>
-          </a:xfrm>
-          <a:prstGeom prst="rect">
-            <a:avLst/>
-          </a:prstGeom>
-          <a:noFill/>
-        </p:spPr>
-        <p:txBody>
-          <a:bodyPr wrap="square" anchor="t" lIns="0" rIns="0" tIns="0" bIns="0">
-            <a:spAutoFit/>
-          </a:bodyPr>
-          <a:lstStyle/>
-          <a:p>
-            <a:pPr algn="l">
-              <a:spcAft>
-                <a:spcPts val="945"/>
-              </a:spcAft>
-            </a:pPr>
-            <a:r>
-              <a:rPr sz="2100" b="1" i="0">
-                <a:solidFill>
-                  <a:srgbClr val="1C1B19"/>
-                </a:solidFill>
-                <a:latin typeface="Source Serif 4"/>
-              </a:rPr>
-              <a:t>Some people are great at multitasking.</a:t>
-            </a:r>
-          </a:p>
-        </p:txBody>
-      </p:sp>
-      <p:sp>
-        <p:nvSpPr>
-          <p:cNvPr id="10" name="TextBox 9"/>
-          <p:cNvSpPr txBox="1"/>
-          <p:nvPr/>
-        </p:nvSpPr>
-        <p:spPr>
-          <a:xfrm>
-            <a:off x="822960" y="3666744"/>
-            <a:ext cx="548640" cy="804672"/>
-          </a:xfrm>
-          <a:prstGeom prst="rect">
-            <a:avLst/>
-          </a:prstGeom>
-          <a:noFill/>
-        </p:spPr>
-        <p:txBody>
-          <a:bodyPr wrap="square" anchor="t" lIns="0" rIns="0" tIns="0" bIns="0">
-            <a:spAutoFit/>
-          </a:bodyPr>
-          <a:lstStyle/>
-          <a:p>
-            <a:pPr algn="l">
-              <a:spcAft>
-                <a:spcPts val="1170"/>
-              </a:spcAft>
-            </a:pPr>
-            <a:r>
-              <a:rPr sz="2600" b="1" i="0">
-                <a:solidFill>
-                  <a:srgbClr val="F47B20"/>
-                </a:solidFill>
-                <a:latin typeface="Source Serif 4"/>
-              </a:rPr>
-              <a:t>3</a:t>
-            </a:r>
-          </a:p>
-        </p:txBody>
-      </p:sp>
-      <p:sp>
-        <p:nvSpPr>
-          <p:cNvPr id="11" name="TextBox 10"/>
-          <p:cNvSpPr txBox="1"/>
-          <p:nvPr/>
-        </p:nvSpPr>
-        <p:spPr>
-          <a:xfrm>
-            <a:off x="1463040" y="3703320"/>
-            <a:ext cx="9875520" cy="804672"/>
-          </a:xfrm>
-          <a:prstGeom prst="rect">
-            <a:avLst/>
-          </a:prstGeom>
-          <a:noFill/>
-        </p:spPr>
-        <p:txBody>
-          <a:bodyPr wrap="square" anchor="t" lIns="0" rIns="0" tIns="0" bIns="0">
-            <a:spAutoFit/>
-          </a:bodyPr>
-          <a:lstStyle/>
-          <a:p>
-            <a:pPr algn="l">
-              <a:spcAft>
-                <a:spcPts val="945"/>
-              </a:spcAft>
-            </a:pPr>
-            <a:r>
-              <a:rPr sz="2100" b="1" i="0">
-                <a:solidFill>
-                  <a:srgbClr val="1C1B19"/>
-                </a:solidFill>
-                <a:latin typeface="Source Serif 4"/>
-              </a:rPr>
-              <a:t>Self-control as a kid predicts adult health and money.</a:t>
-            </a:r>
-          </a:p>
-        </p:txBody>
-      </p:sp>
-      <p:sp>
-        <p:nvSpPr>
-          <p:cNvPr id="12" name="TextBox 11"/>
-          <p:cNvSpPr txBox="1"/>
-          <p:nvPr/>
-        </p:nvSpPr>
-        <p:spPr>
-          <a:xfrm>
-            <a:off x="822960" y="4471416"/>
-            <a:ext cx="548640" cy="804672"/>
-          </a:xfrm>
-          <a:prstGeom prst="rect">
-            <a:avLst/>
-          </a:prstGeom>
-          <a:noFill/>
-        </p:spPr>
-        <p:txBody>
-          <a:bodyPr wrap="square" anchor="t" lIns="0" rIns="0" tIns="0" bIns="0">
-            <a:spAutoFit/>
-          </a:bodyPr>
-          <a:lstStyle/>
-          <a:p>
-            <a:pPr algn="l">
-              <a:spcAft>
-                <a:spcPts val="1170"/>
-              </a:spcAft>
-            </a:pPr>
-            <a:r>
-              <a:rPr sz="2600" b="1" i="0">
-                <a:solidFill>
-                  <a:srgbClr val="F47B20"/>
-                </a:solidFill>
-                <a:latin typeface="Source Serif 4"/>
-              </a:rPr>
-              <a:t>4</a:t>
-            </a:r>
-          </a:p>
-        </p:txBody>
-      </p:sp>
-      <p:sp>
-        <p:nvSpPr>
-          <p:cNvPr id="13" name="TextBox 12"/>
-          <p:cNvSpPr txBox="1"/>
-          <p:nvPr/>
-        </p:nvSpPr>
-        <p:spPr>
-          <a:xfrm>
-            <a:off x="1463040" y="4507992"/>
-            <a:ext cx="9875520" cy="804672"/>
-          </a:xfrm>
-          <a:prstGeom prst="rect">
-            <a:avLst/>
-          </a:prstGeom>
-          <a:noFill/>
-        </p:spPr>
-        <p:txBody>
-          <a:bodyPr wrap="square" anchor="t" lIns="0" rIns="0" tIns="0" bIns="0">
-            <a:spAutoFit/>
-          </a:bodyPr>
-          <a:lstStyle/>
-          <a:p>
-            <a:pPr algn="l">
-              <a:spcAft>
-                <a:spcPts val="945"/>
-              </a:spcAft>
-            </a:pPr>
-            <a:r>
-              <a:rPr sz="2100" b="1" i="0">
-                <a:solidFill>
-                  <a:srgbClr val="1C1B19"/>
-                </a:solidFill>
-                <a:latin typeface="Source Serif 4"/>
-              </a:rPr>
-              <a:t>The brain's planning workspace finishes maturing last.</a:t>
-            </a:r>
-          </a:p>
-        </p:txBody>
-      </p:sp>
-      <p:sp>
-        <p:nvSpPr>
-          <p:cNvPr id="14" name="TextBox 13"/>
-          <p:cNvSpPr txBox="1"/>
-          <p:nvPr/>
-        </p:nvSpPr>
-        <p:spPr>
-          <a:xfrm>
-            <a:off x="822960" y="5276088"/>
-            <a:ext cx="548640" cy="804672"/>
-          </a:xfrm>
-          <a:prstGeom prst="rect">
-            <a:avLst/>
-          </a:prstGeom>
-          <a:noFill/>
-        </p:spPr>
-        <p:txBody>
-          <a:bodyPr wrap="square" anchor="t" lIns="0" rIns="0" tIns="0" bIns="0">
-            <a:spAutoFit/>
-          </a:bodyPr>
-          <a:lstStyle/>
-          <a:p>
-            <a:pPr algn="l">
-              <a:spcAft>
-                <a:spcPts val="1170"/>
-              </a:spcAft>
-            </a:pPr>
-            <a:r>
-              <a:rPr sz="2600" b="1" i="0">
-                <a:solidFill>
-                  <a:srgbClr val="F47B20"/>
-                </a:solidFill>
-                <a:latin typeface="Source Serif 4"/>
-              </a:rPr>
-              <a:t>5</a:t>
-            </a:r>
-          </a:p>
-        </p:txBody>
-      </p:sp>
-      <p:sp>
-        <p:nvSpPr>
-          <p:cNvPr id="15" name="TextBox 14"/>
-          <p:cNvSpPr txBox="1"/>
-          <p:nvPr/>
-        </p:nvSpPr>
-        <p:spPr>
-          <a:xfrm>
-            <a:off x="1463040" y="5312664"/>
-            <a:ext cx="9875520" cy="804672"/>
-          </a:xfrm>
-          <a:prstGeom prst="rect">
-            <a:avLst/>
-          </a:prstGeom>
-          <a:noFill/>
-        </p:spPr>
-        <p:txBody>
-          <a:bodyPr wrap="square" anchor="t" lIns="0" rIns="0" tIns="0" bIns="0">
-            <a:spAutoFit/>
-          </a:bodyPr>
-          <a:lstStyle/>
-          <a:p>
-            <a:pPr algn="l">
-              <a:spcAft>
-                <a:spcPts val="945"/>
-              </a:spcAft>
-            </a:pPr>
-            <a:r>
-              <a:rPr sz="2100" b="1" i="0">
-                <a:solidFill>
-                  <a:srgbClr val="1C1B19"/>
-                </a:solidFill>
-                <a:latin typeface="Source Serif 4"/>
-              </a:rPr>
-              <a:t>One short night doesn't change how organized you are.</a:t>
+                <a:spcPts val="990"/>
+              </a:spcAft>
+            </a:pPr>
+            <a:r>
+              <a:rPr sz="2200" b="0" i="1">
+                <a:solidFill>
+                  <a:srgbClr val="5D5A54"/>
+                </a:solidFill>
+                <a:latin typeface="Source Serif 4"/>
+              </a:rPr>
+              <a:t>Stress, short sleep, loneliness, and no exercise all weaken these skills. Write a number 0 to 4: how many hit you this week? Fold it. No names.</a:t>
             </a:r>
           </a:p>
         </p:txBody>
@@ -9184,7 +9890,7 @@
                 </a:solidFill>
                 <a:latin typeface="Inter Tight"/>
               </a:rPr>
-              <a:t>MYTH OR FACT?</a:t>
+              <a:t>THE CORE IDEA</a:t>
             </a:r>
           </a:p>
         </p:txBody>
@@ -9236,7 +9942,46 @@
         </p:nvSpPr>
         <p:spPr>
           <a:xfrm>
-            <a:off x="822960" y="1005840"/>
+            <a:off x="822960" y="1463040"/>
+            <a:ext cx="10515600" cy="3291840"/>
+          </a:xfrm>
+          <a:prstGeom prst="rect">
+            <a:avLst/>
+          </a:prstGeom>
+          <a:noFill/>
+        </p:spPr>
+        <p:txBody>
+          <a:bodyPr wrap="square" anchor="ctr" lIns="0" rIns="0" tIns="0" bIns="0">
+            <a:spAutoFit/>
+          </a:bodyPr>
+          <a:lstStyle/>
+          <a:p>
+            <a:pPr algn="l">
+              <a:spcAft>
+                <a:spcPts val="2070"/>
+              </a:spcAft>
+            </a:pPr>
+            <a:r>
+              <a:rPr sz="4600" b="1" i="0">
+                <a:solidFill>
+                  <a:srgbClr val="1C1B19"/>
+                </a:solidFill>
+                <a:latin typeface="Source Serif 4"/>
+              </a:rPr>
+              <a:t>Organized people don't remember more. They offload more.</a:t>
+            </a:r>
+          </a:p>
+        </p:txBody>
+      </p:sp>
+      <p:sp>
+        <p:nvSpPr>
+          <p:cNvPr id="6" name="TextBox 5"/>
+          <p:cNvSpPr txBox="1"/>
+          <p:nvPr/>
+        </p:nvSpPr>
+        <p:spPr>
+          <a:xfrm>
+            <a:off x="822960" y="4846320"/>
             <a:ext cx="10515600" cy="1097280"/>
           </a:xfrm>
           <a:prstGeom prst="rect">
@@ -9252,487 +9997,17 @@
           <a:p>
             <a:pPr algn="l">
               <a:spcAft>
-                <a:spcPts val="1620"/>
-              </a:spcAft>
-            </a:pPr>
-            <a:r>
-              <a:rPr sz="3600" b="1" i="0">
-                <a:solidFill>
-                  <a:srgbClr val="1C1B19"/>
-                </a:solidFill>
-                <a:latin typeface="Source Serif 4"/>
-              </a:rPr>
-              <a:t>The answers</a:t>
-            </a:r>
-          </a:p>
-        </p:txBody>
-      </p:sp>
-      <p:sp>
-        <p:nvSpPr>
-          <p:cNvPr id="6" name="TextBox 5"/>
-          <p:cNvSpPr txBox="1"/>
-          <p:nvPr/>
-        </p:nvSpPr>
-        <p:spPr>
-          <a:xfrm>
-            <a:off x="822960" y="2057400"/>
-            <a:ext cx="548640" cy="804672"/>
-          </a:xfrm>
-          <a:prstGeom prst="rect">
-            <a:avLst/>
-          </a:prstGeom>
-          <a:noFill/>
-        </p:spPr>
-        <p:txBody>
-          <a:bodyPr wrap="square" anchor="t" lIns="0" rIns="0" tIns="0" bIns="0">
-            <a:spAutoFit/>
-          </a:bodyPr>
-          <a:lstStyle/>
-          <a:p>
-            <a:pPr algn="l">
-              <a:spcAft>
-                <a:spcPts val="1170"/>
-              </a:spcAft>
-            </a:pPr>
-            <a:r>
-              <a:rPr sz="2600" b="1" i="0">
-                <a:solidFill>
-                  <a:srgbClr val="F47B20"/>
-                </a:solidFill>
-                <a:latin typeface="Source Serif 4"/>
-              </a:rPr>
-              <a:t>1</a:t>
-            </a:r>
-          </a:p>
-        </p:txBody>
-      </p:sp>
-      <p:sp>
-        <p:nvSpPr>
-          <p:cNvPr id="7" name="TextBox 6"/>
-          <p:cNvSpPr txBox="1"/>
-          <p:nvPr/>
-        </p:nvSpPr>
-        <p:spPr>
-          <a:xfrm>
-            <a:off x="1463040" y="2093976"/>
-            <a:ext cx="9875520" cy="804672"/>
-          </a:xfrm>
-          <a:prstGeom prst="rect">
-            <a:avLst/>
-          </a:prstGeom>
-          <a:noFill/>
-        </p:spPr>
-        <p:txBody>
-          <a:bodyPr wrap="square" anchor="t" lIns="0" rIns="0" tIns="0" bIns="0">
-            <a:spAutoFit/>
-          </a:bodyPr>
-          <a:lstStyle/>
-          <a:p>
-            <a:pPr algn="l">
-              <a:spcAft>
-                <a:spcPts val="945"/>
-              </a:spcAft>
-            </a:pPr>
-            <a:r>
-              <a:rPr sz="2100" b="1" i="0">
-                <a:solidFill>
-                  <a:srgbClr val="1C1B19"/>
-                </a:solidFill>
-                <a:latin typeface="Source Serif 4"/>
-              </a:rPr>
-              <a:t>Myth.</a:t>
-            </a:r>
-          </a:p>
-          <a:p>
-            <a:pPr algn="l">
-              <a:spcAft>
-                <a:spcPts val="945"/>
-              </a:spcAft>
-            </a:pPr>
-            <a:r>
-              <a:rPr sz="1600" b="0" i="0">
+                <a:spcPts val="990"/>
+              </a:spcAft>
+            </a:pPr>
+            <a:r>
+              <a:rPr sz="2200" b="0" i="1">
                 <a:solidFill>
                   <a:srgbClr val="5D5A54"/>
                 </a:solidFill>
                 <a:latin typeface="Source Serif 4"/>
               </a:rPr>
-              <a:t>Organization is skills plus tools. "Not organized yet" is more accurate.</a:t>
-            </a:r>
-          </a:p>
-        </p:txBody>
-      </p:sp>
-      <p:sp>
-        <p:nvSpPr>
-          <p:cNvPr id="8" name="TextBox 7"/>
-          <p:cNvSpPr txBox="1"/>
-          <p:nvPr/>
-        </p:nvSpPr>
-        <p:spPr>
-          <a:xfrm>
-            <a:off x="822960" y="2862072"/>
-            <a:ext cx="548640" cy="804672"/>
-          </a:xfrm>
-          <a:prstGeom prst="rect">
-            <a:avLst/>
-          </a:prstGeom>
-          <a:noFill/>
-        </p:spPr>
-        <p:txBody>
-          <a:bodyPr wrap="square" anchor="t" lIns="0" rIns="0" tIns="0" bIns="0">
-            <a:spAutoFit/>
-          </a:bodyPr>
-          <a:lstStyle/>
-          <a:p>
-            <a:pPr algn="l">
-              <a:spcAft>
-                <a:spcPts val="1170"/>
-              </a:spcAft>
-            </a:pPr>
-            <a:r>
-              <a:rPr sz="2600" b="1" i="0">
-                <a:solidFill>
-                  <a:srgbClr val="F47B20"/>
-                </a:solidFill>
-                <a:latin typeface="Source Serif 4"/>
-              </a:rPr>
-              <a:t>2</a:t>
-            </a:r>
-          </a:p>
-        </p:txBody>
-      </p:sp>
-      <p:sp>
-        <p:nvSpPr>
-          <p:cNvPr id="9" name="TextBox 8"/>
-          <p:cNvSpPr txBox="1"/>
-          <p:nvPr/>
-        </p:nvSpPr>
-        <p:spPr>
-          <a:xfrm>
-            <a:off x="1463040" y="2898648"/>
-            <a:ext cx="9875520" cy="804672"/>
-          </a:xfrm>
-          <a:prstGeom prst="rect">
-            <a:avLst/>
-          </a:prstGeom>
-          <a:noFill/>
-        </p:spPr>
-        <p:txBody>
-          <a:bodyPr wrap="square" anchor="t" lIns="0" rIns="0" tIns="0" bIns="0">
-            <a:spAutoFit/>
-          </a:bodyPr>
-          <a:lstStyle/>
-          <a:p>
-            <a:pPr algn="l">
-              <a:spcAft>
-                <a:spcPts val="945"/>
-              </a:spcAft>
-            </a:pPr>
-            <a:r>
-              <a:rPr sz="2100" b="1" i="0">
-                <a:solidFill>
-                  <a:srgbClr val="1C1B19"/>
-                </a:solidFill>
-                <a:latin typeface="Source Serif 4"/>
-              </a:rPr>
-              <a:t>Myth.</a:t>
-            </a:r>
-          </a:p>
-          <a:p>
-            <a:pPr algn="l">
-              <a:spcAft>
-                <a:spcPts val="945"/>
-              </a:spcAft>
-            </a:pPr>
-            <a:r>
-              <a:rPr sz="1600" b="0" i="0">
-                <a:solidFill>
-                  <a:srgbClr val="5D5A54"/>
-                </a:solidFill>
-                <a:latin typeface="Source Serif 4"/>
-              </a:rPr>
-              <a:t>Almost everyone pays a cost each switch.</a:t>
-            </a:r>
-          </a:p>
-        </p:txBody>
-      </p:sp>
-      <p:sp>
-        <p:nvSpPr>
-          <p:cNvPr id="10" name="TextBox 9"/>
-          <p:cNvSpPr txBox="1"/>
-          <p:nvPr/>
-        </p:nvSpPr>
-        <p:spPr>
-          <a:xfrm>
-            <a:off x="822960" y="3666744"/>
-            <a:ext cx="548640" cy="804672"/>
-          </a:xfrm>
-          <a:prstGeom prst="rect">
-            <a:avLst/>
-          </a:prstGeom>
-          <a:noFill/>
-        </p:spPr>
-        <p:txBody>
-          <a:bodyPr wrap="square" anchor="t" lIns="0" rIns="0" tIns="0" bIns="0">
-            <a:spAutoFit/>
-          </a:bodyPr>
-          <a:lstStyle/>
-          <a:p>
-            <a:pPr algn="l">
-              <a:spcAft>
-                <a:spcPts val="1170"/>
-              </a:spcAft>
-            </a:pPr>
-            <a:r>
-              <a:rPr sz="2600" b="1" i="0">
-                <a:solidFill>
-                  <a:srgbClr val="F47B20"/>
-                </a:solidFill>
-                <a:latin typeface="Source Serif 4"/>
-              </a:rPr>
-              <a:t>3</a:t>
-            </a:r>
-          </a:p>
-        </p:txBody>
-      </p:sp>
-      <p:sp>
-        <p:nvSpPr>
-          <p:cNvPr id="11" name="TextBox 10"/>
-          <p:cNvSpPr txBox="1"/>
-          <p:nvPr/>
-        </p:nvSpPr>
-        <p:spPr>
-          <a:xfrm>
-            <a:off x="1463040" y="3703320"/>
-            <a:ext cx="9875520" cy="804672"/>
-          </a:xfrm>
-          <a:prstGeom prst="rect">
-            <a:avLst/>
-          </a:prstGeom>
-          <a:noFill/>
-        </p:spPr>
-        <p:txBody>
-          <a:bodyPr wrap="square" anchor="t" lIns="0" rIns="0" tIns="0" bIns="0">
-            <a:spAutoFit/>
-          </a:bodyPr>
-          <a:lstStyle/>
-          <a:p>
-            <a:pPr algn="l">
-              <a:spcAft>
-                <a:spcPts val="945"/>
-              </a:spcAft>
-            </a:pPr>
-            <a:r>
-              <a:rPr sz="2100" b="1" i="0">
-                <a:solidFill>
-                  <a:srgbClr val="1C1B19"/>
-                </a:solidFill>
-                <a:latin typeface="Source Serif 4"/>
-              </a:rPr>
-              <a:t>Fact.</a:t>
-            </a:r>
-          </a:p>
-          <a:p>
-            <a:pPr algn="l">
-              <a:spcAft>
-                <a:spcPts val="945"/>
-              </a:spcAft>
-            </a:pPr>
-            <a:r>
-              <a:rPr sz="1600" b="0" i="0">
-                <a:solidFill>
-                  <a:srgbClr val="5D5A54"/>
-                </a:solidFill>
-                <a:latin typeface="Source Serif 4"/>
-              </a:rPr>
-              <a:t>And people who improved did better than predicted.</a:t>
-            </a:r>
-          </a:p>
-        </p:txBody>
-      </p:sp>
-      <p:sp>
-        <p:nvSpPr>
-          <p:cNvPr id="12" name="TextBox 11"/>
-          <p:cNvSpPr txBox="1"/>
-          <p:nvPr/>
-        </p:nvSpPr>
-        <p:spPr>
-          <a:xfrm>
-            <a:off x="822960" y="4471416"/>
-            <a:ext cx="548640" cy="804672"/>
-          </a:xfrm>
-          <a:prstGeom prst="rect">
-            <a:avLst/>
-          </a:prstGeom>
-          <a:noFill/>
-        </p:spPr>
-        <p:txBody>
-          <a:bodyPr wrap="square" anchor="t" lIns="0" rIns="0" tIns="0" bIns="0">
-            <a:spAutoFit/>
-          </a:bodyPr>
-          <a:lstStyle/>
-          <a:p>
-            <a:pPr algn="l">
-              <a:spcAft>
-                <a:spcPts val="1170"/>
-              </a:spcAft>
-            </a:pPr>
-            <a:r>
-              <a:rPr sz="2600" b="1" i="0">
-                <a:solidFill>
-                  <a:srgbClr val="F47B20"/>
-                </a:solidFill>
-                <a:latin typeface="Source Serif 4"/>
-              </a:rPr>
-              <a:t>4</a:t>
-            </a:r>
-          </a:p>
-        </p:txBody>
-      </p:sp>
-      <p:sp>
-        <p:nvSpPr>
-          <p:cNvPr id="13" name="TextBox 12"/>
-          <p:cNvSpPr txBox="1"/>
-          <p:nvPr/>
-        </p:nvSpPr>
-        <p:spPr>
-          <a:xfrm>
-            <a:off x="1463040" y="4507992"/>
-            <a:ext cx="9875520" cy="804672"/>
-          </a:xfrm>
-          <a:prstGeom prst="rect">
-            <a:avLst/>
-          </a:prstGeom>
-          <a:noFill/>
-        </p:spPr>
-        <p:txBody>
-          <a:bodyPr wrap="square" anchor="t" lIns="0" rIns="0" tIns="0" bIns="0">
-            <a:spAutoFit/>
-          </a:bodyPr>
-          <a:lstStyle/>
-          <a:p>
-            <a:pPr algn="l">
-              <a:spcAft>
-                <a:spcPts val="945"/>
-              </a:spcAft>
-            </a:pPr>
-            <a:r>
-              <a:rPr sz="2100" b="1" i="0">
-                <a:solidFill>
-                  <a:srgbClr val="1C1B19"/>
-                </a:solidFill>
-                <a:latin typeface="Source Serif 4"/>
-              </a:rPr>
-              <a:t>Fact.</a:t>
-            </a:r>
-          </a:p>
-          <a:p>
-            <a:pPr algn="l">
-              <a:spcAft>
-                <a:spcPts val="945"/>
-              </a:spcAft>
-            </a:pPr>
-            <a:r>
-              <a:rPr sz="1600" b="0" i="0">
-                <a:solidFill>
-                  <a:srgbClr val="5D5A54"/>
-                </a:solidFill>
-                <a:latin typeface="Source Serif 4"/>
-              </a:rPr>
-              <a:t>It's among the last areas to mature, around the end of adolescence.</a:t>
-            </a:r>
-          </a:p>
-        </p:txBody>
-      </p:sp>
-      <p:sp>
-        <p:nvSpPr>
-          <p:cNvPr id="14" name="TextBox 13"/>
-          <p:cNvSpPr txBox="1"/>
-          <p:nvPr/>
-        </p:nvSpPr>
-        <p:spPr>
-          <a:xfrm>
-            <a:off x="822960" y="5276088"/>
-            <a:ext cx="548640" cy="804672"/>
-          </a:xfrm>
-          <a:prstGeom prst="rect">
-            <a:avLst/>
-          </a:prstGeom>
-          <a:noFill/>
-        </p:spPr>
-        <p:txBody>
-          <a:bodyPr wrap="square" anchor="t" lIns="0" rIns="0" tIns="0" bIns="0">
-            <a:spAutoFit/>
-          </a:bodyPr>
-          <a:lstStyle/>
-          <a:p>
-            <a:pPr algn="l">
-              <a:spcAft>
-                <a:spcPts val="1170"/>
-              </a:spcAft>
-            </a:pPr>
-            <a:r>
-              <a:rPr sz="2600" b="1" i="0">
-                <a:solidFill>
-                  <a:srgbClr val="F47B20"/>
-                </a:solidFill>
-                <a:latin typeface="Source Serif 4"/>
-              </a:rPr>
-              <a:t>5</a:t>
-            </a:r>
-          </a:p>
-        </p:txBody>
-      </p:sp>
-      <p:sp>
-        <p:nvSpPr>
-          <p:cNvPr id="15" name="TextBox 14"/>
-          <p:cNvSpPr txBox="1"/>
-          <p:nvPr/>
-        </p:nvSpPr>
-        <p:spPr>
-          <a:xfrm>
-            <a:off x="1463040" y="5312664"/>
-            <a:ext cx="9875520" cy="804672"/>
-          </a:xfrm>
-          <a:prstGeom prst="rect">
-            <a:avLst/>
-          </a:prstGeom>
-          <a:noFill/>
-        </p:spPr>
-        <p:txBody>
-          <a:bodyPr wrap="square" anchor="t" lIns="0" rIns="0" tIns="0" bIns="0">
-            <a:spAutoFit/>
-          </a:bodyPr>
-          <a:lstStyle/>
-          <a:p>
-            <a:pPr algn="l">
-              <a:spcAft>
-                <a:spcPts val="945"/>
-              </a:spcAft>
-            </a:pPr>
-            <a:r>
-              <a:rPr sz="2100" b="1" i="0">
-                <a:solidFill>
-                  <a:srgbClr val="1C1B19"/>
-                </a:solidFill>
-                <a:latin typeface="Source Serif 4"/>
-              </a:rPr>
-              <a:t>Myth.</a:t>
-            </a:r>
-          </a:p>
-          <a:p>
-            <a:pPr algn="l">
-              <a:spcAft>
-                <a:spcPts val="945"/>
-              </a:spcAft>
-            </a:pPr>
-            <a:r>
-              <a:rPr sz="1600" b="0" i="0">
-                <a:solidFill>
-                  <a:srgbClr val="5D5A54"/>
-                </a:solidFill>
-                <a:latin typeface="Source Serif 4"/>
-              </a:rPr>
-              <a:t>Short sleep weakens the exact skills you need.</a:t>
+              <a:t>Working memory holds only a few things. Move the job into tools and routines.</a:t>
             </a:r>
           </a:p>
         </p:txBody>
@@ -9841,7 +10116,7 @@
                 </a:solidFill>
                 <a:latin typeface="Inter Tight"/>
               </a:rPr>
-              <a:t>THREE SKILLS, NOT ONE</a:t>
+              <a:t>DESIGN YOUR SYSTEM</a:t>
             </a:r>
           </a:p>
         </p:txBody>
@@ -9887,14 +10162,97 @@
       </p:sp>
       <p:sp>
         <p:nvSpPr>
-          <p:cNvPr id="5" name="TextBox 4"/>
+          <p:cNvPr id="5" name="Rectangle 4"/>
+          <p:cNvSpPr/>
+          <p:nvPr/>
+        </p:nvSpPr>
+        <p:spPr>
+          <a:xfrm>
+            <a:off x="822960" y="1371600"/>
+            <a:ext cx="73152" cy="3566160"/>
+          </a:xfrm>
+          <a:prstGeom prst="rect">
+            <a:avLst/>
+          </a:prstGeom>
+          <a:solidFill>
+            <a:srgbClr val="F47B20"/>
+          </a:solidFill>
+          <a:ln>
+            <a:noFill/>
+          </a:ln>
+          <a:effectLst/>
+        </p:spPr>
+        <p:style>
+          <a:lnRef idx="1">
+            <a:schemeClr val="accent1"/>
+          </a:lnRef>
+          <a:fillRef idx="3">
+            <a:schemeClr val="accent1"/>
+          </a:fillRef>
+          <a:effectRef idx="2">
+            <a:schemeClr val="accent1"/>
+          </a:effectRef>
+          <a:fontRef idx="minor">
+            <a:schemeClr val="lt1"/>
+          </a:fontRef>
+        </p:style>
+        <p:txBody>
+          <a:bodyPr rtlCol="0" anchor="ctr"/>
+          <a:lstStyle/>
+          <a:p>
+            <a:pPr algn="ctr"/>
+          </a:p>
+        </p:txBody>
+      </p:sp>
+      <p:sp>
+        <p:nvSpPr>
+          <p:cNvPr id="6" name="TextBox 5"/>
           <p:cNvSpPr txBox="1"/>
           <p:nvPr/>
         </p:nvSpPr>
         <p:spPr>
           <a:xfrm>
-            <a:off x="822960" y="1005840"/>
-            <a:ext cx="10515600" cy="1097280"/>
+            <a:off x="1188720" y="1371600"/>
+            <a:ext cx="10058400" cy="3566160"/>
+          </a:xfrm>
+          <a:prstGeom prst="rect">
+            <a:avLst/>
+          </a:prstGeom>
+          <a:noFill/>
+        </p:spPr>
+        <p:txBody>
+          <a:bodyPr wrap="square" anchor="ctr" lIns="0" rIns="0" tIns="0" bIns="0">
+            <a:spAutoFit/>
+          </a:bodyPr>
+          <a:lstStyle/>
+          <a:p>
+            <a:pPr algn="l">
+              <a:spcAft>
+                <a:spcPts val="1800"/>
+              </a:spcAft>
+            </a:pPr>
+            <a:r>
+              <a:rPr sz="4000" b="0" i="1">
+                <a:solidFill>
+                  <a:srgbClr val="1C1B19"/>
+                </a:solidFill>
+                <a:latin typeface="Source Serif 4"/>
+              </a:rPr>
+              <a:t>Five lines on your card. Be specific.</a:t>
+            </a:r>
+          </a:p>
+        </p:txBody>
+      </p:sp>
+      <p:sp>
+        <p:nvSpPr>
+          <p:cNvPr id="7" name="TextBox 6"/>
+          <p:cNvSpPr txBox="1"/>
+          <p:nvPr/>
+        </p:nvSpPr>
+        <p:spPr>
+          <a:xfrm>
+            <a:off x="1188720" y="5120640"/>
+            <a:ext cx="10058400" cy="914400"/>
           </a:xfrm>
           <a:prstGeom prst="rect">
             <a:avLst/>
@@ -9909,299 +10267,17 @@
           <a:p>
             <a:pPr algn="l">
               <a:spcAft>
-                <a:spcPts val="1620"/>
-              </a:spcAft>
-            </a:pPr>
-            <a:r>
-              <a:rPr sz="3600" b="1" i="0">
-                <a:solidFill>
-                  <a:srgbClr val="1C1B19"/>
-                </a:solidFill>
-                <a:latin typeface="Source Serif 4"/>
-              </a:rPr>
-              <a:t>What "executive function" actually means</a:t>
-            </a:r>
-          </a:p>
-        </p:txBody>
-      </p:sp>
-      <p:sp>
-        <p:nvSpPr>
-          <p:cNvPr id="6" name="TextBox 5"/>
-          <p:cNvSpPr txBox="1"/>
-          <p:nvPr/>
-        </p:nvSpPr>
-        <p:spPr>
-          <a:xfrm>
-            <a:off x="822960" y="2194560"/>
-            <a:ext cx="548640" cy="1051560"/>
-          </a:xfrm>
-          <a:prstGeom prst="rect">
-            <a:avLst/>
-          </a:prstGeom>
-          <a:noFill/>
-        </p:spPr>
-        <p:txBody>
-          <a:bodyPr wrap="square" anchor="t" lIns="0" rIns="0" tIns="0" bIns="0">
-            <a:spAutoFit/>
-          </a:bodyPr>
-          <a:lstStyle/>
-          <a:p>
-            <a:pPr algn="l">
-              <a:spcAft>
-                <a:spcPts val="1170"/>
-              </a:spcAft>
-            </a:pPr>
-            <a:r>
-              <a:rPr sz="2600" b="1" i="0">
-                <a:solidFill>
-                  <a:srgbClr val="F47B20"/>
-                </a:solidFill>
-                <a:latin typeface="Source Serif 4"/>
-              </a:rPr>
-              <a:t>1</a:t>
-            </a:r>
-          </a:p>
-        </p:txBody>
-      </p:sp>
-      <p:sp>
-        <p:nvSpPr>
-          <p:cNvPr id="7" name="TextBox 6"/>
-          <p:cNvSpPr txBox="1"/>
-          <p:nvPr/>
-        </p:nvSpPr>
-        <p:spPr>
-          <a:xfrm>
-            <a:off x="1463040" y="2231136"/>
-            <a:ext cx="9875520" cy="1051560"/>
-          </a:xfrm>
-          <a:prstGeom prst="rect">
-            <a:avLst/>
-          </a:prstGeom>
-          <a:noFill/>
-        </p:spPr>
-        <p:txBody>
-          <a:bodyPr wrap="square" anchor="t" lIns="0" rIns="0" tIns="0" bIns="0">
-            <a:spAutoFit/>
-          </a:bodyPr>
-          <a:lstStyle/>
-          <a:p>
-            <a:pPr algn="l">
-              <a:spcAft>
-                <a:spcPts val="945"/>
-              </a:spcAft>
-            </a:pPr>
-            <a:r>
-              <a:rPr sz="2100" b="1" i="0">
-                <a:solidFill>
-                  <a:srgbClr val="1C1B19"/>
-                </a:solidFill>
-                <a:latin typeface="Source Serif 4"/>
-              </a:rPr>
-              <a:t>Working memory: holding and updating.</a:t>
-            </a:r>
-          </a:p>
-          <a:p>
-            <a:pPr algn="l">
-              <a:spcAft>
-                <a:spcPts val="945"/>
-              </a:spcAft>
-            </a:pPr>
-            <a:r>
-              <a:rPr sz="1600" b="0" i="0">
+                <a:spcPts val="810"/>
+              </a:spcAft>
+            </a:pPr>
+            <a:r>
+              <a:rPr sz="1800" b="0" i="0">
                 <a:solidFill>
                   <a:srgbClr val="5D5A54"/>
                 </a:solidFill>
-                <a:latin typeface="Source Serif 4"/>
-              </a:rPr>
-              <a:t>Keeping the steps in mind while you work.</a:t>
-            </a:r>
-          </a:p>
-        </p:txBody>
-      </p:sp>
-      <p:sp>
-        <p:nvSpPr>
-          <p:cNvPr id="8" name="TextBox 7"/>
-          <p:cNvSpPr txBox="1"/>
-          <p:nvPr/>
-        </p:nvSpPr>
-        <p:spPr>
-          <a:xfrm>
-            <a:off x="822960" y="3246120"/>
-            <a:ext cx="548640" cy="1051560"/>
-          </a:xfrm>
-          <a:prstGeom prst="rect">
-            <a:avLst/>
-          </a:prstGeom>
-          <a:noFill/>
-        </p:spPr>
-        <p:txBody>
-          <a:bodyPr wrap="square" anchor="t" lIns="0" rIns="0" tIns="0" bIns="0">
-            <a:spAutoFit/>
-          </a:bodyPr>
-          <a:lstStyle/>
-          <a:p>
-            <a:pPr algn="l">
-              <a:spcAft>
-                <a:spcPts val="1170"/>
-              </a:spcAft>
-            </a:pPr>
-            <a:r>
-              <a:rPr sz="2600" b="1" i="0">
-                <a:solidFill>
-                  <a:srgbClr val="F47B20"/>
-                </a:solidFill>
-                <a:latin typeface="Source Serif 4"/>
-              </a:rPr>
-              <a:t>2</a:t>
-            </a:r>
-          </a:p>
-        </p:txBody>
-      </p:sp>
-      <p:sp>
-        <p:nvSpPr>
-          <p:cNvPr id="9" name="TextBox 8"/>
-          <p:cNvSpPr txBox="1"/>
-          <p:nvPr/>
-        </p:nvSpPr>
-        <p:spPr>
-          <a:xfrm>
-            <a:off x="1463040" y="3282696"/>
-            <a:ext cx="9875520" cy="1051560"/>
-          </a:xfrm>
-          <a:prstGeom prst="rect">
-            <a:avLst/>
-          </a:prstGeom>
-          <a:noFill/>
-        </p:spPr>
-        <p:txBody>
-          <a:bodyPr wrap="square" anchor="t" lIns="0" rIns="0" tIns="0" bIns="0">
-            <a:spAutoFit/>
-          </a:bodyPr>
-          <a:lstStyle/>
-          <a:p>
-            <a:pPr algn="l">
-              <a:spcAft>
-                <a:spcPts val="945"/>
-              </a:spcAft>
-            </a:pPr>
-            <a:r>
-              <a:rPr sz="2100" b="1" i="0">
-                <a:solidFill>
-                  <a:srgbClr val="1C1B19"/>
-                </a:solidFill>
-                <a:latin typeface="Source Serif 4"/>
-              </a:rPr>
-              <a:t>Inhibition: skipping the easy thing.</a:t>
-            </a:r>
-          </a:p>
-          <a:p>
-            <a:pPr algn="l">
-              <a:spcAft>
-                <a:spcPts val="945"/>
-              </a:spcAft>
-            </a:pPr>
-            <a:r>
-              <a:rPr sz="1600" b="0" i="0">
-                <a:solidFill>
-                  <a:srgbClr val="5D5A54"/>
-                </a:solidFill>
-                <a:latin typeface="Source Serif 4"/>
-              </a:rPr>
-              <a:t>Ignoring the buzz, finishing the paragraph.</a:t>
-            </a:r>
-          </a:p>
-        </p:txBody>
-      </p:sp>
-      <p:sp>
-        <p:nvSpPr>
-          <p:cNvPr id="10" name="TextBox 9"/>
-          <p:cNvSpPr txBox="1"/>
-          <p:nvPr/>
-        </p:nvSpPr>
-        <p:spPr>
-          <a:xfrm>
-            <a:off x="822960" y="4297679"/>
-            <a:ext cx="548640" cy="1051560"/>
-          </a:xfrm>
-          <a:prstGeom prst="rect">
-            <a:avLst/>
-          </a:prstGeom>
-          <a:noFill/>
-        </p:spPr>
-        <p:txBody>
-          <a:bodyPr wrap="square" anchor="t" lIns="0" rIns="0" tIns="0" bIns="0">
-            <a:spAutoFit/>
-          </a:bodyPr>
-          <a:lstStyle/>
-          <a:p>
-            <a:pPr algn="l">
-              <a:spcAft>
-                <a:spcPts val="1170"/>
-              </a:spcAft>
-            </a:pPr>
-            <a:r>
-              <a:rPr sz="2600" b="1" i="0">
-                <a:solidFill>
-                  <a:srgbClr val="F47B20"/>
-                </a:solidFill>
-                <a:latin typeface="Source Serif 4"/>
-              </a:rPr>
-              <a:t>3</a:t>
-            </a:r>
-          </a:p>
-        </p:txBody>
-      </p:sp>
-      <p:sp>
-        <p:nvSpPr>
-          <p:cNvPr id="11" name="TextBox 10"/>
-          <p:cNvSpPr txBox="1"/>
-          <p:nvPr/>
-        </p:nvSpPr>
-        <p:spPr>
-          <a:xfrm>
-            <a:off x="1463040" y="4334255"/>
-            <a:ext cx="9875520" cy="1051560"/>
-          </a:xfrm>
-          <a:prstGeom prst="rect">
-            <a:avLst/>
-          </a:prstGeom>
-          <a:noFill/>
-        </p:spPr>
-        <p:txBody>
-          <a:bodyPr wrap="square" anchor="t" lIns="0" rIns="0" tIns="0" bIns="0">
-            <a:spAutoFit/>
-          </a:bodyPr>
-          <a:lstStyle/>
-          <a:p>
-            <a:pPr algn="l">
-              <a:spcAft>
-                <a:spcPts val="945"/>
-              </a:spcAft>
-            </a:pPr>
-            <a:r>
-              <a:rPr sz="2100" b="1" i="0">
-                <a:solidFill>
-                  <a:srgbClr val="1C1B19"/>
-                </a:solidFill>
-                <a:latin typeface="Source Serif 4"/>
-              </a:rPr>
-              <a:t>Flexibility: switching gears.</a:t>
-            </a:r>
-          </a:p>
-          <a:p>
-            <a:pPr algn="l">
-              <a:spcAft>
-                <a:spcPts val="945"/>
-              </a:spcAft>
-            </a:pPr>
-            <a:r>
-              <a:rPr sz="1600" b="0" i="0">
-                <a:solidFill>
-                  <a:srgbClr val="5D5A54"/>
-                </a:solidFill>
-                <a:latin typeface="Source Serif 4"/>
-              </a:rPr>
-              <a:t>A new plan when practice moves.</a:t>
+                <a:latin typeface="Inter Tight"/>
+              </a:rPr>
+              <a:t>My capture point. My weekly review time. One change to my space. What usually blows up my plans. My plan B.</a:t>
             </a:r>
           </a:p>
         </p:txBody>
@@ -10310,7 +10386,7 @@
                 </a:solidFill>
                 <a:latin typeface="Inter Tight"/>
               </a:rPr>
-              <a:t>WHAT KNOCKS THEM OFFLINE</a:t>
+              <a:t>THREE OVERLOADED WEEKS</a:t>
             </a:r>
           </a:p>
         </p:txBody>
@@ -10362,47 +10438,8 @@
         </p:nvSpPr>
         <p:spPr>
           <a:xfrm>
-            <a:off x="822960" y="1463040"/>
-            <a:ext cx="10515600" cy="3291840"/>
-          </a:xfrm>
-          <a:prstGeom prst="rect">
-            <a:avLst/>
-          </a:prstGeom>
-          <a:noFill/>
-        </p:spPr>
-        <p:txBody>
-          <a:bodyPr wrap="square" anchor="ctr" lIns="0" rIns="0" tIns="0" bIns="0">
-            <a:spAutoFit/>
-          </a:bodyPr>
-          <a:lstStyle/>
-          <a:p>
-            <a:pPr algn="l">
-              <a:spcAft>
-                <a:spcPts val="2070"/>
-              </a:spcAft>
-            </a:pPr>
-            <a:r>
-              <a:rPr sz="4600" b="1" i="0">
-                <a:solidFill>
-                  <a:srgbClr val="1C1B19"/>
-                </a:solidFill>
-                <a:latin typeface="Source Serif 4"/>
-              </a:rPr>
-              <a:t>A tired brain looks disorganized.</a:t>
-            </a:r>
-          </a:p>
-        </p:txBody>
-      </p:sp>
-      <p:sp>
-        <p:nvSpPr>
-          <p:cNvPr id="6" name="TextBox 5"/>
-          <p:cNvSpPr txBox="1"/>
-          <p:nvPr/>
-        </p:nvSpPr>
-        <p:spPr>
-          <a:xfrm>
-            <a:off x="822960" y="4846320"/>
-            <a:ext cx="10515600" cy="1097280"/>
+            <a:off x="822960" y="1005840"/>
+            <a:ext cx="10515600" cy="914400"/>
           </a:xfrm>
           <a:prstGeom prst="rect">
             <a:avLst/>
@@ -10417,17 +10454,389 @@
           <a:p>
             <a:pPr algn="l">
               <a:spcAft>
-                <a:spcPts val="990"/>
-              </a:spcAft>
-            </a:pPr>
-            <a:r>
-              <a:rPr sz="2200" b="0" i="1">
-                <a:solidFill>
-                  <a:srgbClr val="5D5A54"/>
-                </a:solidFill>
-                <a:latin typeface="Source Serif 4"/>
-              </a:rPr>
-              <a:t>Stress, short sleep, loneliness, and no exercise all weaken these skills. Write a number 0 to 4: how many hit you this week? Fold it. No names.</a:t>
+                <a:spcPts val="1530"/>
+              </a:spcAft>
+            </a:pPr>
+            <a:r>
+              <a:rPr sz="3400" b="1" i="0">
+                <a:solidFill>
+                  <a:srgbClr val="1C1B19"/>
+                </a:solidFill>
+                <a:latin typeface="Source Serif 4"/>
+              </a:rPr>
+              <a:t>Which skill needs the backup?</a:t>
+            </a:r>
+          </a:p>
+        </p:txBody>
+      </p:sp>
+      <p:sp>
+        <p:nvSpPr>
+          <p:cNvPr id="6" name="Rectangle 5"/>
+          <p:cNvSpPr/>
+          <p:nvPr/>
+        </p:nvSpPr>
+        <p:spPr>
+          <a:xfrm>
+            <a:off x="822960" y="2103120"/>
+            <a:ext cx="3322320" cy="3840480"/>
+          </a:xfrm>
+          <a:prstGeom prst="rect">
+            <a:avLst/>
+          </a:prstGeom>
+          <a:solidFill>
+            <a:srgbClr val="FFFFFF"/>
+          </a:solidFill>
+          <a:ln w="15875">
+            <a:solidFill>
+              <a:srgbClr val="D8D2C6"/>
+            </a:solidFill>
+          </a:ln>
+          <a:effectLst/>
+        </p:spPr>
+        <p:style>
+          <a:lnRef idx="1">
+            <a:schemeClr val="accent1"/>
+          </a:lnRef>
+          <a:fillRef idx="3">
+            <a:schemeClr val="accent1"/>
+          </a:fillRef>
+          <a:effectRef idx="2">
+            <a:schemeClr val="accent1"/>
+          </a:effectRef>
+          <a:fontRef idx="minor">
+            <a:schemeClr val="lt1"/>
+          </a:fontRef>
+        </p:style>
+        <p:txBody>
+          <a:bodyPr rtlCol="0" anchor="ctr"/>
+          <a:lstStyle/>
+          <a:p>
+            <a:pPr algn="ctr"/>
+          </a:p>
+        </p:txBody>
+      </p:sp>
+      <p:sp>
+        <p:nvSpPr>
+          <p:cNvPr id="7" name="TextBox 6"/>
+          <p:cNvSpPr txBox="1"/>
+          <p:nvPr/>
+        </p:nvSpPr>
+        <p:spPr>
+          <a:xfrm>
+            <a:off x="1051560" y="2286000"/>
+            <a:ext cx="2865120" cy="365760"/>
+          </a:xfrm>
+          <a:prstGeom prst="rect">
+            <a:avLst/>
+          </a:prstGeom>
+          <a:noFill/>
+        </p:spPr>
+        <p:txBody>
+          <a:bodyPr wrap="square" anchor="t" lIns="0" rIns="0" tIns="0" bIns="0">
+            <a:spAutoFit/>
+          </a:bodyPr>
+          <a:lstStyle/>
+          <a:p>
+            <a:pPr algn="l">
+              <a:spcAft>
+                <a:spcPts val="585"/>
+              </a:spcAft>
+            </a:pPr>
+            <a:r>
+              <a:rPr sz="1300" b="1" i="0">
+                <a:solidFill>
+                  <a:srgbClr val="0B2D5B"/>
+                </a:solidFill>
+                <a:latin typeface="Inter Tight"/>
+              </a:rPr>
+              <a:t>DEV</a:t>
+            </a:r>
+          </a:p>
+        </p:txBody>
+      </p:sp>
+      <p:sp>
+        <p:nvSpPr>
+          <p:cNvPr id="8" name="TextBox 7"/>
+          <p:cNvSpPr txBox="1"/>
+          <p:nvPr/>
+        </p:nvSpPr>
+        <p:spPr>
+          <a:xfrm>
+            <a:off x="1051560" y="2743200"/>
+            <a:ext cx="2865120" cy="3017520"/>
+          </a:xfrm>
+          <a:prstGeom prst="rect">
+            <a:avLst/>
+          </a:prstGeom>
+          <a:noFill/>
+        </p:spPr>
+        <p:txBody>
+          <a:bodyPr wrap="square" anchor="t" lIns="0" rIns="0" tIns="0" bIns="0">
+            <a:spAutoFit/>
+          </a:bodyPr>
+          <a:lstStyle/>
+          <a:p>
+            <a:pPr algn="l">
+              <a:spcAft>
+                <a:spcPts val="810"/>
+              </a:spcAft>
+            </a:pPr>
+            <a:r>
+              <a:rPr sz="1800" b="0" i="0">
+                <a:solidFill>
+                  <a:srgbClr val="1C1B19"/>
+                </a:solidFill>
+                <a:latin typeface="Source Serif 4"/>
+              </a:rPr>
+              <a:t>Plays JV soccer and keeps missing small things: a field trip form, a quiz date, a rehearsal change. Each was posted somewhere different.</a:t>
+            </a:r>
+          </a:p>
+        </p:txBody>
+      </p:sp>
+      <p:sp>
+        <p:nvSpPr>
+          <p:cNvPr id="9" name="Rectangle 8"/>
+          <p:cNvSpPr/>
+          <p:nvPr/>
+        </p:nvSpPr>
+        <p:spPr>
+          <a:xfrm>
+            <a:off x="4419600" y="2103120"/>
+            <a:ext cx="3322320" cy="3840480"/>
+          </a:xfrm>
+          <a:prstGeom prst="rect">
+            <a:avLst/>
+          </a:prstGeom>
+          <a:solidFill>
+            <a:srgbClr val="FFFFFF"/>
+          </a:solidFill>
+          <a:ln w="15875">
+            <a:solidFill>
+              <a:srgbClr val="D8D2C6"/>
+            </a:solidFill>
+          </a:ln>
+          <a:effectLst/>
+        </p:spPr>
+        <p:style>
+          <a:lnRef idx="1">
+            <a:schemeClr val="accent1"/>
+          </a:lnRef>
+          <a:fillRef idx="3">
+            <a:schemeClr val="accent1"/>
+          </a:fillRef>
+          <a:effectRef idx="2">
+            <a:schemeClr val="accent1"/>
+          </a:effectRef>
+          <a:fontRef idx="minor">
+            <a:schemeClr val="lt1"/>
+          </a:fontRef>
+        </p:style>
+        <p:txBody>
+          <a:bodyPr rtlCol="0" anchor="ctr"/>
+          <a:lstStyle/>
+          <a:p>
+            <a:pPr algn="ctr"/>
+          </a:p>
+        </p:txBody>
+      </p:sp>
+      <p:sp>
+        <p:nvSpPr>
+          <p:cNvPr id="10" name="TextBox 9"/>
+          <p:cNvSpPr txBox="1"/>
+          <p:nvPr/>
+        </p:nvSpPr>
+        <p:spPr>
+          <a:xfrm>
+            <a:off x="4648200" y="2286000"/>
+            <a:ext cx="2865120" cy="365760"/>
+          </a:xfrm>
+          <a:prstGeom prst="rect">
+            <a:avLst/>
+          </a:prstGeom>
+          <a:noFill/>
+        </p:spPr>
+        <p:txBody>
+          <a:bodyPr wrap="square" anchor="t" lIns="0" rIns="0" tIns="0" bIns="0">
+            <a:spAutoFit/>
+          </a:bodyPr>
+          <a:lstStyle/>
+          <a:p>
+            <a:pPr algn="l">
+              <a:spcAft>
+                <a:spcPts val="585"/>
+              </a:spcAft>
+            </a:pPr>
+            <a:r>
+              <a:rPr sz="1300" b="1" i="0">
+                <a:solidFill>
+                  <a:srgbClr val="0B2D5B"/>
+                </a:solidFill>
+                <a:latin typeface="Inter Tight"/>
+              </a:rPr>
+              <a:t>NIA</a:t>
+            </a:r>
+          </a:p>
+        </p:txBody>
+      </p:sp>
+      <p:sp>
+        <p:nvSpPr>
+          <p:cNvPr id="11" name="TextBox 10"/>
+          <p:cNvSpPr txBox="1"/>
+          <p:nvPr/>
+        </p:nvSpPr>
+        <p:spPr>
+          <a:xfrm>
+            <a:off x="4648200" y="2743200"/>
+            <a:ext cx="2865120" cy="3017520"/>
+          </a:xfrm>
+          <a:prstGeom prst="rect">
+            <a:avLst/>
+          </a:prstGeom>
+          <a:noFill/>
+        </p:spPr>
+        <p:txBody>
+          <a:bodyPr wrap="square" anchor="t" lIns="0" rIns="0" tIns="0" bIns="0">
+            <a:spAutoFit/>
+          </a:bodyPr>
+          <a:lstStyle/>
+          <a:p>
+            <a:pPr algn="l">
+              <a:spcAft>
+                <a:spcPts val="810"/>
+              </a:spcAft>
+            </a:pPr>
+            <a:r>
+              <a:rPr sz="1800" b="0" i="0">
+                <a:solidFill>
+                  <a:srgbClr val="1C1B19"/>
+                </a:solidFill>
+                <a:latin typeface="Source Serif 4"/>
+              </a:rPr>
+              <a:t>Watches her two younger brothers after school until her grandfather gets home at 6:30. Every 3:30 plan falls apart, and homework starts at 9.</a:t>
+            </a:r>
+          </a:p>
+        </p:txBody>
+      </p:sp>
+      <p:sp>
+        <p:nvSpPr>
+          <p:cNvPr id="12" name="Rectangle 11"/>
+          <p:cNvSpPr/>
+          <p:nvPr/>
+        </p:nvSpPr>
+        <p:spPr>
+          <a:xfrm>
+            <a:off x="8016239" y="2103120"/>
+            <a:ext cx="3322320" cy="3840480"/>
+          </a:xfrm>
+          <a:prstGeom prst="rect">
+            <a:avLst/>
+          </a:prstGeom>
+          <a:solidFill>
+            <a:srgbClr val="FFFFFF"/>
+          </a:solidFill>
+          <a:ln w="15875">
+            <a:solidFill>
+              <a:srgbClr val="D8D2C6"/>
+            </a:solidFill>
+          </a:ln>
+          <a:effectLst/>
+        </p:spPr>
+        <p:style>
+          <a:lnRef idx="1">
+            <a:schemeClr val="accent1"/>
+          </a:lnRef>
+          <a:fillRef idx="3">
+            <a:schemeClr val="accent1"/>
+          </a:fillRef>
+          <a:effectRef idx="2">
+            <a:schemeClr val="accent1"/>
+          </a:effectRef>
+          <a:fontRef idx="minor">
+            <a:schemeClr val="lt1"/>
+          </a:fontRef>
+        </p:style>
+        <p:txBody>
+          <a:bodyPr rtlCol="0" anchor="ctr"/>
+          <a:lstStyle/>
+          <a:p>
+            <a:pPr algn="ctr"/>
+          </a:p>
+        </p:txBody>
+      </p:sp>
+      <p:sp>
+        <p:nvSpPr>
+          <p:cNvPr id="13" name="TextBox 12"/>
+          <p:cNvSpPr txBox="1"/>
+          <p:nvPr/>
+        </p:nvSpPr>
+        <p:spPr>
+          <a:xfrm>
+            <a:off x="8244839" y="2286000"/>
+            <a:ext cx="2865120" cy="365760"/>
+          </a:xfrm>
+          <a:prstGeom prst="rect">
+            <a:avLst/>
+          </a:prstGeom>
+          <a:noFill/>
+        </p:spPr>
+        <p:txBody>
+          <a:bodyPr wrap="square" anchor="t" lIns="0" rIns="0" tIns="0" bIns="0">
+            <a:spAutoFit/>
+          </a:bodyPr>
+          <a:lstStyle/>
+          <a:p>
+            <a:pPr algn="l">
+              <a:spcAft>
+                <a:spcPts val="585"/>
+              </a:spcAft>
+            </a:pPr>
+            <a:r>
+              <a:rPr sz="1300" b="1" i="0">
+                <a:solidFill>
+                  <a:srgbClr val="0B2D5B"/>
+                </a:solidFill>
+                <a:latin typeface="Inter Tight"/>
+              </a:rPr>
+              <a:t>LUIS</a:t>
+            </a:r>
+          </a:p>
+        </p:txBody>
+      </p:sp>
+      <p:sp>
+        <p:nvSpPr>
+          <p:cNvPr id="14" name="TextBox 13"/>
+          <p:cNvSpPr txBox="1"/>
+          <p:nvPr/>
+        </p:nvSpPr>
+        <p:spPr>
+          <a:xfrm>
+            <a:off x="8244839" y="2743200"/>
+            <a:ext cx="2865120" cy="3017520"/>
+          </a:xfrm>
+          <a:prstGeom prst="rect">
+            <a:avLst/>
+          </a:prstGeom>
+          <a:noFill/>
+        </p:spPr>
+        <p:txBody>
+          <a:bodyPr wrap="square" anchor="t" lIns="0" rIns="0" tIns="0" bIns="0">
+            <a:spAutoFit/>
+          </a:bodyPr>
+          <a:lstStyle/>
+          <a:p>
+            <a:pPr algn="l">
+              <a:spcAft>
+                <a:spcPts val="810"/>
+              </a:spcAft>
+            </a:pPr>
+            <a:r>
+              <a:rPr sz="1800" b="0" i="0">
+                <a:solidFill>
+                  <a:srgbClr val="1C1B19"/>
+                </a:solidFill>
+                <a:latin typeface="Source Serif 4"/>
+              </a:rPr>
+              <a:t>Sits down to write his lab report at 8 with his phone next to the laptop. By 9:15 he has a title and a long group chat thread.</a:t>
             </a:r>
           </a:p>
         </p:txBody>

--- a/decks/running-the-show-lesson-v2.pptx
+++ b/decks/running-the-show-lesson-v2.pptx
@@ -6552,7 +6552,7 @@
                 </a:solidFill>
                 <a:latin typeface="Source Serif 4"/>
               </a:rPr>
-              <a:t>Know who handles evaluations at your school.</a:t>
+              <a:t>If a student says "I've always been like this."</a:t>
             </a:r>
           </a:p>
           <a:p>
@@ -6568,7 +6568,7 @@
                 </a:solidFill>
                 <a:latin typeface="Source Serif 4"/>
               </a:rPr>
-              <a:t>If a student says "I've always been like this," thank them and point them to a counselor or learning specialist after class. Know ahead of time who that is and how a learning plan conversation starts, so you can answer in one sentence.</a:t>
+              <a:t>Thank them and point them to a counselor or learning specialist after class. That's where a learning plan conversation starts.</a:t>
             </a:r>
           </a:p>
           <a:p>
@@ -7853,6 +7853,45 @@
                 <a:latin typeface="Inter Tight"/>
               </a:rPr>
               <a:t>Beaver Upper School · Counseling</a:t>
+            </a:r>
+          </a:p>
+        </p:txBody>
+      </p:sp>
+      <p:sp>
+        <p:nvSpPr>
+          <p:cNvPr id="8" name="TextBox 7"/>
+          <p:cNvSpPr txBox="1"/>
+          <p:nvPr/>
+        </p:nvSpPr>
+        <p:spPr>
+          <a:xfrm>
+            <a:off x="6766560" y="5897880"/>
+            <a:ext cx="4846320" cy="640080"/>
+          </a:xfrm>
+          <a:prstGeom prst="rect">
+            <a:avLst/>
+          </a:prstGeom>
+          <a:noFill/>
+        </p:spPr>
+        <p:txBody>
+          <a:bodyPr wrap="square" anchor="t" lIns="0" rIns="0" tIns="0" bIns="0">
+            <a:spAutoFit/>
+          </a:bodyPr>
+          <a:lstStyle/>
+          <a:p>
+            <a:pPr algn="r">
+              <a:spcAft>
+                <a:spcPts val="495"/>
+              </a:spcAft>
+            </a:pPr>
+            <a:r>
+              <a:rPr sz="1100" b="0" i="0">
+                <a:solidFill>
+                  <a:srgbClr val="E8E4DA"/>
+                </a:solidFill>
+                <a:latin typeface="Inter Tight"/>
+              </a:rPr>
+              <a:t>Written by Dr. Rick Wilson, with AI-assisted drafting. Every lesson is reviewed and edited by Dr. Wilson.</a:t>
             </a:r>
           </a:p>
         </p:txBody>
